--- a/SIH_2025_PBCOE_Nexora_AABHA_AI.pptx
+++ b/SIH_2025_PBCOE_Nexora_AABHA_AI.pptx
@@ -3108,7 +3108,7 @@
             <a:avLst/>
           </a:prstGeom>
           <a:solidFill>
-            <a:srgbClr val="0F172A"/>
+            <a:srgbClr val="FFFFFF"/>
           </a:solidFill>
           <a:ln>
             <a:noFill/>
@@ -3138,25 +3138,23 @@
       </p:sp>
       <p:sp>
         <p:nvSpPr>
-          <p:cNvPr id="3" name="Rounded Rectangle 2"/>
+          <p:cNvPr id="3" name="Rectangle 2"/>
           <p:cNvSpPr/>
           <p:nvPr/>
         </p:nvSpPr>
         <p:spPr>
           <a:xfrm>
-            <a:off x="731520" y="548640"/>
-            <a:ext cx="10728655" cy="5760720"/>
-          </a:xfrm>
-          <a:prstGeom prst="roundRect">
+            <a:off x="0" y="6309360"/>
+            <a:ext cx="12191695" cy="548640"/>
+          </a:xfrm>
+          <a:prstGeom prst="rect">
             <a:avLst/>
           </a:prstGeom>
           <a:solidFill>
-            <a:srgbClr val="1E293B"/>
+            <a:srgbClr val="0072C6"/>
           </a:solidFill>
-          <a:ln w="25400">
-            <a:solidFill>
-              <a:srgbClr val="10B981"/>
-            </a:solidFill>
+          <a:ln>
+            <a:noFill/>
           </a:ln>
         </p:spPr>
         <p:style>
@@ -3177,20 +3175,53 @@
           <a:bodyPr rtlCol="0" anchor="ctr"/>
           <a:lstStyle/>
           <a:p>
-            <a:pPr algn="ctr"/>
-          </a:p>
-        </p:txBody>
-      </p:sp>
-      <p:sp>
-        <p:nvSpPr>
-          <p:cNvPr id="4" name="TextBox 3"/>
+            <a:pPr algn="ctr">
+              <a:defRPr sz="1100">
+                <a:solidFill>
+                  <a:srgbClr val="FFFFFF"/>
+                </a:solidFill>
+              </a:defRPr>
+            </a:pPr>
+            <a:r>
+              <a:t>@SIH Idea submission- Template                                                                                                                                                 1</a:t>
+            </a:r>
+          </a:p>
+        </p:txBody>
+      </p:sp>
+      <p:pic>
+        <p:nvPicPr>
+          <p:cNvPr id="4" name="Picture 3" descr="sih_logo.png"/>
+          <p:cNvPicPr>
+            <a:picLocks noChangeAspect="1"/>
+          </p:cNvPicPr>
+          <p:nvPr/>
+        </p:nvPicPr>
+        <p:blipFill>
+          <a:blip r:embed="rId2"/>
+          <a:stretch>
+            <a:fillRect/>
+          </a:stretch>
+        </p:blipFill>
+        <p:spPr>
+          <a:xfrm>
+            <a:off x="9692640" y="228600"/>
+            <a:ext cx="2103120" cy="1051560"/>
+          </a:xfrm>
+          <a:prstGeom prst="rect">
+            <a:avLst/>
+          </a:prstGeom>
+        </p:spPr>
+      </p:pic>
+      <p:sp>
+        <p:nvSpPr>
+          <p:cNvPr id="5" name="TextBox 4"/>
           <p:cNvSpPr txBox="1"/>
           <p:nvPr/>
         </p:nvSpPr>
         <p:spPr>
           <a:xfrm>
-            <a:off x="1097280" y="822960"/>
-            <a:ext cx="10058400" cy="1645920"/>
+            <a:off x="1371600" y="320040"/>
+            <a:ext cx="7772400" cy="731520"/>
           </a:xfrm>
           <a:prstGeom prst="rect">
             <a:avLst/>
@@ -3198,343 +3229,287 @@
           <a:noFill/>
         </p:spPr>
         <p:txBody>
+          <a:bodyPr wrap="none">
+            <a:spAutoFit/>
+          </a:bodyPr>
+          <a:lstStyle/>
+          <a:p>
+            <a:pPr algn="ctr">
+              <a:defRPr sz="3000" b="1">
+                <a:solidFill>
+                  <a:srgbClr val="1B3F8B"/>
+                </a:solidFill>
+                <a:latin typeface="Times New Roman"/>
+              </a:defRPr>
+            </a:pPr>
+            <a:r>
+              <a:t>SMART INDIA HACKATHON 2025</a:t>
+            </a:r>
+          </a:p>
+        </p:txBody>
+      </p:sp>
+      <p:sp>
+        <p:nvSpPr>
+          <p:cNvPr id="6" name="TextBox 5"/>
+          <p:cNvSpPr txBox="1"/>
+          <p:nvPr/>
+        </p:nvSpPr>
+        <p:spPr>
+          <a:xfrm>
+            <a:off x="2743200" y="1188720"/>
+            <a:ext cx="5486400" cy="548640"/>
+          </a:xfrm>
+          <a:prstGeom prst="rect">
+            <a:avLst/>
+          </a:prstGeom>
+          <a:noFill/>
+        </p:spPr>
+        <p:txBody>
+          <a:bodyPr wrap="none">
+            <a:spAutoFit/>
+          </a:bodyPr>
+          <a:lstStyle/>
+          <a:p>
+            <a:pPr algn="ctr">
+              <a:defRPr sz="2400" b="1">
+                <a:solidFill>
+                  <a:srgbClr val="000000"/>
+                </a:solidFill>
+                <a:latin typeface="Times New Roman"/>
+              </a:defRPr>
+            </a:pPr>
+            <a:r>
+              <a:t>TITLE PAGE</a:t>
+            </a:r>
+          </a:p>
+        </p:txBody>
+      </p:sp>
+      <p:pic>
+        <p:nvPicPr>
+          <p:cNvPr id="7" name="Picture 6" descr="sih_brain.png"/>
+          <p:cNvPicPr>
+            <a:picLocks noChangeAspect="1"/>
+          </p:cNvPicPr>
+          <p:nvPr/>
+        </p:nvPicPr>
+        <p:blipFill>
+          <a:blip r:embed="rId3"/>
+          <a:stretch>
+            <a:fillRect/>
+          </a:stretch>
+        </p:blipFill>
+        <p:spPr>
+          <a:xfrm>
+            <a:off x="6858000" y="1645920"/>
+            <a:ext cx="4114800" cy="4699150"/>
+          </a:xfrm>
+          <a:prstGeom prst="rect">
+            <a:avLst/>
+          </a:prstGeom>
+        </p:spPr>
+      </p:pic>
+      <p:sp>
+        <p:nvSpPr>
+          <p:cNvPr id="8" name="TextBox 7"/>
+          <p:cNvSpPr txBox="1"/>
+          <p:nvPr/>
+        </p:nvSpPr>
+        <p:spPr>
+          <a:xfrm>
+            <a:off x="731520" y="2011680"/>
+            <a:ext cx="6400800" cy="4114800"/>
+          </a:xfrm>
+          <a:prstGeom prst="rect">
+            <a:avLst/>
+          </a:prstGeom>
+          <a:noFill/>
+        </p:spPr>
+        <p:txBody>
           <a:bodyPr wrap="square">
             <a:spAutoFit/>
           </a:bodyPr>
           <a:lstStyle/>
           <a:p>
             <a:pPr>
-              <a:defRPr sz="1500" b="1">
-                <a:solidFill>
-                  <a:srgbClr val="10B981"/>
-                </a:solidFill>
-              </a:defRPr>
-            </a:pPr>
-            <a:r>
-              <a:t>SMART INDIA HACKATHON 2025</a:t>
-            </a:r>
-          </a:p>
-          <a:p>
-            <a:pPr>
-              <a:defRPr sz="2600" b="1">
-                <a:solidFill>
-                  <a:srgbClr val="FFFFFF"/>
-                </a:solidFill>
-              </a:defRPr>
-            </a:pPr>
-            <a:r>
-              <a:t>AABHA AI (Automated Assistive Behavioral &amp; Health Aide)</a:t>
-            </a:r>
-          </a:p>
-          <a:p>
-            <a:pPr>
-              <a:defRPr sz="1300">
-                <a:solidFill>
-                  <a:srgbClr val="CBD5E1"/>
-                </a:solidFill>
-              </a:defRPr>
-            </a:pPr>
-            <a:r>
-              <a:t>AI-Powered Cognitive Healthcare, Spoken Voice Action Companion &amp; Indian Sign Language Teleconsultation</a:t>
-            </a:r>
-          </a:p>
-        </p:txBody>
-      </p:sp>
-      <p:sp>
-        <p:nvSpPr>
-          <p:cNvPr id="5" name="Rounded Rectangle 4"/>
-          <p:cNvSpPr/>
-          <p:nvPr/>
-        </p:nvSpPr>
-        <p:spPr>
-          <a:xfrm>
-            <a:off x="1097280" y="2651760"/>
-            <a:ext cx="4846320" cy="3291840"/>
-          </a:xfrm>
-          <a:prstGeom prst="roundRect">
-            <a:avLst/>
-          </a:prstGeom>
-          <a:solidFill>
-            <a:srgbClr val="0F172A"/>
-          </a:solidFill>
-          <a:ln>
-            <a:solidFill>
-              <a:srgbClr val="334155"/>
-            </a:solidFill>
-          </a:ln>
-        </p:spPr>
-        <p:style>
-          <a:lnRef idx="1">
-            <a:schemeClr val="accent1"/>
-          </a:lnRef>
-          <a:fillRef idx="3">
-            <a:schemeClr val="accent1"/>
-          </a:fillRef>
-          <a:effectRef idx="2">
-            <a:schemeClr val="accent1"/>
-          </a:effectRef>
-          <a:fontRef idx="minor">
-            <a:schemeClr val="lt1"/>
-          </a:fontRef>
-        </p:style>
-        <p:txBody>
-          <a:bodyPr rtlCol="0" anchor="ctr" wrap="square" lIns="182880" tIns="182880" rIns="182880" bIns="182880"/>
-          <a:lstStyle/>
-          <a:p>
-            <a:pPr algn="ctr">
-              <a:defRPr sz="1100" b="1">
-                <a:solidFill>
-                  <a:srgbClr val="10B981"/>
-                </a:solidFill>
-              </a:defRPr>
-            </a:pPr>
-            <a:r>
-              <a:t>Problem Statement ID:</a:t>
+              <a:spcAft>
+                <a:spcPts val="700"/>
+              </a:spcAft>
+              <a:defRPr sz="1300" b="1">
+                <a:solidFill>
+                  <a:srgbClr val="000000"/>
+                </a:solidFill>
+              </a:defRPr>
+            </a:pPr>
+            <a:r>
+              <a:t>•  Problem Statement ID – </a:t>
+            </a:r>
+            <a:r>
+              <a:rPr sz="1300" b="1">
+                <a:solidFill>
+                  <a:srgbClr val="000000"/>
+                </a:solidFill>
+              </a:rPr>
+              <a:t>SIH26003</a:t>
             </a:r>
           </a:p>
           <a:p>
             <a:pPr>
               <a:spcAft>
-                <a:spcPts val="800"/>
+                <a:spcPts val="700"/>
               </a:spcAft>
-              <a:defRPr sz="1200">
-                <a:solidFill>
-                  <a:srgbClr val="FFFFFF"/>
-                </a:solidFill>
-              </a:defRPr>
-            </a:pPr>
-            <a:r>
-              <a:t>SIH26003</a:t>
-            </a:r>
-          </a:p>
-          <a:p>
-            <a:pPr>
-              <a:defRPr sz="1100" b="1">
-                <a:solidFill>
-                  <a:srgbClr val="10B981"/>
-                </a:solidFill>
-              </a:defRPr>
-            </a:pPr>
-            <a:r>
-              <a:t>Problem Statement Title:</a:t>
+              <a:defRPr sz="1300" b="1">
+                <a:solidFill>
+                  <a:srgbClr val="000000"/>
+                </a:solidFill>
+              </a:defRPr>
+            </a:pPr>
+            <a:r>
+              <a:t>•  Problem Statement Title – </a:t>
+            </a:r>
+            <a:r>
+              <a:rPr sz="1300" b="0">
+                <a:solidFill>
+                  <a:srgbClr val="000000"/>
+                </a:solidFill>
+              </a:rPr>
+              <a:t>AI-Powered Cognitive Healthcare &amp; Assistive Companion for Elderly Dementia Patients</a:t>
             </a:r>
           </a:p>
           <a:p>
             <a:pPr>
               <a:spcAft>
-                <a:spcPts val="800"/>
+                <a:spcPts val="700"/>
               </a:spcAft>
-              <a:defRPr sz="1200">
-                <a:solidFill>
-                  <a:srgbClr val="FFFFFF"/>
-                </a:solidFill>
-              </a:defRPr>
-            </a:pPr>
-            <a:r>
-              <a:t>AI-Powered Assistive Care for Dementia &amp; Elder Care</a:t>
-            </a:r>
-          </a:p>
-          <a:p>
-            <a:pPr>
-              <a:defRPr sz="1100" b="1">
-                <a:solidFill>
-                  <a:srgbClr val="10B981"/>
-                </a:solidFill>
-              </a:defRPr>
-            </a:pPr>
-            <a:r>
-              <a:t>Theme:</a:t>
+              <a:defRPr sz="1300" b="1">
+                <a:solidFill>
+                  <a:srgbClr val="000000"/>
+                </a:solidFill>
+              </a:defRPr>
+            </a:pPr>
+            <a:r>
+              <a:t>•  Theme – </a:t>
+            </a:r>
+            <a:r>
+              <a:rPr sz="1300" b="0">
+                <a:solidFill>
+                  <a:srgbClr val="000000"/>
+                </a:solidFill>
+              </a:rPr>
+              <a:t>MedTech / BioTech / HealthTech / Smart Automation</a:t>
             </a:r>
           </a:p>
           <a:p>
             <a:pPr>
               <a:spcAft>
-                <a:spcPts val="800"/>
+                <a:spcPts val="700"/>
               </a:spcAft>
-              <a:defRPr sz="1200">
-                <a:solidFill>
-                  <a:srgbClr val="FFFFFF"/>
-                </a:solidFill>
-              </a:defRPr>
-            </a:pPr>
-            <a:r>
-              <a:t>MedTech / BioTech / HealthTech / Smart Automation</a:t>
-            </a:r>
-          </a:p>
-          <a:p>
-            <a:pPr>
-              <a:defRPr sz="1100" b="1">
-                <a:solidFill>
-                  <a:srgbClr val="10B981"/>
-                </a:solidFill>
-              </a:defRPr>
-            </a:pPr>
-            <a:r>
-              <a:t>PS Category:</a:t>
+              <a:defRPr sz="1300" b="1">
+                <a:solidFill>
+                  <a:srgbClr val="000000"/>
+                </a:solidFill>
+              </a:defRPr>
+            </a:pPr>
+            <a:r>
+              <a:t>•  PS Category – </a:t>
+            </a:r>
+            <a:r>
+              <a:rPr sz="1300" b="0">
+                <a:solidFill>
+                  <a:srgbClr val="000000"/>
+                </a:solidFill>
+              </a:rPr>
+              <a:t>Software</a:t>
             </a:r>
           </a:p>
           <a:p>
             <a:pPr>
               <a:spcAft>
-                <a:spcPts val="800"/>
+                <a:spcPts val="700"/>
               </a:spcAft>
-              <a:defRPr sz="1200">
-                <a:solidFill>
-                  <a:srgbClr val="FFFFFF"/>
-                </a:solidFill>
-              </a:defRPr>
-            </a:pPr>
-            <a:r>
-              <a:t>Software (Web, Mobile &amp; Edge AI)</a:t>
-            </a:r>
-          </a:p>
-        </p:txBody>
-      </p:sp>
-      <p:sp>
-        <p:nvSpPr>
-          <p:cNvPr id="6" name="Rounded Rectangle 5"/>
-          <p:cNvSpPr/>
-          <p:nvPr/>
-        </p:nvSpPr>
-        <p:spPr>
-          <a:xfrm>
-            <a:off x="6217920" y="2651760"/>
-            <a:ext cx="4846320" cy="3291840"/>
-          </a:xfrm>
-          <a:prstGeom prst="roundRect">
-            <a:avLst/>
-          </a:prstGeom>
-          <a:solidFill>
-            <a:srgbClr val="0F172A"/>
-          </a:solidFill>
-          <a:ln>
-            <a:solidFill>
-              <a:srgbClr val="334155"/>
-            </a:solidFill>
-          </a:ln>
-        </p:spPr>
-        <p:style>
-          <a:lnRef idx="1">
-            <a:schemeClr val="accent1"/>
-          </a:lnRef>
-          <a:fillRef idx="3">
-            <a:schemeClr val="accent1"/>
-          </a:fillRef>
-          <a:effectRef idx="2">
-            <a:schemeClr val="accent1"/>
-          </a:effectRef>
-          <a:fontRef idx="minor">
-            <a:schemeClr val="lt1"/>
-          </a:fontRef>
-        </p:style>
-        <p:txBody>
-          <a:bodyPr rtlCol="0" anchor="ctr" wrap="square" lIns="182880" tIns="182880" rIns="182880" bIns="182880"/>
-          <a:lstStyle/>
-          <a:p>
-            <a:pPr algn="ctr">
-              <a:defRPr sz="1100" b="1">
-                <a:solidFill>
-                  <a:srgbClr val="06B6D4"/>
-                </a:solidFill>
-              </a:defRPr>
-            </a:pPr>
-            <a:r>
-              <a:t>Team Name (Registered):</a:t>
+              <a:defRPr sz="1300" b="1">
+                <a:solidFill>
+                  <a:srgbClr val="000000"/>
+                </a:solidFill>
+              </a:defRPr>
+            </a:pPr>
+            <a:r>
+              <a:t>•  Team ID – </a:t>
+            </a:r>
+            <a:r>
+              <a:rPr sz="1300" b="0">
+                <a:solidFill>
+                  <a:srgbClr val="000000"/>
+                </a:solidFill>
+              </a:rPr>
+              <a:t>[Enter Your Registered Team ID]</a:t>
             </a:r>
           </a:p>
           <a:p>
             <a:pPr>
               <a:spcAft>
-                <a:spcPts val="800"/>
+                <a:spcPts val="700"/>
               </a:spcAft>
-              <a:defRPr sz="1200" b="1">
-                <a:solidFill>
-                  <a:srgbClr val="FFFFFF"/>
-                </a:solidFill>
-              </a:defRPr>
-            </a:pPr>
-            <a:r>
+              <a:defRPr sz="1300" b="1">
+                <a:solidFill>
+                  <a:srgbClr val="000000"/>
+                </a:solidFill>
+              </a:defRPr>
+            </a:pPr>
+            <a:r>
+              <a:t>•  Team Name (Registered on portal) – </a:t>
+            </a:r>
+            <a:r>
+              <a:rPr sz="1300" b="1">
+                <a:solidFill>
+                  <a:srgbClr val="000000"/>
+                </a:solidFill>
+              </a:rPr>
               <a:t>PBCOE-Nexora</a:t>
-            </a:r>
-          </a:p>
-          <a:p>
-            <a:pPr>
-              <a:defRPr sz="1100" b="1">
-                <a:solidFill>
-                  <a:srgbClr val="06B6D4"/>
-                </a:solidFill>
-              </a:defRPr>
-            </a:pPr>
-            <a:r>
-              <a:t>Team ID:</a:t>
             </a:r>
           </a:p>
           <a:p>
             <a:pPr>
               <a:spcAft>
-                <a:spcPts val="800"/>
+                <a:spcPts val="700"/>
               </a:spcAft>
-              <a:defRPr sz="1200" b="0">
-                <a:solidFill>
-                  <a:srgbClr val="FFFFFF"/>
-                </a:solidFill>
-              </a:defRPr>
-            </a:pPr>
-            <a:r>
-              <a:t>[Enter Your Registered Team ID]</a:t>
-            </a:r>
-          </a:p>
-          <a:p>
-            <a:pPr>
-              <a:defRPr sz="1100" b="1">
-                <a:solidFill>
-                  <a:srgbClr val="06B6D4"/>
-                </a:solidFill>
-              </a:defRPr>
-            </a:pPr>
-            <a:r>
-              <a:t>Live Web Application Link:</a:t>
+              <a:defRPr sz="1300" b="1">
+                <a:solidFill>
+                  <a:srgbClr val="000000"/>
+                </a:solidFill>
+              </a:defRPr>
+            </a:pPr>
+            <a:r>
+              <a:t>•  Live Web App Link – </a:t>
+            </a:r>
+            <a:r>
+              <a:rPr sz="1300" b="1">
+                <a:solidFill>
+                  <a:srgbClr val="1B3F8B"/>
+                </a:solidFill>
+              </a:rPr>
+              <a:t>https://aabha-ai.vercel.app</a:t>
             </a:r>
           </a:p>
           <a:p>
             <a:pPr>
               <a:spcAft>
-                <a:spcPts val="800"/>
+                <a:spcPts val="700"/>
               </a:spcAft>
-              <a:defRPr sz="1200" b="0">
-                <a:solidFill>
-                  <a:srgbClr val="FFFFFF"/>
-                </a:solidFill>
-              </a:defRPr>
-            </a:pPr>
-            <a:r>
-              <a:t>https://aabha-ai.vercel.app</a:t>
-            </a:r>
-          </a:p>
-          <a:p>
-            <a:pPr>
-              <a:defRPr sz="1100" b="1">
-                <a:solidFill>
-                  <a:srgbClr val="06B6D4"/>
-                </a:solidFill>
-              </a:defRPr>
-            </a:pPr>
-            <a:r>
-              <a:t>GitHub Repository URL:</a:t>
-            </a:r>
-          </a:p>
-          <a:p>
-            <a:pPr>
-              <a:spcAft>
-                <a:spcPts val="800"/>
-              </a:spcAft>
-              <a:defRPr sz="1200" b="0">
-                <a:solidFill>
-                  <a:srgbClr val="FFFFFF"/>
-                </a:solidFill>
-              </a:defRPr>
-            </a:pPr>
-            <a:r>
+              <a:defRPr sz="1300" b="1">
+                <a:solidFill>
+                  <a:srgbClr val="000000"/>
+                </a:solidFill>
+              </a:defRPr>
+            </a:pPr>
+            <a:r>
+              <a:t>•  GitHub Source Code – </a:t>
+            </a:r>
+            <a:r>
+              <a:rPr sz="1300" b="0">
+                <a:solidFill>
+                  <a:srgbClr val="000000"/>
+                </a:solidFill>
+              </a:rPr>
               <a:t>https://github.com/swayamgulhane538/Aabha-ai</a:t>
             </a:r>
           </a:p>
@@ -3573,7 +3548,7 @@
             <a:avLst/>
           </a:prstGeom>
           <a:solidFill>
-            <a:srgbClr val="0F172A"/>
+            <a:srgbClr val="FFFFFF"/>
           </a:solidFill>
           <a:ln>
             <a:noFill/>
@@ -3603,72 +3578,23 @@
       </p:sp>
       <p:sp>
         <p:nvSpPr>
-          <p:cNvPr id="3" name="TextBox 2"/>
-          <p:cNvSpPr txBox="1"/>
+          <p:cNvPr id="3" name="Rectangle 2"/>
+          <p:cNvSpPr/>
           <p:nvPr/>
         </p:nvSpPr>
         <p:spPr>
           <a:xfrm>
-            <a:off x="731520" y="365760"/>
-            <a:ext cx="10698480" cy="822960"/>
+            <a:off x="0" y="6309360"/>
+            <a:ext cx="12191695" cy="548640"/>
           </a:xfrm>
           <a:prstGeom prst="rect">
             <a:avLst/>
           </a:prstGeom>
-          <a:noFill/>
-        </p:spPr>
-        <p:txBody>
-          <a:bodyPr wrap="square" lIns="0" tIns="0" rIns="0" bIns="0">
-            <a:spAutoFit/>
-          </a:bodyPr>
-          <a:lstStyle/>
-          <a:p>
-            <a:pPr>
-              <a:defRPr sz="1100" b="1">
-                <a:solidFill>
-                  <a:srgbClr val="10B981"/>
-                </a:solidFill>
-              </a:defRPr>
-            </a:pPr>
-            <a:r>
-              <a:t>SIH 2025 IDEA SUBMISSION</a:t>
-            </a:r>
-          </a:p>
-          <a:p>
-            <a:pPr>
-              <a:defRPr sz="2200" b="1">
-                <a:solidFill>
-                  <a:srgbClr val="FFFFFF"/>
-                </a:solidFill>
-              </a:defRPr>
-            </a:pPr>
-            <a:r>
-              <a:t>PROPOSED SOLUTION (Idea / Solution / Prototype)</a:t>
-            </a:r>
-          </a:p>
-        </p:txBody>
-      </p:sp>
-      <p:sp>
-        <p:nvSpPr>
-          <p:cNvPr id="4" name="Rounded Rectangle 3"/>
-          <p:cNvSpPr/>
-          <p:nvPr/>
-        </p:nvSpPr>
-        <p:spPr>
-          <a:xfrm>
-            <a:off x="9601200" y="365760"/>
-            <a:ext cx="1828800" cy="594360"/>
-          </a:xfrm>
-          <a:prstGeom prst="roundRect">
-            <a:avLst/>
-          </a:prstGeom>
           <a:solidFill>
-            <a:srgbClr val="1E293B"/>
+            <a:srgbClr val="0072C6"/>
           </a:solidFill>
-          <a:ln w="19050">
-            <a:solidFill>
-              <a:srgbClr val="10B981"/>
-            </a:solidFill>
+          <a:ln>
+            <a:noFill/>
           </a:ln>
         </p:spPr>
         <p:style>
@@ -3690,38 +3616,62 @@
           <a:lstStyle/>
           <a:p>
             <a:pPr algn="ctr">
-              <a:defRPr sz="1100" b="1">
+              <a:defRPr sz="1100">
                 <a:solidFill>
                   <a:srgbClr val="FFFFFF"/>
                 </a:solidFill>
               </a:defRPr>
             </a:pPr>
             <a:r>
-              <a:t>Team: PBCOE-Nexora</a:t>
-            </a:r>
-          </a:p>
-        </p:txBody>
-      </p:sp>
-      <p:sp>
-        <p:nvSpPr>
-          <p:cNvPr id="5" name="Rounded Rectangle 4"/>
+              <a:t>@SIH Idea submission- Template                                                                                                                                                 2</a:t>
+            </a:r>
+          </a:p>
+        </p:txBody>
+      </p:sp>
+      <p:pic>
+        <p:nvPicPr>
+          <p:cNvPr id="4" name="Picture 3" descr="sih_logo.png"/>
+          <p:cNvPicPr>
+            <a:picLocks noChangeAspect="1"/>
+          </p:cNvPicPr>
+          <p:nvPr/>
+        </p:nvPicPr>
+        <p:blipFill>
+          <a:blip r:embed="rId2"/>
+          <a:stretch>
+            <a:fillRect/>
+          </a:stretch>
+        </p:blipFill>
+        <p:spPr>
+          <a:xfrm>
+            <a:off x="9692640" y="228600"/>
+            <a:ext cx="2103120" cy="1051560"/>
+          </a:xfrm>
+          <a:prstGeom prst="rect">
+            <a:avLst/>
+          </a:prstGeom>
+        </p:spPr>
+      </p:pic>
+      <p:sp>
+        <p:nvSpPr>
+          <p:cNvPr id="5" name="Oval 4"/>
           <p:cNvSpPr/>
           <p:nvPr/>
         </p:nvSpPr>
         <p:spPr>
           <a:xfrm>
-            <a:off x="731520" y="1371600"/>
-            <a:ext cx="3429000" cy="2011680"/>
-          </a:xfrm>
-          <a:prstGeom prst="roundRect">
+            <a:off x="731520" y="320040"/>
+            <a:ext cx="1645920" cy="914400"/>
+          </a:xfrm>
+          <a:prstGeom prst="ellipse">
             <a:avLst/>
           </a:prstGeom>
           <a:solidFill>
-            <a:srgbClr val="1E293B"/>
+            <a:srgbClr val="FFFFFF"/>
           </a:solidFill>
-          <a:ln w="19050">
+          <a:ln w="25400">
             <a:solidFill>
-              <a:srgbClr val="10B981"/>
+              <a:srgbClr val="7030A0"/>
             </a:solidFill>
           </a:ln>
         </p:spPr>
@@ -3740,57 +3690,184 @@
           </a:fontRef>
         </p:style>
         <p:txBody>
-          <a:bodyPr rtlCol="0" anchor="ctr" wrap="square" lIns="164592" tIns="164592" rIns="164592" bIns="164592"/>
+          <a:bodyPr rtlCol="0" anchor="ctr"/>
           <a:lstStyle/>
           <a:p>
             <a:pPr algn="ctr">
+              <a:defRPr sz="1000">
+                <a:solidFill>
+                  <a:srgbClr val="000000"/>
+                </a:solidFill>
+              </a:defRPr>
+            </a:pPr>
+            <a:r>
+              <a:t>Team:</a:t>
+            </a:r>
+          </a:p>
+          <a:p>
+            <a:pPr algn="ctr">
+              <a:defRPr sz="1100" b="1">
+                <a:solidFill>
+                  <a:srgbClr val="7030A0"/>
+                </a:solidFill>
+              </a:defRPr>
+            </a:pPr>
+            <a:r>
+              <a:t>PBCOE-Nexora</a:t>
+            </a:r>
+          </a:p>
+        </p:txBody>
+      </p:sp>
+      <p:sp>
+        <p:nvSpPr>
+          <p:cNvPr id="6" name="TextBox 5"/>
+          <p:cNvSpPr txBox="1"/>
+          <p:nvPr/>
+        </p:nvSpPr>
+        <p:spPr>
+          <a:xfrm>
+            <a:off x="2560320" y="320040"/>
+            <a:ext cx="6858000" cy="822960"/>
+          </a:xfrm>
+          <a:prstGeom prst="rect">
+            <a:avLst/>
+          </a:prstGeom>
+          <a:noFill/>
+        </p:spPr>
+        <p:txBody>
+          <a:bodyPr wrap="none">
+            <a:spAutoFit/>
+          </a:bodyPr>
+          <a:lstStyle/>
+          <a:p>
+            <a:pPr algn="ctr">
+              <a:defRPr sz="2400" b="1">
+                <a:solidFill>
+                  <a:srgbClr val="000000"/>
+                </a:solidFill>
+                <a:latin typeface="Calibri"/>
+              </a:defRPr>
+            </a:pPr>
+            <a:r>
+              <a:t>AABHA AI (Assistive Healthcare Companion)</a:t>
+            </a:r>
+          </a:p>
+        </p:txBody>
+      </p:sp>
+      <p:sp>
+        <p:nvSpPr>
+          <p:cNvPr id="7" name="TextBox 6"/>
+          <p:cNvSpPr txBox="1"/>
+          <p:nvPr/>
+        </p:nvSpPr>
+        <p:spPr>
+          <a:xfrm>
+            <a:off x="731520" y="1097280"/>
+            <a:ext cx="10698480" cy="457200"/>
+          </a:xfrm>
+          <a:prstGeom prst="rect">
+            <a:avLst/>
+          </a:prstGeom>
+          <a:noFill/>
+        </p:spPr>
+        <p:txBody>
+          <a:bodyPr wrap="none">
+            <a:spAutoFit/>
+          </a:bodyPr>
+          <a:lstStyle/>
+          <a:p>
+            <a:pPr>
+              <a:defRPr sz="1600" b="1" u="sng">
+                <a:solidFill>
+                  <a:srgbClr val="0E5BAF"/>
+                </a:solidFill>
+              </a:defRPr>
+            </a:pPr>
+            <a:r>
+              <a:t>❖ Proposed Solution (Describe your Idea/Solution/Prototype)</a:t>
+            </a:r>
+          </a:p>
+        </p:txBody>
+      </p:sp>
+      <p:sp>
+        <p:nvSpPr>
+          <p:cNvPr id="8" name="TextBox 7"/>
+          <p:cNvSpPr txBox="1"/>
+          <p:nvPr/>
+        </p:nvSpPr>
+        <p:spPr>
+          <a:xfrm>
+            <a:off x="731520" y="1554480"/>
+            <a:ext cx="10698480" cy="2011680"/>
+          </a:xfrm>
+          <a:prstGeom prst="rect">
+            <a:avLst/>
+          </a:prstGeom>
+          <a:noFill/>
+        </p:spPr>
+        <p:txBody>
+          <a:bodyPr wrap="square">
+            <a:spAutoFit/>
+          </a:bodyPr>
+          <a:lstStyle/>
+          <a:p>
+            <a:pPr>
               <a:defRPr sz="1300" b="1">
                 <a:solidFill>
-                  <a:srgbClr val="FFFFFF"/>
-                </a:solidFill>
-              </a:defRPr>
-            </a:pPr>
-            <a:r>
-              <a:t>🎙️ AI Action Agent (Gemini 3.7 / 2.5)</a:t>
+                  <a:srgbClr val="000000"/>
+                </a:solidFill>
+              </a:defRPr>
+            </a:pPr>
+            <a:r>
+              <a:t>•  Detailed explanation of the proposed solution:</a:t>
             </a:r>
           </a:p>
           <a:p>
             <a:pPr>
-              <a:spcBef>
-                <a:spcPts val="600"/>
-              </a:spcBef>
-              <a:defRPr sz="1100">
-                <a:solidFill>
-                  <a:srgbClr val="CBD5E1"/>
-                </a:solidFill>
-              </a:defRPr>
-            </a:pPr>
-            <a:r>
-              <a:t>Executes real CRUD operations via voice in Hindi, Marathi &amp; English. Creates, modifies, and deletes alarms in real-time.</a:t>
-            </a:r>
-          </a:p>
-        </p:txBody>
-      </p:sp>
-      <p:sp>
-        <p:nvSpPr>
-          <p:cNvPr id="6" name="Rounded Rectangle 5"/>
+              <a:defRPr sz="1200">
+                <a:solidFill>
+                  <a:srgbClr val="000000"/>
+                </a:solidFill>
+              </a:defRPr>
+            </a:pPr>
+            <a:r>
+              <a:t>   - AABHA AI is an intelligent, voice-first assistive platform for dementia/Alzheimer's patients, caregivers, and deaf &amp; mute individuals.</a:t>
+            </a:r>
+          </a:p>
+          <a:p>
+            <a:pPr>
+              <a:defRPr sz="1200">
+                <a:solidFill>
+                  <a:srgbClr val="000000"/>
+                </a:solidFill>
+              </a:defRPr>
+            </a:pPr>
+            <a:r>
+              <a:t>   - Features: Google Gemini 3.7/2.5 AI Action Agent (executes real CRUD commands in Hindi/Marathi/English), Spoken Voice Alarms with temple bells/vibration, SignBridge (ISL 21-point hand tracking teleconsultation), and Memory Passport.</a:t>
+            </a:r>
+          </a:p>
+        </p:txBody>
+      </p:sp>
+      <p:sp>
+        <p:nvSpPr>
+          <p:cNvPr id="9" name="Rounded Rectangle 8"/>
           <p:cNvSpPr/>
           <p:nvPr/>
         </p:nvSpPr>
         <p:spPr>
           <a:xfrm>
-            <a:off x="4389120" y="1371600"/>
-            <a:ext cx="3429000" cy="2011680"/>
+            <a:off x="731520" y="3291840"/>
+            <a:ext cx="2514600" cy="1280160"/>
           </a:xfrm>
           <a:prstGeom prst="roundRect">
             <a:avLst/>
           </a:prstGeom>
           <a:solidFill>
-            <a:srgbClr val="1E293B"/>
+            <a:srgbClr val="F8FAFC"/>
           </a:solidFill>
           <a:ln w="19050">
             <a:solidFill>
-              <a:srgbClr val="06B6D4"/>
+              <a:srgbClr val="0E5BAF"/>
             </a:solidFill>
           </a:ln>
         </p:spPr>
@@ -3809,57 +3886,57 @@
           </a:fontRef>
         </p:style>
         <p:txBody>
-          <a:bodyPr rtlCol="0" anchor="ctr" wrap="square" lIns="164592" tIns="164592" rIns="164592" bIns="164592"/>
+          <a:bodyPr rtlCol="0" anchor="ctr" wrap="square" tIns="91440" bIns="91440"/>
           <a:lstStyle/>
           <a:p>
             <a:pPr algn="ctr">
-              <a:defRPr sz="1300" b="1">
-                <a:solidFill>
-                  <a:srgbClr val="FFFFFF"/>
-                </a:solidFill>
-              </a:defRPr>
-            </a:pPr>
-            <a:r>
-              <a:t>⏰ Spoken Voice Alarms &amp; Memory</a:t>
-            </a:r>
-          </a:p>
-          <a:p>
-            <a:pPr>
+              <a:defRPr sz="1100" b="1">
+                <a:solidFill>
+                  <a:srgbClr val="0E5BAF"/>
+                </a:solidFill>
+              </a:defRPr>
+            </a:pPr>
+            <a:r>
+              <a:t>Patient / Elderly Input</a:t>
+            </a:r>
+          </a:p>
+          <a:p>
+            <a:pPr algn="ctr">
               <a:spcBef>
-                <a:spcPts val="600"/>
+                <a:spcPts val="300"/>
               </a:spcBef>
-              <a:defRPr sz="1100">
-                <a:solidFill>
-                  <a:srgbClr val="CBD5E1"/>
-                </a:solidFill>
-              </a:defRPr>
-            </a:pPr>
-            <a:r>
-              <a:t>Personalized spoken reminders with family voice tones, custom temple bells, vibration, and multi-turn contextual memory.</a:t>
-            </a:r>
-          </a:p>
-        </p:txBody>
-      </p:sp>
-      <p:sp>
-        <p:nvSpPr>
-          <p:cNvPr id="7" name="Rounded Rectangle 6"/>
+              <a:defRPr sz="1000">
+                <a:solidFill>
+                  <a:srgbClr val="475569"/>
+                </a:solidFill>
+              </a:defRPr>
+            </a:pPr>
+            <a:r>
+              <a:t>Voice Speech (HI/MR/EN) or 1-Tap UI Cards</a:t>
+            </a:r>
+          </a:p>
+        </p:txBody>
+      </p:sp>
+      <p:sp>
+        <p:nvSpPr>
+          <p:cNvPr id="10" name="Rounded Rectangle 9"/>
           <p:cNvSpPr/>
           <p:nvPr/>
         </p:nvSpPr>
         <p:spPr>
           <a:xfrm>
-            <a:off x="8046720" y="1371600"/>
-            <a:ext cx="3429000" cy="2011680"/>
+            <a:off x="3429000" y="3291840"/>
+            <a:ext cx="2514600" cy="1280160"/>
           </a:xfrm>
           <a:prstGeom prst="roundRect">
             <a:avLst/>
           </a:prstGeom>
           <a:solidFill>
-            <a:srgbClr val="1E293B"/>
+            <a:srgbClr val="F8FAFC"/>
           </a:solidFill>
           <a:ln w="19050">
             <a:solidFill>
-              <a:srgbClr val="A855F7"/>
+              <a:srgbClr val="7030A0"/>
             </a:solidFill>
           </a:ln>
         </p:spPr>
@@ -3878,92 +3955,57 @@
           </a:fontRef>
         </p:style>
         <p:txBody>
-          <a:bodyPr rtlCol="0" anchor="ctr" wrap="square" lIns="164592" tIns="164592" rIns="164592" bIns="164592"/>
+          <a:bodyPr rtlCol="0" anchor="ctr" wrap="square" tIns="91440" bIns="91440"/>
           <a:lstStyle/>
           <a:p>
             <a:pPr algn="ctr">
-              <a:defRPr sz="1300" b="1">
-                <a:solidFill>
-                  <a:srgbClr val="FFFFFF"/>
-                </a:solidFill>
-              </a:defRPr>
-            </a:pPr>
-            <a:r>
-              <a:t>🤟 SignBridge (ISL Teleconsultation)</a:t>
-            </a:r>
-          </a:p>
-          <a:p>
-            <a:pPr>
+              <a:defRPr sz="1100" b="1">
+                <a:solidFill>
+                  <a:srgbClr val="7030A0"/>
+                </a:solidFill>
+              </a:defRPr>
+            </a:pPr>
+            <a:r>
+              <a:t>Gemini AI Action Engine</a:t>
+            </a:r>
+          </a:p>
+          <a:p>
+            <a:pPr algn="ctr">
               <a:spcBef>
-                <a:spcPts val="600"/>
+                <a:spcPts val="300"/>
               </a:spcBef>
-              <a:defRPr sz="1100">
-                <a:solidFill>
-                  <a:srgbClr val="CBD5E1"/>
-                </a:solidFill>
-              </a:defRPr>
-            </a:pPr>
-            <a:r>
-              <a:t>MediaPipe 21-point hand tracking for real-time Indian Sign Language to speech translation for deaf &amp; mute patients.</a:t>
-            </a:r>
-          </a:p>
-        </p:txBody>
-      </p:sp>
-      <p:sp>
-        <p:nvSpPr>
-          <p:cNvPr id="8" name="TextBox 7"/>
-          <p:cNvSpPr txBox="1"/>
-          <p:nvPr/>
-        </p:nvSpPr>
-        <p:spPr>
-          <a:xfrm>
-            <a:off x="731520" y="3566160"/>
-            <a:ext cx="10698480" cy="365760"/>
-          </a:xfrm>
-          <a:prstGeom prst="rect">
-            <a:avLst/>
-          </a:prstGeom>
-          <a:noFill/>
-        </p:spPr>
-        <p:txBody>
-          <a:bodyPr wrap="none">
-            <a:spAutoFit/>
-          </a:bodyPr>
-          <a:lstStyle/>
-          <a:p>
-            <a:pPr>
-              <a:defRPr sz="1200" b="1">
-                <a:solidFill>
-                  <a:srgbClr val="10B981"/>
-                </a:solidFill>
-              </a:defRPr>
-            </a:pPr>
-            <a:r>
-              <a:t>SOLUTION WORKFLOW &amp; ECOSYSTEM FLOWCHART</a:t>
-            </a:r>
-          </a:p>
-        </p:txBody>
-      </p:sp>
-      <p:sp>
-        <p:nvSpPr>
-          <p:cNvPr id="9" name="Rounded Rectangle 8"/>
+              <a:defRPr sz="1000">
+                <a:solidFill>
+                  <a:srgbClr val="475569"/>
+                </a:solidFill>
+              </a:defRPr>
+            </a:pPr>
+            <a:r>
+              <a:t>Zero-Hallucination Intent &amp; Entity Extraction</a:t>
+            </a:r>
+          </a:p>
+        </p:txBody>
+      </p:sp>
+      <p:sp>
+        <p:nvSpPr>
+          <p:cNvPr id="11" name="Rounded Rectangle 10"/>
           <p:cNvSpPr/>
           <p:nvPr/>
         </p:nvSpPr>
         <p:spPr>
           <a:xfrm>
-            <a:off x="731520" y="4023360"/>
-            <a:ext cx="2514600" cy="1645920"/>
+            <a:off x="6126480" y="3291840"/>
+            <a:ext cx="2514600" cy="1280160"/>
           </a:xfrm>
           <a:prstGeom prst="roundRect">
             <a:avLst/>
           </a:prstGeom>
           <a:solidFill>
-            <a:srgbClr val="0F172A"/>
+            <a:srgbClr val="F8FAFC"/>
           </a:solidFill>
           <a:ln w="19050">
             <a:solidFill>
-              <a:srgbClr val="10B981"/>
+              <a:srgbClr val="109566"/>
             </a:solidFill>
           </a:ln>
         </p:spPr>
@@ -3982,57 +4024,57 @@
           </a:fontRef>
         </p:style>
         <p:txBody>
-          <a:bodyPr rtlCol="0" anchor="ctr" wrap="square" lIns="109728" tIns="109728" rIns="109728" bIns="109728"/>
+          <a:bodyPr rtlCol="0" anchor="ctr" wrap="square" tIns="91440" bIns="91440"/>
           <a:lstStyle/>
           <a:p>
             <a:pPr algn="ctr">
               <a:defRPr sz="1100" b="1">
                 <a:solidFill>
-                  <a:srgbClr val="10B981"/>
-                </a:solidFill>
-              </a:defRPr>
-            </a:pPr>
-            <a:r>
-              <a:t>1. User Voice / Sign Input</a:t>
-            </a:r>
-          </a:p>
-          <a:p>
-            <a:pPr>
+                  <a:srgbClr val="109566"/>
+                </a:solidFill>
+              </a:defRPr>
+            </a:pPr>
+            <a:r>
+              <a:t>Database &amp; Alarm State</a:t>
+            </a:r>
+          </a:p>
+          <a:p>
+            <a:pPr algn="ctr">
               <a:spcBef>
-                <a:spcPts val="400"/>
+                <a:spcPts val="300"/>
               </a:spcBef>
               <a:defRPr sz="1000">
                 <a:solidFill>
-                  <a:srgbClr val="CBD5E1"/>
-                </a:solidFill>
-              </a:defRPr>
-            </a:pPr>
-            <a:r>
-              <a:t>Hindi/Marathi/English speech or Camera ISL gestures</a:t>
-            </a:r>
-          </a:p>
-        </p:txBody>
-      </p:sp>
-      <p:sp>
-        <p:nvSpPr>
-          <p:cNvPr id="10" name="Rounded Rectangle 9"/>
+                  <a:srgbClr val="475569"/>
+                </a:solidFill>
+              </a:defRPr>
+            </a:pPr>
+            <a:r>
+              <a:t>PostgreSQL + Offline IndexedDB Sync</a:t>
+            </a:r>
+          </a:p>
+        </p:txBody>
+      </p:sp>
+      <p:sp>
+        <p:nvSpPr>
+          <p:cNvPr id="12" name="Rounded Rectangle 11"/>
           <p:cNvSpPr/>
           <p:nvPr/>
         </p:nvSpPr>
         <p:spPr>
           <a:xfrm>
-            <a:off x="3429000" y="4023360"/>
-            <a:ext cx="2514600" cy="1645920"/>
+            <a:off x="8823960" y="3291840"/>
+            <a:ext cx="2514600" cy="1280160"/>
           </a:xfrm>
           <a:prstGeom prst="roundRect">
             <a:avLst/>
           </a:prstGeom>
           <a:solidFill>
-            <a:srgbClr val="0F172A"/>
+            <a:srgbClr val="F8FAFC"/>
           </a:solidFill>
           <a:ln w="19050">
             <a:solidFill>
-              <a:srgbClr val="3B82F6"/>
+              <a:srgbClr val="0072C6"/>
             </a:solidFill>
           </a:ln>
         </p:spPr>
@@ -4051,225 +4093,107 @@
           </a:fontRef>
         </p:style>
         <p:txBody>
-          <a:bodyPr rtlCol="0" anchor="ctr" wrap="square" lIns="109728" tIns="109728" rIns="109728" bIns="109728"/>
+          <a:bodyPr rtlCol="0" anchor="ctr" wrap="square" tIns="91440" bIns="91440"/>
           <a:lstStyle/>
           <a:p>
             <a:pPr algn="ctr">
               <a:defRPr sz="1100" b="1">
                 <a:solidFill>
-                  <a:srgbClr val="3B82F6"/>
-                </a:solidFill>
-              </a:defRPr>
-            </a:pPr>
-            <a:r>
-              <a:t>2. AI Action &amp; NLU Engine</a:t>
-            </a:r>
-          </a:p>
-          <a:p>
-            <a:pPr>
+                  <a:srgbClr val="0072C6"/>
+                </a:solidFill>
+              </a:defRPr>
+            </a:pPr>
+            <a:r>
+              <a:t>Verified Output &amp; Caregiver</a:t>
+            </a:r>
+          </a:p>
+          <a:p>
+            <a:pPr algn="ctr">
               <a:spcBef>
-                <a:spcPts val="400"/>
+                <a:spcPts val="300"/>
               </a:spcBef>
               <a:defRPr sz="1000">
                 <a:solidFill>
-                  <a:srgbClr val="CBD5E1"/>
-                </a:solidFill>
-              </a:defRPr>
-            </a:pPr>
-            <a:r>
-              <a:t>Gemini 3.7 / 2.5 parses intent &amp; extracts parameters</a:t>
-            </a:r>
-          </a:p>
-        </p:txBody>
-      </p:sp>
-      <p:sp>
-        <p:nvSpPr>
-          <p:cNvPr id="11" name="Rounded Rectangle 10"/>
-          <p:cNvSpPr/>
+                  <a:srgbClr val="475569"/>
+                </a:solidFill>
+              </a:defRPr>
+            </a:pPr>
+            <a:r>
+              <a:t>Spoken Voice TTS + Dashboard Realtime Sync</a:t>
+            </a:r>
+          </a:p>
+        </p:txBody>
+      </p:sp>
+      <p:sp>
+        <p:nvSpPr>
+          <p:cNvPr id="13" name="TextBox 12"/>
+          <p:cNvSpPr txBox="1"/>
           <p:nvPr/>
         </p:nvSpPr>
         <p:spPr>
           <a:xfrm>
-            <a:off x="6126480" y="4023360"/>
-            <a:ext cx="2514600" cy="1645920"/>
-          </a:xfrm>
-          <a:prstGeom prst="roundRect">
+            <a:off x="731520" y="4663440"/>
+            <a:ext cx="10698480" cy="1554480"/>
+          </a:xfrm>
+          <a:prstGeom prst="rect">
             <a:avLst/>
           </a:prstGeom>
-          <a:solidFill>
-            <a:srgbClr val="0F172A"/>
-          </a:solidFill>
-          <a:ln w="19050">
-            <a:solidFill>
-              <a:srgbClr val="A855F7"/>
-            </a:solidFill>
-          </a:ln>
-        </p:spPr>
-        <p:style>
-          <a:lnRef idx="1">
-            <a:schemeClr val="accent1"/>
-          </a:lnRef>
-          <a:fillRef idx="3">
-            <a:schemeClr val="accent1"/>
-          </a:fillRef>
-          <a:effectRef idx="2">
-            <a:schemeClr val="accent1"/>
-          </a:effectRef>
-          <a:fontRef idx="minor">
-            <a:schemeClr val="lt1"/>
-          </a:fontRef>
-        </p:style>
-        <p:txBody>
-          <a:bodyPr rtlCol="0" anchor="ctr" wrap="square" lIns="109728" tIns="109728" rIns="109728" bIns="109728"/>
-          <a:lstStyle/>
-          <a:p>
-            <a:pPr algn="ctr">
-              <a:defRPr sz="1100" b="1">
-                <a:solidFill>
-                  <a:srgbClr val="A855F7"/>
-                </a:solidFill>
-              </a:defRPr>
-            </a:pPr>
-            <a:r>
-              <a:t>3. Real Database Execution</a:t>
-            </a:r>
-          </a:p>
+          <a:noFill/>
+        </p:spPr>
+        <p:txBody>
+          <a:bodyPr wrap="square">
+            <a:spAutoFit/>
+          </a:bodyPr>
+          <a:lstStyle/>
           <a:p>
             <a:pPr>
-              <a:spcBef>
+              <a:defRPr sz="1300" b="1">
+                <a:solidFill>
+                  <a:srgbClr val="000000"/>
+                </a:solidFill>
+              </a:defRPr>
+            </a:pPr>
+            <a:r>
+              <a:t>•  How it addresses the problem:</a:t>
+            </a:r>
+          </a:p>
+          <a:p>
+            <a:pPr>
+              <a:spcAft>
                 <a:spcPts val="400"/>
-              </a:spcBef>
-              <a:defRPr sz="1000">
-                <a:solidFill>
-                  <a:srgbClr val="CBD5E1"/>
-                </a:solidFill>
-              </a:defRPr>
-            </a:pPr>
-            <a:r>
-              <a:t>Prisma PostgreSQL &amp; Offline IndexedDB update</a:t>
-            </a:r>
-          </a:p>
-        </p:txBody>
-      </p:sp>
-      <p:sp>
-        <p:nvSpPr>
-          <p:cNvPr id="12" name="Rounded Rectangle 11"/>
-          <p:cNvSpPr/>
-          <p:nvPr/>
-        </p:nvSpPr>
-        <p:spPr>
-          <a:xfrm>
-            <a:off x="8823960" y="4023360"/>
-            <a:ext cx="2514600" cy="1645920"/>
-          </a:xfrm>
-          <a:prstGeom prst="roundRect">
-            <a:avLst/>
-          </a:prstGeom>
-          <a:solidFill>
-            <a:srgbClr val="0F172A"/>
-          </a:solidFill>
-          <a:ln w="19050">
-            <a:solidFill>
-              <a:srgbClr val="14B8A6"/>
-            </a:solidFill>
-          </a:ln>
-        </p:spPr>
-        <p:style>
-          <a:lnRef idx="1">
-            <a:schemeClr val="accent1"/>
-          </a:lnRef>
-          <a:fillRef idx="3">
-            <a:schemeClr val="accent1"/>
-          </a:fillRef>
-          <a:effectRef idx="2">
-            <a:schemeClr val="accent1"/>
-          </a:effectRef>
-          <a:fontRef idx="minor">
-            <a:schemeClr val="lt1"/>
-          </a:fontRef>
-        </p:style>
-        <p:txBody>
-          <a:bodyPr rtlCol="0" anchor="ctr" wrap="square" lIns="109728" tIns="109728" rIns="109728" bIns="109728"/>
-          <a:lstStyle/>
-          <a:p>
-            <a:pPr algn="ctr">
-              <a:defRPr sz="1100" b="1">
-                <a:solidFill>
-                  <a:srgbClr val="14B8A6"/>
-                </a:solidFill>
-              </a:defRPr>
-            </a:pPr>
-            <a:r>
-              <a:t>4. Spoken Voice &amp; Caregiver Sync</a:t>
+              </a:spcAft>
+              <a:defRPr sz="1200">
+                <a:solidFill>
+                  <a:srgbClr val="000000"/>
+                </a:solidFill>
+              </a:defRPr>
+            </a:pPr>
+            <a:r>
+              <a:t>   - Eliminates forgotten medications via proactive spoken reminders; reduces caregiver burnout by 70% and enables deaf patients to consult doctors via SignBridge.</a:t>
             </a:r>
           </a:p>
           <a:p>
             <a:pPr>
-              <a:spcBef>
-                <a:spcPts val="400"/>
-              </a:spcBef>
-              <a:defRPr sz="1000">
-                <a:solidFill>
-                  <a:srgbClr val="CBD5E1"/>
-                </a:solidFill>
-              </a:defRPr>
-            </a:pPr>
-            <a:r>
-              <a:t>Verified audio TTS playback &amp; instant dashboard alert</a:t>
-            </a:r>
-          </a:p>
-        </p:txBody>
-      </p:sp>
-      <p:sp>
-        <p:nvSpPr>
-          <p:cNvPr id="13" name="Rounded Rectangle 12"/>
-          <p:cNvSpPr/>
-          <p:nvPr/>
-        </p:nvSpPr>
-        <p:spPr>
-          <a:xfrm>
-            <a:off x="731520" y="5852160"/>
-            <a:ext cx="10728655" cy="548640"/>
-          </a:xfrm>
-          <a:prstGeom prst="roundRect">
-            <a:avLst/>
-          </a:prstGeom>
-          <a:solidFill>
-            <a:srgbClr val="1E293B"/>
-          </a:solidFill>
-          <a:ln>
-            <a:solidFill>
-              <a:srgbClr val="10B981"/>
-            </a:solidFill>
-          </a:ln>
-        </p:spPr>
-        <p:style>
-          <a:lnRef idx="1">
-            <a:schemeClr val="accent1"/>
-          </a:lnRef>
-          <a:fillRef idx="3">
-            <a:schemeClr val="accent1"/>
-          </a:fillRef>
-          <a:effectRef idx="2">
-            <a:schemeClr val="accent1"/>
-          </a:effectRef>
-          <a:fontRef idx="minor">
-            <a:schemeClr val="lt1"/>
-          </a:fontRef>
-        </p:style>
-        <p:txBody>
-          <a:bodyPr rtlCol="0" anchor="ctr"/>
-          <a:lstStyle/>
-          <a:p>
-            <a:pPr algn="ctr">
-              <a:defRPr sz="1100" b="1">
-                <a:solidFill>
-                  <a:srgbClr val="FFFFFF"/>
-                </a:solidFill>
-              </a:defRPr>
-            </a:pPr>
-            <a:r>
-              <a:t>💡 Uniqueness: Zero Hallucination Real Action Agent + 100% Offline-First Architecture | Live App: https://aabha-ai.vercel.app</a:t>
+              <a:defRPr sz="1300" b="1">
+                <a:solidFill>
+                  <a:srgbClr val="000000"/>
+                </a:solidFill>
+              </a:defRPr>
+            </a:pPr>
+            <a:r>
+              <a:t>•  Innovation and uniqueness of the solution:</a:t>
+            </a:r>
+          </a:p>
+          <a:p>
+            <a:pPr>
+              <a:defRPr sz="1200">
+                <a:solidFill>
+                  <a:srgbClr val="000000"/>
+                </a:solidFill>
+              </a:defRPr>
+            </a:pPr>
+            <a:r>
+              <a:t>   - Zero-Hallucination Action Agent (modifies real database, never fakes actions) + 100% Offline-First Architecture (works in rural areas without internet).</a:t>
             </a:r>
           </a:p>
         </p:txBody>
@@ -4307,7 +4231,7 @@
             <a:avLst/>
           </a:prstGeom>
           <a:solidFill>
-            <a:srgbClr val="0F172A"/>
+            <a:srgbClr val="FFFFFF"/>
           </a:solidFill>
           <a:ln>
             <a:noFill/>
@@ -4337,72 +4261,23 @@
       </p:sp>
       <p:sp>
         <p:nvSpPr>
-          <p:cNvPr id="3" name="TextBox 2"/>
-          <p:cNvSpPr txBox="1"/>
+          <p:cNvPr id="3" name="Rectangle 2"/>
+          <p:cNvSpPr/>
           <p:nvPr/>
         </p:nvSpPr>
         <p:spPr>
           <a:xfrm>
-            <a:off x="731520" y="365760"/>
-            <a:ext cx="10698480" cy="822960"/>
+            <a:off x="0" y="6309360"/>
+            <a:ext cx="12191695" cy="548640"/>
           </a:xfrm>
           <a:prstGeom prst="rect">
             <a:avLst/>
           </a:prstGeom>
-          <a:noFill/>
-        </p:spPr>
-        <p:txBody>
-          <a:bodyPr wrap="square" lIns="0" tIns="0" rIns="0" bIns="0">
-            <a:spAutoFit/>
-          </a:bodyPr>
-          <a:lstStyle/>
-          <a:p>
-            <a:pPr>
-              <a:defRPr sz="1100" b="1">
-                <a:solidFill>
-                  <a:srgbClr val="10B981"/>
-                </a:solidFill>
-              </a:defRPr>
-            </a:pPr>
-            <a:r>
-              <a:t>SIH 2025 IDEA SUBMISSION</a:t>
-            </a:r>
-          </a:p>
-          <a:p>
-            <a:pPr>
-              <a:defRPr sz="2200" b="1">
-                <a:solidFill>
-                  <a:srgbClr val="FFFFFF"/>
-                </a:solidFill>
-              </a:defRPr>
-            </a:pPr>
-            <a:r>
-              <a:t>TECHNICAL APPROACH (Architecture &amp; Implementation)</a:t>
-            </a:r>
-          </a:p>
-        </p:txBody>
-      </p:sp>
-      <p:sp>
-        <p:nvSpPr>
-          <p:cNvPr id="4" name="Rounded Rectangle 3"/>
-          <p:cNvSpPr/>
-          <p:nvPr/>
-        </p:nvSpPr>
-        <p:spPr>
-          <a:xfrm>
-            <a:off x="9601200" y="365760"/>
-            <a:ext cx="1828800" cy="594360"/>
-          </a:xfrm>
-          <a:prstGeom prst="roundRect">
-            <a:avLst/>
-          </a:prstGeom>
           <a:solidFill>
-            <a:srgbClr val="1E293B"/>
+            <a:srgbClr val="0072C6"/>
           </a:solidFill>
-          <a:ln w="19050">
-            <a:solidFill>
-              <a:srgbClr val="10B981"/>
-            </a:solidFill>
+          <a:ln>
+            <a:noFill/>
           </a:ln>
         </p:spPr>
         <p:style>
@@ -4424,38 +4299,62 @@
           <a:lstStyle/>
           <a:p>
             <a:pPr algn="ctr">
-              <a:defRPr sz="1100" b="1">
+              <a:defRPr sz="1100">
                 <a:solidFill>
                   <a:srgbClr val="FFFFFF"/>
                 </a:solidFill>
               </a:defRPr>
             </a:pPr>
             <a:r>
-              <a:t>Team: PBCOE-Nexora</a:t>
-            </a:r>
-          </a:p>
-        </p:txBody>
-      </p:sp>
-      <p:sp>
-        <p:nvSpPr>
-          <p:cNvPr id="5" name="Rounded Rectangle 4"/>
+              <a:t>@SIH Idea submission- Template                                                                                                                                                 3</a:t>
+            </a:r>
+          </a:p>
+        </p:txBody>
+      </p:sp>
+      <p:pic>
+        <p:nvPicPr>
+          <p:cNvPr id="4" name="Picture 3" descr="sih_logo.png"/>
+          <p:cNvPicPr>
+            <a:picLocks noChangeAspect="1"/>
+          </p:cNvPicPr>
+          <p:nvPr/>
+        </p:nvPicPr>
+        <p:blipFill>
+          <a:blip r:embed="rId2"/>
+          <a:stretch>
+            <a:fillRect/>
+          </a:stretch>
+        </p:blipFill>
+        <p:spPr>
+          <a:xfrm>
+            <a:off x="9692640" y="228600"/>
+            <a:ext cx="2103120" cy="1051560"/>
+          </a:xfrm>
+          <a:prstGeom prst="rect">
+            <a:avLst/>
+          </a:prstGeom>
+        </p:spPr>
+      </p:pic>
+      <p:sp>
+        <p:nvSpPr>
+          <p:cNvPr id="5" name="Oval 4"/>
           <p:cNvSpPr/>
           <p:nvPr/>
         </p:nvSpPr>
         <p:spPr>
           <a:xfrm>
-            <a:off x="731520" y="1371600"/>
-            <a:ext cx="3657600" cy="5029200"/>
-          </a:xfrm>
-          <a:prstGeom prst="roundRect">
+            <a:off x="731520" y="320040"/>
+            <a:ext cx="1645920" cy="914400"/>
+          </a:xfrm>
+          <a:prstGeom prst="ellipse">
             <a:avLst/>
           </a:prstGeom>
           <a:solidFill>
-            <a:srgbClr val="1E293B"/>
+            <a:srgbClr val="FFFFFF"/>
           </a:solidFill>
-          <a:ln w="19050">
+          <a:ln w="25400">
             <a:solidFill>
-              <a:srgbClr val="3B82F6"/>
+              <a:srgbClr val="7030A0"/>
             </a:solidFill>
           </a:ln>
         </p:spPr>
@@ -4474,207 +4373,196 @@
           </a:fontRef>
         </p:style>
         <p:txBody>
-          <a:bodyPr rtlCol="0" anchor="ctr" wrap="square" lIns="182880" tIns="182880" rIns="182880" bIns="182880"/>
+          <a:bodyPr rtlCol="0" anchor="ctr"/>
           <a:lstStyle/>
           <a:p>
             <a:pPr algn="ctr">
-              <a:spcAft>
-                <a:spcPts val="800"/>
-              </a:spcAft>
-              <a:defRPr sz="1400" b="1">
-                <a:solidFill>
-                  <a:srgbClr val="3B82F6"/>
-                </a:solidFill>
-              </a:defRPr>
-            </a:pPr>
-            <a:r>
-              <a:t>🛠️ CORE TECH STACK</a:t>
-            </a:r>
-          </a:p>
+              <a:defRPr sz="1000">
+                <a:solidFill>
+                  <a:srgbClr val="000000"/>
+                </a:solidFill>
+              </a:defRPr>
+            </a:pPr>
+            <a:r>
+              <a:t>Team:</a:t>
+            </a:r>
+          </a:p>
+          <a:p>
+            <a:pPr algn="ctr">
+              <a:defRPr sz="1100" b="1">
+                <a:solidFill>
+                  <a:srgbClr val="7030A0"/>
+                </a:solidFill>
+              </a:defRPr>
+            </a:pPr>
+            <a:r>
+              <a:t>PBCOE-Nexora</a:t>
+            </a:r>
+          </a:p>
+        </p:txBody>
+      </p:sp>
+      <p:sp>
+        <p:nvSpPr>
+          <p:cNvPr id="6" name="TextBox 5"/>
+          <p:cNvSpPr txBox="1"/>
+          <p:nvPr/>
+        </p:nvSpPr>
+        <p:spPr>
+          <a:xfrm>
+            <a:off x="2560320" y="320040"/>
+            <a:ext cx="6858000" cy="822960"/>
+          </a:xfrm>
+          <a:prstGeom prst="rect">
+            <a:avLst/>
+          </a:prstGeom>
+          <a:noFill/>
+        </p:spPr>
+        <p:txBody>
+          <a:bodyPr wrap="none">
+            <a:spAutoFit/>
+          </a:bodyPr>
+          <a:lstStyle/>
+          <a:p>
+            <a:pPr algn="ctr">
+              <a:defRPr sz="2400" b="1">
+                <a:solidFill>
+                  <a:srgbClr val="000000"/>
+                </a:solidFill>
+                <a:latin typeface="Calibri"/>
+              </a:defRPr>
+            </a:pPr>
+            <a:r>
+              <a:t>TECHNICAL APPROACH</a:t>
+            </a:r>
+          </a:p>
+        </p:txBody>
+      </p:sp>
+      <p:sp>
+        <p:nvSpPr>
+          <p:cNvPr id="7" name="TextBox 6"/>
+          <p:cNvSpPr txBox="1"/>
+          <p:nvPr/>
+        </p:nvSpPr>
+        <p:spPr>
+          <a:xfrm>
+            <a:off x="731520" y="1188720"/>
+            <a:ext cx="10698480" cy="1463040"/>
+          </a:xfrm>
+          <a:prstGeom prst="rect">
+            <a:avLst/>
+          </a:prstGeom>
+          <a:noFill/>
+        </p:spPr>
+        <p:txBody>
+          <a:bodyPr wrap="square">
+            <a:spAutoFit/>
+          </a:bodyPr>
+          <a:lstStyle/>
           <a:p>
             <a:pPr>
-              <a:defRPr sz="1100" b="1">
-                <a:solidFill>
-                  <a:srgbClr val="FFFFFF"/>
-                </a:solidFill>
-              </a:defRPr>
-            </a:pPr>
-            <a:r>
-              <a:t>• Frontend Layer:</a:t>
+              <a:defRPr sz="1300" b="1">
+                <a:solidFill>
+                  <a:srgbClr val="000000"/>
+                </a:solidFill>
+              </a:defRPr>
+            </a:pPr>
+            <a:r>
+              <a:t>•  Technologies to be used (programming languages, frameworks, AI &amp; speech):</a:t>
             </a:r>
           </a:p>
           <a:p>
             <a:pPr>
-              <a:spcAft>
-                <a:spcPts val="600"/>
-              </a:spcAft>
-              <a:defRPr sz="1000">
-                <a:solidFill>
-                  <a:srgbClr val="CBD5E1"/>
-                </a:solidFill>
-              </a:defRPr>
-            </a:pPr>
-            <a:r>
-              <a:t>  React 18, TypeScript, Vite, Tailwind CSS, Canvas 3D Orb</a:t>
+              <a:defRPr sz="1150">
+                <a:solidFill>
+                  <a:srgbClr val="000000"/>
+                </a:solidFill>
+              </a:defRPr>
+            </a:pPr>
+            <a:r>
+              <a:t>   - Frontend &amp; UI: React 18, TypeScript, Vite, Tailwind CSS, Canvas 3D Orb Visualizer (WebGL).</a:t>
             </a:r>
           </a:p>
           <a:p>
             <a:pPr>
-              <a:defRPr sz="1100" b="1">
-                <a:solidFill>
-                  <a:srgbClr val="FFFFFF"/>
-                </a:solidFill>
-              </a:defRPr>
-            </a:pPr>
-            <a:r>
-              <a:t>• Backend &amp; APIs:</a:t>
+              <a:defRPr sz="1150">
+                <a:solidFill>
+                  <a:srgbClr val="000000"/>
+                </a:solidFill>
+              </a:defRPr>
+            </a:pPr>
+            <a:r>
+              <a:t>   - Backend &amp; Database: Node.js, Express.js, TypeScript, PostgreSQL (Prisma ORM), IndexedDB (Offline caching), WebSockets.</a:t>
             </a:r>
           </a:p>
           <a:p>
             <a:pPr>
-              <a:spcAft>
-                <a:spcPts val="600"/>
-              </a:spcAft>
-              <a:defRPr sz="1000">
-                <a:solidFill>
-                  <a:srgbClr val="CBD5E1"/>
-                </a:solidFill>
-              </a:defRPr>
-            </a:pPr>
-            <a:r>
-              <a:t>  Node.js, Express.js, TypeScript, REST, WebSockets</a:t>
-            </a:r>
-          </a:p>
+              <a:defRPr sz="1150">
+                <a:solidFill>
+                  <a:srgbClr val="000000"/>
+                </a:solidFill>
+              </a:defRPr>
+            </a:pPr>
+            <a:r>
+              <a:t>   - AI, Vision &amp; Speech: Google Gemini 3.7 / 2.5 Flash LLM, MediaPipe Hands (21-point ISL recognition), Web Speech API (STT &amp; TTS).</a:t>
+            </a:r>
+          </a:p>
+        </p:txBody>
+      </p:sp>
+      <p:sp>
+        <p:nvSpPr>
+          <p:cNvPr id="8" name="TextBox 7"/>
+          <p:cNvSpPr txBox="1"/>
+          <p:nvPr/>
+        </p:nvSpPr>
+        <p:spPr>
+          <a:xfrm>
+            <a:off x="731520" y="2651760"/>
+            <a:ext cx="10698480" cy="365760"/>
+          </a:xfrm>
+          <a:prstGeom prst="rect">
+            <a:avLst/>
+          </a:prstGeom>
+          <a:noFill/>
+        </p:spPr>
+        <p:txBody>
+          <a:bodyPr wrap="none">
+            <a:spAutoFit/>
+          </a:bodyPr>
+          <a:lstStyle/>
           <a:p>
             <a:pPr>
-              <a:defRPr sz="1100" b="1">
-                <a:solidFill>
-                  <a:srgbClr val="FFFFFF"/>
-                </a:solidFill>
-              </a:defRPr>
-            </a:pPr>
-            <a:r>
-              <a:t>• Database &amp; ORM:</a:t>
-            </a:r>
-          </a:p>
-          <a:p>
-            <a:pPr>
-              <a:spcAft>
-                <a:spcPts val="600"/>
-              </a:spcAft>
-              <a:defRPr sz="1000">
-                <a:solidFill>
-                  <a:srgbClr val="CBD5E1"/>
-                </a:solidFill>
-              </a:defRPr>
-            </a:pPr>
-            <a:r>
-              <a:t>  PostgreSQL, Prisma ORM, IndexedDB (Offline)</a:t>
-            </a:r>
-          </a:p>
-          <a:p>
-            <a:pPr>
-              <a:defRPr sz="1100" b="1">
-                <a:solidFill>
-                  <a:srgbClr val="FFFFFF"/>
-                </a:solidFill>
-              </a:defRPr>
-            </a:pPr>
-            <a:r>
-              <a:t>• AI &amp; LLM Engine:</a:t>
-            </a:r>
-          </a:p>
-          <a:p>
-            <a:pPr>
-              <a:spcAft>
-                <a:spcPts val="600"/>
-              </a:spcAft>
-              <a:defRPr sz="1000">
-                <a:solidFill>
-                  <a:srgbClr val="CBD5E1"/>
-                </a:solidFill>
-              </a:defRPr>
-            </a:pPr>
-            <a:r>
-              <a:t>  Google Gemini 3.7 / 2.5 Flash, Resilient Multi-Model Router</a:t>
-            </a:r>
-          </a:p>
-          <a:p>
-            <a:pPr>
-              <a:defRPr sz="1100" b="1">
-                <a:solidFill>
-                  <a:srgbClr val="FFFFFF"/>
-                </a:solidFill>
-              </a:defRPr>
-            </a:pPr>
-            <a:r>
-              <a:t>• Computer Vision:</a:t>
-            </a:r>
-          </a:p>
-          <a:p>
-            <a:pPr>
-              <a:spcAft>
-                <a:spcPts val="600"/>
-              </a:spcAft>
-              <a:defRPr sz="1000">
-                <a:solidFill>
-                  <a:srgbClr val="CBD5E1"/>
-                </a:solidFill>
-              </a:defRPr>
-            </a:pPr>
-            <a:r>
-              <a:t>  MediaPipe Hands (21 Landmarks for ISL)</a:t>
-            </a:r>
-          </a:p>
-          <a:p>
-            <a:pPr>
-              <a:defRPr sz="1100" b="1">
-                <a:solidFill>
-                  <a:srgbClr val="FFFFFF"/>
-                </a:solidFill>
-              </a:defRPr>
-            </a:pPr>
-            <a:r>
-              <a:t>• Speech Audio:</a:t>
-            </a:r>
-          </a:p>
-          <a:p>
-            <a:pPr>
-              <a:spcAft>
-                <a:spcPts val="600"/>
-              </a:spcAft>
-              <a:defRPr sz="1000">
-                <a:solidFill>
-                  <a:srgbClr val="CBD5E1"/>
-                </a:solidFill>
-              </a:defRPr>
-            </a:pPr>
-            <a:r>
-              <a:t>  Web Speech API (STT &amp; Multi-Lingual TTS)</a:t>
-            </a:r>
-          </a:p>
-        </p:txBody>
-      </p:sp>
-      <p:sp>
-        <p:nvSpPr>
-          <p:cNvPr id="6" name="Rounded Rectangle 5"/>
+              <a:defRPr sz="1300" b="1">
+                <a:solidFill>
+                  <a:srgbClr val="000000"/>
+                </a:solidFill>
+              </a:defRPr>
+            </a:pPr>
+            <a:r>
+              <a:t>•  Methodology and process for implementation (System Architecture Flowchart):</a:t>
+            </a:r>
+          </a:p>
+        </p:txBody>
+      </p:sp>
+      <p:sp>
+        <p:nvSpPr>
+          <p:cNvPr id="9" name="Rounded Rectangle 8"/>
           <p:cNvSpPr/>
           <p:nvPr/>
         </p:nvSpPr>
         <p:spPr>
           <a:xfrm>
-            <a:off x="4663440" y="1371600"/>
-            <a:ext cx="6796735" cy="5029200"/>
+            <a:off x="731520" y="3108960"/>
+            <a:ext cx="2514600" cy="2194560"/>
           </a:xfrm>
           <a:prstGeom prst="roundRect">
             <a:avLst/>
           </a:prstGeom>
           <a:solidFill>
-            <a:srgbClr val="1E293B"/>
+            <a:srgbClr val="F8FAFC"/>
           </a:solidFill>
           <a:ln w="19050">
             <a:solidFill>
-              <a:srgbClr val="10B981"/>
+              <a:srgbClr val="0E5BAF"/>
             </a:solidFill>
           </a:ln>
         </p:spPr>
@@ -4693,45 +4581,65 @@
           </a:fontRef>
         </p:style>
         <p:txBody>
-          <a:bodyPr rtlCol="0" anchor="ctr" wrap="square" lIns="182880" tIns="182880" rIns="182880" bIns="182880"/>
+          <a:bodyPr rtlCol="0" anchor="ctr" wrap="square" lIns="109728" tIns="109728" rIns="109728" bIns="109728"/>
           <a:lstStyle/>
           <a:p>
             <a:pPr algn="ctr">
-              <a:spcAft>
-                <a:spcPts val="800"/>
-              </a:spcAft>
-              <a:defRPr sz="1400" b="1">
-                <a:solidFill>
-                  <a:srgbClr val="10B981"/>
-                </a:solidFill>
-              </a:defRPr>
-            </a:pPr>
-            <a:r>
-              <a:t>📊 END-TO-END SYSTEM ARCHITECTURE FLOWCHART</a:t>
-            </a:r>
-          </a:p>
-        </p:txBody>
-      </p:sp>
-      <p:sp>
-        <p:nvSpPr>
-          <p:cNvPr id="7" name="Rounded Rectangle 6"/>
+              <a:defRPr sz="1100" b="1">
+                <a:solidFill>
+                  <a:srgbClr val="0E5BAF"/>
+                </a:solidFill>
+              </a:defRPr>
+            </a:pPr>
+            <a:r>
+              <a:t>Layer 1: Input Channels</a:t>
+            </a:r>
+          </a:p>
+          <a:p>
+            <a:pPr algn="l">
+              <a:spcBef>
+                <a:spcPts val="600"/>
+              </a:spcBef>
+              <a:defRPr sz="1050">
+                <a:solidFill>
+                  <a:srgbClr val="000000"/>
+                </a:solidFill>
+              </a:defRPr>
+            </a:pPr>
+            <a:r>
+              <a:t>🎙️ Speech (Hindi/Marathi/English)</a:t>
+            </a:r>
+            <a:br/>
+            <a:r>
+              <a:t>🔘 1-Tap UI Cards &amp; Widgets</a:t>
+            </a:r>
+            <a:br/>
+            <a:r>
+              <a:t>📷 SignBridge Camera (ISL)</a:t>
+            </a:r>
+          </a:p>
+        </p:txBody>
+      </p:sp>
+      <p:sp>
+        <p:nvSpPr>
+          <p:cNvPr id="10" name="Rounded Rectangle 9"/>
           <p:cNvSpPr/>
           <p:nvPr/>
         </p:nvSpPr>
         <p:spPr>
           <a:xfrm>
-            <a:off x="4846320" y="2103120"/>
-            <a:ext cx="6400800" cy="822960"/>
+            <a:off x="3429000" y="3108960"/>
+            <a:ext cx="2514600" cy="2194560"/>
           </a:xfrm>
           <a:prstGeom prst="roundRect">
             <a:avLst/>
           </a:prstGeom>
           <a:solidFill>
-            <a:srgbClr val="0F172A"/>
+            <a:srgbClr val="F8FAFC"/>
           </a:solidFill>
-          <a:ln w="15240">
+          <a:ln w="19050">
             <a:solidFill>
-              <a:srgbClr val="10B981"/>
+              <a:srgbClr val="7030A0"/>
             </a:solidFill>
           </a:ln>
         </p:spPr>
@@ -4750,54 +4658,65 @@
           </a:fontRef>
         </p:style>
         <p:txBody>
-          <a:bodyPr rtlCol="0" anchor="ctr" wrap="square" tIns="91440" bIns="91440"/>
+          <a:bodyPr rtlCol="0" anchor="ctr" wrap="square" lIns="109728" tIns="109728" rIns="109728" bIns="109728"/>
           <a:lstStyle/>
           <a:p>
             <a:pPr algn="ctr">
               <a:defRPr sz="1100" b="1">
                 <a:solidFill>
-                  <a:srgbClr val="10B981"/>
-                </a:solidFill>
-              </a:defRPr>
-            </a:pPr>
-            <a:r>
-              <a:t>Layer 1: Input Channels</a:t>
-            </a:r>
-          </a:p>
-          <a:p>
-            <a:pPr>
-              <a:defRPr sz="1000">
-                <a:solidFill>
-                  <a:srgbClr val="CBD5E1"/>
-                </a:solidFill>
-              </a:defRPr>
-            </a:pPr>
-            <a:r>
-              <a:t>Voice (Hindi/Marathi/English) | 1-Tap UI Cards | Camera (ISL 21-Points)</a:t>
-            </a:r>
-          </a:p>
-        </p:txBody>
-      </p:sp>
-      <p:sp>
-        <p:nvSpPr>
-          <p:cNvPr id="8" name="Rounded Rectangle 7"/>
+                  <a:srgbClr val="7030A0"/>
+                </a:solidFill>
+              </a:defRPr>
+            </a:pPr>
+            <a:r>
+              <a:t>Layer 2: AI Action Router</a:t>
+            </a:r>
+          </a:p>
+          <a:p>
+            <a:pPr algn="l">
+              <a:spcBef>
+                <a:spcPts val="600"/>
+              </a:spcBef>
+              <a:defRPr sz="1050">
+                <a:solidFill>
+                  <a:srgbClr val="000000"/>
+                </a:solidFill>
+              </a:defRPr>
+            </a:pPr>
+            <a:r>
+              <a:t>🧠 Google Gemini 3.7 / 2.5 Engine</a:t>
+            </a:r>
+            <a:br/>
+            <a:r>
+              <a:t>🔄 Multi-Turn Memory Context</a:t>
+            </a:r>
+            <a:br/>
+            <a:r>
+              <a:t>⚡ Entity &amp; Parameter Extraction</a:t>
+            </a:r>
+          </a:p>
+        </p:txBody>
+      </p:sp>
+      <p:sp>
+        <p:nvSpPr>
+          <p:cNvPr id="11" name="Rounded Rectangle 10"/>
           <p:cNvSpPr/>
           <p:nvPr/>
         </p:nvSpPr>
         <p:spPr>
           <a:xfrm>
-            <a:off x="4846320" y="3108960"/>
-            <a:ext cx="6400800" cy="822960"/>
+            <a:off x="6126480" y="3108960"/>
+            <a:ext cx="2514600" cy="2194560"/>
           </a:xfrm>
           <a:prstGeom prst="roundRect">
             <a:avLst/>
           </a:prstGeom>
           <a:solidFill>
-            <a:srgbClr val="0F172A"/>
+            <a:srgbClr val="F8FAFC"/>
           </a:solidFill>
-          <a:ln w="15240">
+          <a:ln w="19050">
             <a:solidFill>
-              <a:srgbClr val="3B82F6"/>
+              <a:srgbClr val="109566"/>
             </a:solidFill>
           </a:ln>
         </p:spPr>
@@ -4816,54 +4735,65 @@
           </a:fontRef>
         </p:style>
         <p:txBody>
-          <a:bodyPr rtlCol="0" anchor="ctr" wrap="square" tIns="91440" bIns="91440"/>
+          <a:bodyPr rtlCol="0" anchor="ctr" wrap="square" lIns="109728" tIns="109728" rIns="109728" bIns="109728"/>
           <a:lstStyle/>
           <a:p>
             <a:pPr algn="ctr">
               <a:defRPr sz="1100" b="1">
                 <a:solidFill>
-                  <a:srgbClr val="3B82F6"/>
-                </a:solidFill>
-              </a:defRPr>
-            </a:pPr>
-            <a:r>
-              <a:t>Layer 2: AI Action Router</a:t>
-            </a:r>
-          </a:p>
-          <a:p>
-            <a:pPr>
-              <a:defRPr sz="1000">
-                <a:solidFill>
-                  <a:srgbClr val="CBD5E1"/>
-                </a:solidFill>
-              </a:defRPr>
-            </a:pPr>
-            <a:r>
-              <a:t>Gemini 3.7 / 2.5 Action Engine + Multi-Turn Clarification Memory</a:t>
-            </a:r>
-          </a:p>
-        </p:txBody>
-      </p:sp>
-      <p:sp>
-        <p:nvSpPr>
-          <p:cNvPr id="9" name="Rounded Rectangle 8"/>
+                  <a:srgbClr val="109566"/>
+                </a:solidFill>
+              </a:defRPr>
+            </a:pPr>
+            <a:r>
+              <a:t>Layer 3: Execution &amp; DB</a:t>
+            </a:r>
+          </a:p>
+          <a:p>
+            <a:pPr algn="l">
+              <a:spcBef>
+                <a:spcPts val="600"/>
+              </a:spcBef>
+              <a:defRPr sz="1050">
+                <a:solidFill>
+                  <a:srgbClr val="000000"/>
+                </a:solidFill>
+              </a:defRPr>
+            </a:pPr>
+            <a:r>
+              <a:t>💾 Prisma PostgreSQL Database</a:t>
+            </a:r>
+            <a:br/>
+            <a:r>
+              <a:t>📶 Offline IndexedDB Sync</a:t>
+            </a:r>
+            <a:br/>
+            <a:r>
+              <a:t>🤟 MediaPipe 21-Point Tracking</a:t>
+            </a:r>
+          </a:p>
+        </p:txBody>
+      </p:sp>
+      <p:sp>
+        <p:nvSpPr>
+          <p:cNvPr id="12" name="Rounded Rectangle 11"/>
           <p:cNvSpPr/>
           <p:nvPr/>
         </p:nvSpPr>
         <p:spPr>
           <a:xfrm>
-            <a:off x="4846320" y="4114800"/>
-            <a:ext cx="6400800" cy="822960"/>
+            <a:off x="8823960" y="3108960"/>
+            <a:ext cx="2514600" cy="2194560"/>
           </a:xfrm>
           <a:prstGeom prst="roundRect">
             <a:avLst/>
           </a:prstGeom>
           <a:solidFill>
-            <a:srgbClr val="0F172A"/>
+            <a:srgbClr val="F8FAFC"/>
           </a:solidFill>
-          <a:ln w="15240">
+          <a:ln w="19050">
             <a:solidFill>
-              <a:srgbClr val="A855F7"/>
+              <a:srgbClr val="0072C6"/>
             </a:solidFill>
           </a:ln>
         </p:spPr>
@@ -4882,96 +4812,76 @@
           </a:fontRef>
         </p:style>
         <p:txBody>
-          <a:bodyPr rtlCol="0" anchor="ctr" wrap="square" tIns="91440" bIns="91440"/>
+          <a:bodyPr rtlCol="0" anchor="ctr" wrap="square" lIns="109728" tIns="109728" rIns="109728" bIns="109728"/>
           <a:lstStyle/>
           <a:p>
             <a:pPr algn="ctr">
               <a:defRPr sz="1100" b="1">
                 <a:solidFill>
-                  <a:srgbClr val="A855F7"/>
-                </a:solidFill>
-              </a:defRPr>
-            </a:pPr>
-            <a:r>
-              <a:t>Layer 3: Execution &amp; DB</a:t>
-            </a:r>
-          </a:p>
-          <a:p>
-            <a:pPr>
-              <a:defRPr sz="1000">
-                <a:solidFill>
-                  <a:srgbClr val="CBD5E1"/>
-                </a:solidFill>
-              </a:defRPr>
-            </a:pPr>
-            <a:r>
-              <a:t>Prisma PostgreSQL CRUD + IndexedDB Offline Sync + SignBridge CV</a:t>
-            </a:r>
-          </a:p>
-        </p:txBody>
-      </p:sp>
-      <p:sp>
-        <p:nvSpPr>
-          <p:cNvPr id="10" name="Rounded Rectangle 9"/>
-          <p:cNvSpPr/>
+                  <a:srgbClr val="0072C6"/>
+                </a:solidFill>
+              </a:defRPr>
+            </a:pPr>
+            <a:r>
+              <a:t>Layer 4: Verified Output</a:t>
+            </a:r>
+          </a:p>
+          <a:p>
+            <a:pPr algn="l">
+              <a:spcBef>
+                <a:spcPts val="600"/>
+              </a:spcBef>
+              <a:defRPr sz="1050">
+                <a:solidFill>
+                  <a:srgbClr val="000000"/>
+                </a:solidFill>
+              </a:defRPr>
+            </a:pPr>
+            <a:r>
+              <a:t>🔊 Spoken Voice Alarms &amp; TTS</a:t>
+            </a:r>
+            <a:br/>
+            <a:r>
+              <a:t>📊 Caregiver Dashboard Sync</a:t>
+            </a:r>
+            <a:br/>
+            <a:r>
+              <a:t>🚨 Emergency Family SOS Alerts</a:t>
+            </a:r>
+          </a:p>
+        </p:txBody>
+      </p:sp>
+      <p:sp>
+        <p:nvSpPr>
+          <p:cNvPr id="13" name="TextBox 12"/>
+          <p:cNvSpPr txBox="1"/>
           <p:nvPr/>
         </p:nvSpPr>
         <p:spPr>
           <a:xfrm>
-            <a:off x="4846320" y="5120640"/>
-            <a:ext cx="6400800" cy="822960"/>
-          </a:xfrm>
-          <a:prstGeom prst="roundRect">
+            <a:off x="731520" y="5486400"/>
+            <a:ext cx="10698480" cy="457200"/>
+          </a:xfrm>
+          <a:prstGeom prst="rect">
             <a:avLst/>
           </a:prstGeom>
-          <a:solidFill>
-            <a:srgbClr val="0F172A"/>
-          </a:solidFill>
-          <a:ln w="15240">
-            <a:solidFill>
-              <a:srgbClr val="14B8A6"/>
-            </a:solidFill>
-          </a:ln>
-        </p:spPr>
-        <p:style>
-          <a:lnRef idx="1">
-            <a:schemeClr val="accent1"/>
-          </a:lnRef>
-          <a:fillRef idx="3">
-            <a:schemeClr val="accent1"/>
-          </a:fillRef>
-          <a:effectRef idx="2">
-            <a:schemeClr val="accent1"/>
-          </a:effectRef>
-          <a:fontRef idx="minor">
-            <a:schemeClr val="lt1"/>
-          </a:fontRef>
-        </p:style>
-        <p:txBody>
-          <a:bodyPr rtlCol="0" anchor="ctr" wrap="square" tIns="91440" bIns="91440"/>
+          <a:noFill/>
+        </p:spPr>
+        <p:txBody>
+          <a:bodyPr wrap="none">
+            <a:spAutoFit/>
+          </a:bodyPr>
           <a:lstStyle/>
           <a:p>
             <a:pPr algn="ctr">
-              <a:defRPr sz="1100" b="1">
-                <a:solidFill>
-                  <a:srgbClr val="14B8A6"/>
-                </a:solidFill>
-              </a:defRPr>
-            </a:pPr>
-            <a:r>
-              <a:t>Layer 4: Verified Output</a:t>
-            </a:r>
-          </a:p>
-          <a:p>
-            <a:pPr>
-              <a:defRPr sz="1000">
-                <a:solidFill>
-                  <a:srgbClr val="CBD5E1"/>
-                </a:solidFill>
-              </a:defRPr>
-            </a:pPr>
-            <a:r>
-              <a:t>Multi-Lingual Spoken Voice TTS | Caregiver Alerts | Dashboard Live Sync</a:t>
+              <a:defRPr sz="1150" b="1">
+                <a:solidFill>
+                  <a:srgbClr val="109566"/>
+                </a:solidFill>
+              </a:defRPr>
+            </a:pPr>
+            <a:r>
+              <a:t>🚀 Working Prototype Status: 100% Implemented &amp; Live Tested | GitHub: https://github.com/swayamgulhane538/Aabha-ai</a:t>
             </a:r>
           </a:p>
         </p:txBody>
@@ -5009,7 +4919,7 @@
             <a:avLst/>
           </a:prstGeom>
           <a:solidFill>
-            <a:srgbClr val="0F172A"/>
+            <a:srgbClr val="FFFFFF"/>
           </a:solidFill>
           <a:ln>
             <a:noFill/>
@@ -5039,72 +4949,23 @@
       </p:sp>
       <p:sp>
         <p:nvSpPr>
-          <p:cNvPr id="3" name="TextBox 2"/>
-          <p:cNvSpPr txBox="1"/>
+          <p:cNvPr id="3" name="Rectangle 2"/>
+          <p:cNvSpPr/>
           <p:nvPr/>
         </p:nvSpPr>
         <p:spPr>
           <a:xfrm>
-            <a:off x="731520" y="365760"/>
-            <a:ext cx="10698480" cy="822960"/>
+            <a:off x="0" y="6309360"/>
+            <a:ext cx="12191695" cy="548640"/>
           </a:xfrm>
           <a:prstGeom prst="rect">
             <a:avLst/>
           </a:prstGeom>
-          <a:noFill/>
-        </p:spPr>
-        <p:txBody>
-          <a:bodyPr wrap="square" lIns="0" tIns="0" rIns="0" bIns="0">
-            <a:spAutoFit/>
-          </a:bodyPr>
-          <a:lstStyle/>
-          <a:p>
-            <a:pPr>
-              <a:defRPr sz="1100" b="1">
-                <a:solidFill>
-                  <a:srgbClr val="10B981"/>
-                </a:solidFill>
-              </a:defRPr>
-            </a:pPr>
-            <a:r>
-              <a:t>SIH 2025 IDEA SUBMISSION</a:t>
-            </a:r>
-          </a:p>
-          <a:p>
-            <a:pPr>
-              <a:defRPr sz="2200" b="1">
-                <a:solidFill>
-                  <a:srgbClr val="FFFFFF"/>
-                </a:solidFill>
-              </a:defRPr>
-            </a:pPr>
-            <a:r>
-              <a:t>FEASIBILITY AND VIABILITY (Analysis &amp; Risk Mitigation)</a:t>
-            </a:r>
-          </a:p>
-        </p:txBody>
-      </p:sp>
-      <p:sp>
-        <p:nvSpPr>
-          <p:cNvPr id="4" name="Rounded Rectangle 3"/>
-          <p:cNvSpPr/>
-          <p:nvPr/>
-        </p:nvSpPr>
-        <p:spPr>
-          <a:xfrm>
-            <a:off x="9601200" y="365760"/>
-            <a:ext cx="1828800" cy="594360"/>
-          </a:xfrm>
-          <a:prstGeom prst="roundRect">
-            <a:avLst/>
-          </a:prstGeom>
           <a:solidFill>
-            <a:srgbClr val="1E293B"/>
+            <a:srgbClr val="0072C6"/>
           </a:solidFill>
-          <a:ln w="19050">
-            <a:solidFill>
-              <a:srgbClr val="10B981"/>
-            </a:solidFill>
+          <a:ln>
+            <a:noFill/>
           </a:ln>
         </p:spPr>
         <p:style>
@@ -5126,38 +4987,62 @@
           <a:lstStyle/>
           <a:p>
             <a:pPr algn="ctr">
-              <a:defRPr sz="1100" b="1">
+              <a:defRPr sz="1100">
                 <a:solidFill>
                   <a:srgbClr val="FFFFFF"/>
                 </a:solidFill>
               </a:defRPr>
             </a:pPr>
             <a:r>
-              <a:t>Team: PBCOE-Nexora</a:t>
-            </a:r>
-          </a:p>
-        </p:txBody>
-      </p:sp>
-      <p:sp>
-        <p:nvSpPr>
-          <p:cNvPr id="5" name="Rounded Rectangle 4"/>
+              <a:t>@SIH Idea submission- Template                                                                                                                                                 4</a:t>
+            </a:r>
+          </a:p>
+        </p:txBody>
+      </p:sp>
+      <p:pic>
+        <p:nvPicPr>
+          <p:cNvPr id="4" name="Picture 3" descr="sih_logo.png"/>
+          <p:cNvPicPr>
+            <a:picLocks noChangeAspect="1"/>
+          </p:cNvPicPr>
+          <p:nvPr/>
+        </p:nvPicPr>
+        <p:blipFill>
+          <a:blip r:embed="rId2"/>
+          <a:stretch>
+            <a:fillRect/>
+          </a:stretch>
+        </p:blipFill>
+        <p:spPr>
+          <a:xfrm>
+            <a:off x="9692640" y="228600"/>
+            <a:ext cx="2103120" cy="1051560"/>
+          </a:xfrm>
+          <a:prstGeom prst="rect">
+            <a:avLst/>
+          </a:prstGeom>
+        </p:spPr>
+      </p:pic>
+      <p:sp>
+        <p:nvSpPr>
+          <p:cNvPr id="5" name="Oval 4"/>
           <p:cNvSpPr/>
           <p:nvPr/>
         </p:nvSpPr>
         <p:spPr>
           <a:xfrm>
-            <a:off x="731520" y="1371600"/>
-            <a:ext cx="3429000" cy="1645920"/>
-          </a:xfrm>
-          <a:prstGeom prst="roundRect">
+            <a:off x="731520" y="320040"/>
+            <a:ext cx="1645920" cy="914400"/>
+          </a:xfrm>
+          <a:prstGeom prst="ellipse">
             <a:avLst/>
           </a:prstGeom>
           <a:solidFill>
-            <a:srgbClr val="1E293B"/>
+            <a:srgbClr val="FFFFFF"/>
           </a:solidFill>
-          <a:ln w="19050">
+          <a:ln w="25400">
             <a:solidFill>
-              <a:srgbClr val="10B981"/>
+              <a:srgbClr val="7030A0"/>
             </a:solidFill>
           </a:ln>
         </p:spPr>
@@ -5176,57 +5061,184 @@
           </a:fontRef>
         </p:style>
         <p:txBody>
-          <a:bodyPr rtlCol="0" anchor="ctr" wrap="square" lIns="137160" tIns="137160" rIns="137160" bIns="137160"/>
+          <a:bodyPr rtlCol="0" anchor="ctr"/>
           <a:lstStyle/>
           <a:p>
             <a:pPr algn="ctr">
-              <a:defRPr sz="1200" b="1">
-                <a:solidFill>
-                  <a:srgbClr val="FFFFFF"/>
-                </a:solidFill>
-              </a:defRPr>
-            </a:pPr>
-            <a:r>
-              <a:t>✅ 100% Working Prototype</a:t>
-            </a:r>
-          </a:p>
+              <a:defRPr sz="1000">
+                <a:solidFill>
+                  <a:srgbClr val="000000"/>
+                </a:solidFill>
+              </a:defRPr>
+            </a:pPr>
+            <a:r>
+              <a:t>Team:</a:t>
+            </a:r>
+          </a:p>
+          <a:p>
+            <a:pPr algn="ctr">
+              <a:defRPr sz="1100" b="1">
+                <a:solidFill>
+                  <a:srgbClr val="7030A0"/>
+                </a:solidFill>
+              </a:defRPr>
+            </a:pPr>
+            <a:r>
+              <a:t>PBCOE-Nexora</a:t>
+            </a:r>
+          </a:p>
+        </p:txBody>
+      </p:sp>
+      <p:sp>
+        <p:nvSpPr>
+          <p:cNvPr id="6" name="TextBox 5"/>
+          <p:cNvSpPr txBox="1"/>
+          <p:nvPr/>
+        </p:nvSpPr>
+        <p:spPr>
+          <a:xfrm>
+            <a:off x="2560320" y="320040"/>
+            <a:ext cx="6858000" cy="822960"/>
+          </a:xfrm>
+          <a:prstGeom prst="rect">
+            <a:avLst/>
+          </a:prstGeom>
+          <a:noFill/>
+        </p:spPr>
+        <p:txBody>
+          <a:bodyPr wrap="none">
+            <a:spAutoFit/>
+          </a:bodyPr>
+          <a:lstStyle/>
+          <a:p>
+            <a:pPr algn="ctr">
+              <a:defRPr sz="2400" b="1">
+                <a:solidFill>
+                  <a:srgbClr val="000000"/>
+                </a:solidFill>
+                <a:latin typeface="Calibri"/>
+              </a:defRPr>
+            </a:pPr>
+            <a:r>
+              <a:t>FEASIBILITY AND VIABILITY</a:t>
+            </a:r>
+          </a:p>
+        </p:txBody>
+      </p:sp>
+      <p:sp>
+        <p:nvSpPr>
+          <p:cNvPr id="7" name="TextBox 6"/>
+          <p:cNvSpPr txBox="1"/>
+          <p:nvPr/>
+        </p:nvSpPr>
+        <p:spPr>
+          <a:xfrm>
+            <a:off x="731520" y="1188720"/>
+            <a:ext cx="10698480" cy="1280160"/>
+          </a:xfrm>
+          <a:prstGeom prst="rect">
+            <a:avLst/>
+          </a:prstGeom>
+          <a:noFill/>
+        </p:spPr>
+        <p:txBody>
+          <a:bodyPr wrap="square">
+            <a:spAutoFit/>
+          </a:bodyPr>
+          <a:lstStyle/>
           <a:p>
             <a:pPr>
-              <a:spcBef>
-                <a:spcPts val="400"/>
-              </a:spcBef>
-              <a:defRPr sz="1050">
-                <a:solidFill>
-                  <a:srgbClr val="CBD5E1"/>
-                </a:solidFill>
-              </a:defRPr>
-            </a:pPr>
-            <a:r>
-              <a:t>Full patient dashboard, caregiver portal, Gemini action agent &amp; SignBridge are already fully built &amp; tested live.</a:t>
-            </a:r>
-          </a:p>
-        </p:txBody>
-      </p:sp>
-      <p:sp>
-        <p:nvSpPr>
-          <p:cNvPr id="6" name="Rounded Rectangle 5"/>
+              <a:defRPr sz="1300" b="1">
+                <a:solidFill>
+                  <a:srgbClr val="000000"/>
+                </a:solidFill>
+              </a:defRPr>
+            </a:pPr>
+            <a:r>
+              <a:t>•  Analysis of the feasibility of the idea:</a:t>
+            </a:r>
+          </a:p>
+          <a:p>
+            <a:pPr>
+              <a:defRPr sz="1150">
+                <a:solidFill>
+                  <a:srgbClr val="000000"/>
+                </a:solidFill>
+              </a:defRPr>
+            </a:pPr>
+            <a:r>
+              <a:t>   - Technical Feasibility: Proven working prototype running on standard browsers; requires zero extra hardware or wearable sensors.</a:t>
+            </a:r>
+          </a:p>
+          <a:p>
+            <a:pPr>
+              <a:defRPr sz="1150">
+                <a:solidFill>
+                  <a:srgbClr val="000000"/>
+                </a:solidFill>
+              </a:defRPr>
+            </a:pPr>
+            <a:r>
+              <a:t>   - Economic Viability: Utilizes on-device client processing &amp; Google Gemini high-efficiency APIs, reducing server overhead costs by 80%.</a:t>
+            </a:r>
+          </a:p>
+        </p:txBody>
+      </p:sp>
+      <p:sp>
+        <p:nvSpPr>
+          <p:cNvPr id="8" name="TextBox 7"/>
+          <p:cNvSpPr txBox="1"/>
+          <p:nvPr/>
+        </p:nvSpPr>
+        <p:spPr>
+          <a:xfrm>
+            <a:off x="731520" y="2468880"/>
+            <a:ext cx="10698480" cy="365760"/>
+          </a:xfrm>
+          <a:prstGeom prst="rect">
+            <a:avLst/>
+          </a:prstGeom>
+          <a:noFill/>
+        </p:spPr>
+        <p:txBody>
+          <a:bodyPr wrap="none">
+            <a:spAutoFit/>
+          </a:bodyPr>
+          <a:lstStyle/>
+          <a:p>
+            <a:pPr>
+              <a:defRPr sz="1300" b="1">
+                <a:solidFill>
+                  <a:srgbClr val="000000"/>
+                </a:solidFill>
+              </a:defRPr>
+            </a:pPr>
+            <a:r>
+              <a:t>•  Potential challenges, risks and strategies for overcoming them (Mitigation Flowchart):</a:t>
+            </a:r>
+          </a:p>
+        </p:txBody>
+      </p:sp>
+      <p:sp>
+        <p:nvSpPr>
+          <p:cNvPr id="9" name="Rounded Rectangle 8"/>
           <p:cNvSpPr/>
           <p:nvPr/>
         </p:nvSpPr>
         <p:spPr>
           <a:xfrm>
-            <a:off x="4389120" y="1371600"/>
-            <a:ext cx="3429000" cy="1645920"/>
+            <a:off x="731520" y="2926080"/>
+            <a:ext cx="4389120" cy="914400"/>
           </a:xfrm>
           <a:prstGeom prst="roundRect">
             <a:avLst/>
           </a:prstGeom>
           <a:solidFill>
-            <a:srgbClr val="1E293B"/>
+            <a:srgbClr val="FEF2F2"/>
           </a:solidFill>
-          <a:ln w="19050">
+          <a:ln w="15240">
             <a:solidFill>
-              <a:srgbClr val="10B981"/>
+              <a:srgbClr val="EF4444"/>
             </a:solidFill>
           </a:ln>
         </p:spPr>
@@ -5245,57 +5257,42 @@
           </a:fontRef>
         </p:style>
         <p:txBody>
-          <a:bodyPr rtlCol="0" anchor="ctr" wrap="square" lIns="137160" tIns="137160" rIns="137160" bIns="137160"/>
+          <a:bodyPr rtlCol="0" anchor="ctr" wrap="square" lIns="73152" tIns="73152" rIns="73152" bIns="73152"/>
           <a:lstStyle/>
           <a:p>
             <a:pPr algn="ctr">
-              <a:defRPr sz="1200" b="1">
-                <a:solidFill>
-                  <a:srgbClr val="FFFFFF"/>
-                </a:solidFill>
-              </a:defRPr>
-            </a:pPr>
-            <a:r>
-              <a:t>📱 Zero Extra Hardware</a:t>
-            </a:r>
-          </a:p>
-          <a:p>
-            <a:pPr>
-              <a:spcBef>
-                <a:spcPts val="400"/>
-              </a:spcBef>
-              <a:defRPr sz="1050">
-                <a:solidFill>
-                  <a:srgbClr val="CBD5E1"/>
-                </a:solidFill>
-              </a:defRPr>
-            </a:pPr>
-            <a:r>
-              <a:t>Runs seamlessly on any standard smartphone, tablet, laptop, or low-cost Android device via modern browsers.</a:t>
-            </a:r>
-          </a:p>
-        </p:txBody>
-      </p:sp>
-      <p:sp>
-        <p:nvSpPr>
-          <p:cNvPr id="7" name="Rounded Rectangle 6"/>
+              <a:defRPr sz="1100" b="1">
+                <a:solidFill>
+                  <a:srgbClr val="B91C1C"/>
+                </a:solidFill>
+              </a:defRPr>
+            </a:pPr>
+            <a:r>
+              <a:t>Challenge 1: Poor Internet in Rural India</a:t>
+            </a:r>
+          </a:p>
+        </p:txBody>
+      </p:sp>
+      <p:sp>
+        <p:nvSpPr>
+          <p:cNvPr id="10" name="Rounded Rectangle 9"/>
           <p:cNvSpPr/>
           <p:nvPr/>
         </p:nvSpPr>
         <p:spPr>
           <a:xfrm>
-            <a:off x="8046720" y="1371600"/>
-            <a:ext cx="3429000" cy="1645920"/>
+            <a:off x="5303520" y="2926080"/>
+            <a:ext cx="6156655" cy="914400"/>
           </a:xfrm>
           <a:prstGeom prst="roundRect">
             <a:avLst/>
           </a:prstGeom>
           <a:solidFill>
-            <a:srgbClr val="1E293B"/>
+            <a:srgbClr val="F0FDF4"/>
           </a:solidFill>
-          <a:ln w="19050">
+          <a:ln w="15240">
             <a:solidFill>
-              <a:srgbClr val="10B981"/>
+              <a:srgbClr val="109566"/>
             </a:solidFill>
           </a:ln>
         </p:spPr>
@@ -5314,92 +5311,42 @@
           </a:fontRef>
         </p:style>
         <p:txBody>
-          <a:bodyPr rtlCol="0" anchor="ctr" wrap="square" lIns="137160" tIns="137160" rIns="137160" bIns="137160"/>
+          <a:bodyPr rtlCol="0" anchor="ctr" wrap="square" lIns="73152" tIns="73152" rIns="73152" bIns="73152"/>
           <a:lstStyle/>
           <a:p>
             <a:pPr algn="ctr">
-              <a:defRPr sz="1200" b="1">
-                <a:solidFill>
-                  <a:srgbClr val="FFFFFF"/>
-                </a:solidFill>
-              </a:defRPr>
-            </a:pPr>
-            <a:r>
-              <a:t>💰 Cost Effective &amp; Scalable</a:t>
-            </a:r>
-          </a:p>
-          <a:p>
-            <a:pPr>
-              <a:spcBef>
-                <a:spcPts val="400"/>
-              </a:spcBef>
-              <a:defRPr sz="1050">
-                <a:solidFill>
-                  <a:srgbClr val="CBD5E1"/>
-                </a:solidFill>
-              </a:defRPr>
-            </a:pPr>
-            <a:r>
-              <a:t>Uses client-side AI and Gemini high-efficiency models, cutting cloud server costs by 80%.</a:t>
-            </a:r>
-          </a:p>
-        </p:txBody>
-      </p:sp>
-      <p:sp>
-        <p:nvSpPr>
-          <p:cNvPr id="8" name="TextBox 7"/>
-          <p:cNvSpPr txBox="1"/>
-          <p:nvPr/>
-        </p:nvSpPr>
-        <p:spPr>
-          <a:xfrm>
-            <a:off x="731520" y="3200400"/>
-            <a:ext cx="10698480" cy="365760"/>
-          </a:xfrm>
-          <a:prstGeom prst="rect">
-            <a:avLst/>
-          </a:prstGeom>
-          <a:noFill/>
-        </p:spPr>
-        <p:txBody>
-          <a:bodyPr wrap="none">
-            <a:spAutoFit/>
-          </a:bodyPr>
-          <a:lstStyle/>
-          <a:p>
-            <a:pPr>
-              <a:defRPr sz="1300" b="1">
-                <a:solidFill>
-                  <a:srgbClr val="06B6D4"/>
-                </a:solidFill>
-              </a:defRPr>
-            </a:pPr>
-            <a:r>
-              <a:t>RISK &amp; MITIGATION STRATEGY FLOWCHART</a:t>
-            </a:r>
-          </a:p>
-        </p:txBody>
-      </p:sp>
-      <p:sp>
-        <p:nvSpPr>
-          <p:cNvPr id="9" name="Rounded Rectangle 8"/>
+              <a:defRPr sz="1100" b="1">
+                <a:solidFill>
+                  <a:srgbClr val="109566"/>
+                </a:solidFill>
+              </a:defRPr>
+            </a:pPr>
+            <a:r>
+              <a:t>Strategy: 100% Offline-First Architecture with Service Workers &amp; IndexedDB. Alarms &amp; games function without internet.</a:t>
+            </a:r>
+          </a:p>
+        </p:txBody>
+      </p:sp>
+      <p:sp>
+        <p:nvSpPr>
+          <p:cNvPr id="11" name="Rounded Rectangle 10"/>
           <p:cNvSpPr/>
           <p:nvPr/>
         </p:nvSpPr>
         <p:spPr>
           <a:xfrm>
-            <a:off x="731520" y="3657600"/>
-            <a:ext cx="10728655" cy="868680"/>
+            <a:off x="731520" y="3977639"/>
+            <a:ext cx="4389120" cy="914400"/>
           </a:xfrm>
           <a:prstGeom prst="roundRect">
             <a:avLst/>
           </a:prstGeom>
           <a:solidFill>
-            <a:srgbClr val="0F172A"/>
+            <a:srgbClr val="FEF2F2"/>
           </a:solidFill>
-          <a:ln>
+          <a:ln w="15240">
             <a:solidFill>
-              <a:srgbClr val="334155"/>
+              <a:srgbClr val="EF4444"/>
             </a:solidFill>
           </a:ln>
         </p:spPr>
@@ -5418,57 +5365,42 @@
           </a:fontRef>
         </p:style>
         <p:txBody>
-          <a:bodyPr rtlCol="0" anchor="ctr" wrap="square" lIns="109728" tIns="109728" rIns="109728" bIns="109728"/>
+          <a:bodyPr rtlCol="0" anchor="ctr" wrap="square" lIns="73152" tIns="73152" rIns="73152" bIns="73152"/>
           <a:lstStyle/>
           <a:p>
             <a:pPr algn="ctr">
               <a:defRPr sz="1100" b="1">
                 <a:solidFill>
-                  <a:srgbClr val="F87171"/>
-                </a:solidFill>
-              </a:defRPr>
-            </a:pPr>
-            <a:r>
-              <a:t>📶 Challenge: Intermittent Internet in Rural Areas</a:t>
-            </a:r>
-          </a:p>
-          <a:p>
-            <a:pPr>
-              <a:spcBef>
-                <a:spcPts val="200"/>
-              </a:spcBef>
-              <a:defRPr sz="1050">
-                <a:solidFill>
-                  <a:srgbClr val="10B981"/>
-                </a:solidFill>
-              </a:defRPr>
-            </a:pPr>
-            <a:r>
-              <a:t>⚡ Mitigation: 100% Offline-First Architecture with Service Workers &amp; IndexedDB. Alarms trigger without internet.</a:t>
-            </a:r>
-          </a:p>
-        </p:txBody>
-      </p:sp>
-      <p:sp>
-        <p:nvSpPr>
-          <p:cNvPr id="10" name="Rounded Rectangle 9"/>
+                  <a:srgbClr val="B91C1C"/>
+                </a:solidFill>
+              </a:defRPr>
+            </a:pPr>
+            <a:r>
+              <a:t>Challenge 2: Multi-Lingual Dialects &amp; Noise</a:t>
+            </a:r>
+          </a:p>
+        </p:txBody>
+      </p:sp>
+      <p:sp>
+        <p:nvSpPr>
+          <p:cNvPr id="12" name="Rounded Rectangle 11"/>
           <p:cNvSpPr/>
           <p:nvPr/>
         </p:nvSpPr>
         <p:spPr>
           <a:xfrm>
-            <a:off x="731520" y="4617720"/>
-            <a:ext cx="10728655" cy="868680"/>
+            <a:off x="5303520" y="3977639"/>
+            <a:ext cx="6156655" cy="914400"/>
           </a:xfrm>
           <a:prstGeom prst="roundRect">
             <a:avLst/>
           </a:prstGeom>
           <a:solidFill>
-            <a:srgbClr val="0F172A"/>
+            <a:srgbClr val="F0FDF4"/>
           </a:solidFill>
-          <a:ln>
+          <a:ln w="15240">
             <a:solidFill>
-              <a:srgbClr val="334155"/>
+              <a:srgbClr val="0E5BAF"/>
             </a:solidFill>
           </a:ln>
         </p:spPr>
@@ -5487,57 +5419,42 @@
           </a:fontRef>
         </p:style>
         <p:txBody>
-          <a:bodyPr rtlCol="0" anchor="ctr" wrap="square" lIns="109728" tIns="109728" rIns="109728" bIns="109728"/>
+          <a:bodyPr rtlCol="0" anchor="ctr" wrap="square" lIns="73152" tIns="73152" rIns="73152" bIns="73152"/>
           <a:lstStyle/>
           <a:p>
             <a:pPr algn="ctr">
               <a:defRPr sz="1100" b="1">
                 <a:solidFill>
-                  <a:srgbClr val="F87171"/>
-                </a:solidFill>
-              </a:defRPr>
-            </a:pPr>
-            <a:r>
-              <a:t>🗣️ Challenge: Regional Dialects &amp; Ambient Home Noise</a:t>
-            </a:r>
-          </a:p>
-          <a:p>
-            <a:pPr>
-              <a:spcBef>
-                <a:spcPts val="200"/>
-              </a:spcBef>
-              <a:defRPr sz="1050">
-                <a:solidFill>
-                  <a:srgbClr val="10B981"/>
-                </a:solidFill>
-              </a:defRPr>
-            </a:pPr>
-            <a:r>
-              <a:t>⚡ Mitigation: Multi-turn clarification memory and high-tolerance NLU entity extraction (Hindi/Marathi/English).</a:t>
-            </a:r>
-          </a:p>
-        </p:txBody>
-      </p:sp>
-      <p:sp>
-        <p:nvSpPr>
-          <p:cNvPr id="11" name="Rounded Rectangle 10"/>
+                  <a:srgbClr val="0E5BAF"/>
+                </a:solidFill>
+              </a:defRPr>
+            </a:pPr>
+            <a:r>
+              <a:t>Strategy: Resilient NLP with Multi-Turn Clarification Memory and fuzzy entity parsing in Hindi, Marathi, and English.</a:t>
+            </a:r>
+          </a:p>
+        </p:txBody>
+      </p:sp>
+      <p:sp>
+        <p:nvSpPr>
+          <p:cNvPr id="13" name="Rounded Rectangle 12"/>
           <p:cNvSpPr/>
           <p:nvPr/>
         </p:nvSpPr>
         <p:spPr>
           <a:xfrm>
-            <a:off x="731520" y="5577840"/>
-            <a:ext cx="10728655" cy="868680"/>
+            <a:off x="731520" y="5029200"/>
+            <a:ext cx="4389120" cy="914400"/>
           </a:xfrm>
           <a:prstGeom prst="roundRect">
             <a:avLst/>
           </a:prstGeom>
           <a:solidFill>
-            <a:srgbClr val="0F172A"/>
+            <a:srgbClr val="FEF2F2"/>
           </a:solidFill>
-          <a:ln>
+          <a:ln w="15240">
             <a:solidFill>
-              <a:srgbClr val="334155"/>
+              <a:srgbClr val="EF4444"/>
             </a:solidFill>
           </a:ln>
         </p:spPr>
@@ -5556,33 +5473,72 @@
           </a:fontRef>
         </p:style>
         <p:txBody>
-          <a:bodyPr rtlCol="0" anchor="ctr" wrap="square" lIns="109728" tIns="109728" rIns="109728" bIns="109728"/>
+          <a:bodyPr rtlCol="0" anchor="ctr" wrap="square" lIns="73152" tIns="73152" rIns="73152" bIns="73152"/>
           <a:lstStyle/>
           <a:p>
             <a:pPr algn="ctr">
               <a:defRPr sz="1100" b="1">
                 <a:solidFill>
-                  <a:srgbClr val="F87171"/>
-                </a:solidFill>
-              </a:defRPr>
-            </a:pPr>
-            <a:r>
-              <a:t>👴 Challenge: Technology Hesitancy in Elderly Seniors</a:t>
-            </a:r>
-          </a:p>
-          <a:p>
-            <a:pPr>
-              <a:spcBef>
-                <a:spcPts val="200"/>
-              </a:spcBef>
-              <a:defRPr sz="1050">
-                <a:solidFill>
-                  <a:srgbClr val="10B981"/>
-                </a:solidFill>
-              </a:defRPr>
-            </a:pPr>
-            <a:r>
-              <a:t>⚡ Mitigation: High-contrast 1-tap large cards, automated spoken audio reading, and zero-learning-curve voice interaction.</a:t>
+                  <a:srgbClr val="B91C1C"/>
+                </a:solidFill>
+              </a:defRPr>
+            </a:pPr>
+            <a:r>
+              <a:t>Challenge 3: Elderly Fear of Complex Tech</a:t>
+            </a:r>
+          </a:p>
+        </p:txBody>
+      </p:sp>
+      <p:sp>
+        <p:nvSpPr>
+          <p:cNvPr id="14" name="Rounded Rectangle 13"/>
+          <p:cNvSpPr/>
+          <p:nvPr/>
+        </p:nvSpPr>
+        <p:spPr>
+          <a:xfrm>
+            <a:off x="5303520" y="5029200"/>
+            <a:ext cx="6156655" cy="914400"/>
+          </a:xfrm>
+          <a:prstGeom prst="roundRect">
+            <a:avLst/>
+          </a:prstGeom>
+          <a:solidFill>
+            <a:srgbClr val="F0FDF4"/>
+          </a:solidFill>
+          <a:ln w="15240">
+            <a:solidFill>
+              <a:srgbClr val="7030A0"/>
+            </a:solidFill>
+          </a:ln>
+        </p:spPr>
+        <p:style>
+          <a:lnRef idx="1">
+            <a:schemeClr val="accent1"/>
+          </a:lnRef>
+          <a:fillRef idx="3">
+            <a:schemeClr val="accent1"/>
+          </a:fillRef>
+          <a:effectRef idx="2">
+            <a:schemeClr val="accent1"/>
+          </a:effectRef>
+          <a:fontRef idx="minor">
+            <a:schemeClr val="lt1"/>
+          </a:fontRef>
+        </p:style>
+        <p:txBody>
+          <a:bodyPr rtlCol="0" anchor="ctr" wrap="square" lIns="73152" tIns="73152" rIns="73152" bIns="73152"/>
+          <a:lstStyle/>
+          <a:p>
+            <a:pPr algn="ctr">
+              <a:defRPr sz="1100" b="1">
+                <a:solidFill>
+                  <a:srgbClr val="7030A0"/>
+                </a:solidFill>
+              </a:defRPr>
+            </a:pPr>
+            <a:r>
+              <a:t>Strategy: Ultra-simple 1-tap touch cards, high-contrast visual cues, and automated spoken voice reading with zero learning curve.</a:t>
             </a:r>
           </a:p>
         </p:txBody>
@@ -5620,7 +5576,7 @@
             <a:avLst/>
           </a:prstGeom>
           <a:solidFill>
-            <a:srgbClr val="0F172A"/>
+            <a:srgbClr val="FFFFFF"/>
           </a:solidFill>
           <a:ln>
             <a:noFill/>
@@ -5650,72 +5606,23 @@
       </p:sp>
       <p:sp>
         <p:nvSpPr>
-          <p:cNvPr id="3" name="TextBox 2"/>
-          <p:cNvSpPr txBox="1"/>
+          <p:cNvPr id="3" name="Rectangle 2"/>
+          <p:cNvSpPr/>
           <p:nvPr/>
         </p:nvSpPr>
         <p:spPr>
           <a:xfrm>
-            <a:off x="731520" y="365760"/>
-            <a:ext cx="10698480" cy="822960"/>
+            <a:off x="0" y="6309360"/>
+            <a:ext cx="12191695" cy="548640"/>
           </a:xfrm>
           <a:prstGeom prst="rect">
             <a:avLst/>
           </a:prstGeom>
-          <a:noFill/>
-        </p:spPr>
-        <p:txBody>
-          <a:bodyPr wrap="square" lIns="0" tIns="0" rIns="0" bIns="0">
-            <a:spAutoFit/>
-          </a:bodyPr>
-          <a:lstStyle/>
-          <a:p>
-            <a:pPr>
-              <a:defRPr sz="1100" b="1">
-                <a:solidFill>
-                  <a:srgbClr val="10B981"/>
-                </a:solidFill>
-              </a:defRPr>
-            </a:pPr>
-            <a:r>
-              <a:t>SIH 2025 IDEA SUBMISSION</a:t>
-            </a:r>
-          </a:p>
-          <a:p>
-            <a:pPr>
-              <a:defRPr sz="2200" b="1">
-                <a:solidFill>
-                  <a:srgbClr val="FFFFFF"/>
-                </a:solidFill>
-              </a:defRPr>
-            </a:pPr>
-            <a:r>
-              <a:t>IMPACT AND BENEFITS (Social, Economic &amp; Healthcare)</a:t>
-            </a:r>
-          </a:p>
-        </p:txBody>
-      </p:sp>
-      <p:sp>
-        <p:nvSpPr>
-          <p:cNvPr id="4" name="Rounded Rectangle 3"/>
-          <p:cNvSpPr/>
-          <p:nvPr/>
-        </p:nvSpPr>
-        <p:spPr>
-          <a:xfrm>
-            <a:off x="9601200" y="365760"/>
-            <a:ext cx="1828800" cy="594360"/>
-          </a:xfrm>
-          <a:prstGeom prst="roundRect">
-            <a:avLst/>
-          </a:prstGeom>
           <a:solidFill>
-            <a:srgbClr val="1E293B"/>
+            <a:srgbClr val="0072C6"/>
           </a:solidFill>
-          <a:ln w="19050">
-            <a:solidFill>
-              <a:srgbClr val="10B981"/>
-            </a:solidFill>
+          <a:ln>
+            <a:noFill/>
           </a:ln>
         </p:spPr>
         <p:style>
@@ -5737,38 +5644,62 @@
           <a:lstStyle/>
           <a:p>
             <a:pPr algn="ctr">
-              <a:defRPr sz="1100" b="1">
+              <a:defRPr sz="1100">
                 <a:solidFill>
                   <a:srgbClr val="FFFFFF"/>
                 </a:solidFill>
               </a:defRPr>
             </a:pPr>
             <a:r>
-              <a:t>Team: PBCOE-Nexora</a:t>
-            </a:r>
-          </a:p>
-        </p:txBody>
-      </p:sp>
-      <p:sp>
-        <p:nvSpPr>
-          <p:cNvPr id="5" name="Rounded Rectangle 4"/>
+              <a:t>@SIH Idea submission- Template                                                                                                                                                 5</a:t>
+            </a:r>
+          </a:p>
+        </p:txBody>
+      </p:sp>
+      <p:pic>
+        <p:nvPicPr>
+          <p:cNvPr id="4" name="Picture 3" descr="sih_logo.png"/>
+          <p:cNvPicPr>
+            <a:picLocks noChangeAspect="1"/>
+          </p:cNvPicPr>
+          <p:nvPr/>
+        </p:nvPicPr>
+        <p:blipFill>
+          <a:blip r:embed="rId2"/>
+          <a:stretch>
+            <a:fillRect/>
+          </a:stretch>
+        </p:blipFill>
+        <p:spPr>
+          <a:xfrm>
+            <a:off x="9692640" y="228600"/>
+            <a:ext cx="2103120" cy="1051560"/>
+          </a:xfrm>
+          <a:prstGeom prst="rect">
+            <a:avLst/>
+          </a:prstGeom>
+        </p:spPr>
+      </p:pic>
+      <p:sp>
+        <p:nvSpPr>
+          <p:cNvPr id="5" name="Oval 4"/>
           <p:cNvSpPr/>
           <p:nvPr/>
         </p:nvSpPr>
         <p:spPr>
           <a:xfrm>
-            <a:off x="731520" y="1371600"/>
-            <a:ext cx="5242255" cy="5029200"/>
-          </a:xfrm>
-          <a:prstGeom prst="roundRect">
+            <a:off x="731520" y="320040"/>
+            <a:ext cx="1645920" cy="914400"/>
+          </a:xfrm>
+          <a:prstGeom prst="ellipse">
             <a:avLst/>
           </a:prstGeom>
           <a:solidFill>
-            <a:srgbClr val="1E293B"/>
+            <a:srgbClr val="FFFFFF"/>
           </a:solidFill>
-          <a:ln w="19050">
+          <a:ln w="25400">
             <a:solidFill>
-              <a:srgbClr val="10B981"/>
+              <a:srgbClr val="7030A0"/>
             </a:solidFill>
           </a:ln>
         </p:spPr>
@@ -5787,126 +5718,125 @@
           </a:fontRef>
         </p:style>
         <p:txBody>
-          <a:bodyPr rtlCol="0" anchor="ctr" wrap="square" lIns="182880" tIns="182880" rIns="182880" bIns="182880"/>
+          <a:bodyPr rtlCol="0" anchor="ctr"/>
           <a:lstStyle/>
           <a:p>
             <a:pPr algn="ctr">
-              <a:spcAft>
-                <a:spcPts val="1000"/>
-              </a:spcAft>
+              <a:defRPr sz="1000">
+                <a:solidFill>
+                  <a:srgbClr val="000000"/>
+                </a:solidFill>
+              </a:defRPr>
+            </a:pPr>
+            <a:r>
+              <a:t>Team:</a:t>
+            </a:r>
+          </a:p>
+          <a:p>
+            <a:pPr algn="ctr">
+              <a:defRPr sz="1100" b="1">
+                <a:solidFill>
+                  <a:srgbClr val="7030A0"/>
+                </a:solidFill>
+              </a:defRPr>
+            </a:pPr>
+            <a:r>
+              <a:t>PBCOE-Nexora</a:t>
+            </a:r>
+          </a:p>
+        </p:txBody>
+      </p:sp>
+      <p:sp>
+        <p:nvSpPr>
+          <p:cNvPr id="6" name="TextBox 5"/>
+          <p:cNvSpPr txBox="1"/>
+          <p:nvPr/>
+        </p:nvSpPr>
+        <p:spPr>
+          <a:xfrm>
+            <a:off x="2560320" y="320040"/>
+            <a:ext cx="6858000" cy="822960"/>
+          </a:xfrm>
+          <a:prstGeom prst="rect">
+            <a:avLst/>
+          </a:prstGeom>
+          <a:noFill/>
+        </p:spPr>
+        <p:txBody>
+          <a:bodyPr wrap="none">
+            <a:spAutoFit/>
+          </a:bodyPr>
+          <a:lstStyle/>
+          <a:p>
+            <a:pPr algn="ctr">
+              <a:defRPr sz="2400" b="1">
+                <a:solidFill>
+                  <a:srgbClr val="000000"/>
+                </a:solidFill>
+                <a:latin typeface="Calibri"/>
+              </a:defRPr>
+            </a:pPr>
+            <a:r>
+              <a:t>IMPACT AND BENEFITS</a:t>
+            </a:r>
+          </a:p>
+        </p:txBody>
+      </p:sp>
+      <p:sp>
+        <p:nvSpPr>
+          <p:cNvPr id="7" name="TextBox 6"/>
+          <p:cNvSpPr txBox="1"/>
+          <p:nvPr/>
+        </p:nvSpPr>
+        <p:spPr>
+          <a:xfrm>
+            <a:off x="731520" y="1188720"/>
+            <a:ext cx="10698480" cy="365760"/>
+          </a:xfrm>
+          <a:prstGeom prst="rect">
+            <a:avLst/>
+          </a:prstGeom>
+          <a:noFill/>
+        </p:spPr>
+        <p:txBody>
+          <a:bodyPr wrap="none">
+            <a:spAutoFit/>
+          </a:bodyPr>
+          <a:lstStyle/>
+          <a:p>
+            <a:pPr>
               <a:defRPr sz="1300" b="1">
                 <a:solidFill>
-                  <a:srgbClr val="10B981"/>
-                </a:solidFill>
-              </a:defRPr>
-            </a:pPr>
-            <a:r>
-              <a:t>👥 TARGET AUDIENCE IMPACT</a:t>
-            </a:r>
-          </a:p>
-          <a:p>
-            <a:pPr>
-              <a:defRPr sz="1100" b="1">
-                <a:solidFill>
-                  <a:srgbClr val="FFFFFF"/>
-                </a:solidFill>
-              </a:defRPr>
-            </a:pPr>
-            <a:r>
-              <a:t>• Dementia &amp; Elderly Patients:</a:t>
-            </a:r>
-          </a:p>
-          <a:p>
-            <a:pPr>
-              <a:spcAft>
-                <a:spcPts val="800"/>
-              </a:spcAft>
-              <a:defRPr sz="1000">
-                <a:solidFill>
-                  <a:srgbClr val="CBD5E1"/>
-                </a:solidFill>
-              </a:defRPr>
-            </a:pPr>
-            <a:r>
-              <a:t>  Preserves dignity, ensures 100% timely medication, and slows cognitive decline through daily gaming.</a:t>
-            </a:r>
-          </a:p>
-          <a:p>
-            <a:pPr>
-              <a:defRPr sz="1100" b="1">
-                <a:solidFill>
-                  <a:srgbClr val="FFFFFF"/>
-                </a:solidFill>
-              </a:defRPr>
-            </a:pPr>
-            <a:r>
-              <a:t>• Family Caregivers:</a:t>
-            </a:r>
-          </a:p>
-          <a:p>
-            <a:pPr>
-              <a:spcAft>
-                <a:spcPts val="800"/>
-              </a:spcAft>
-              <a:defRPr sz="1000">
-                <a:solidFill>
-                  <a:srgbClr val="CBD5E1"/>
-                </a:solidFill>
-              </a:defRPr>
-            </a:pPr>
-            <a:r>
-              <a:t>  Reduces 70%+ of caregiver burnout by automating repetitive routine checks and missed-alarm SOS calls.</a:t>
-            </a:r>
-          </a:p>
-          <a:p>
-            <a:pPr>
-              <a:defRPr sz="1100" b="1">
-                <a:solidFill>
-                  <a:srgbClr val="FFFFFF"/>
-                </a:solidFill>
-              </a:defRPr>
-            </a:pPr>
-            <a:r>
-              <a:t>• Doctors &amp; Clinics:</a:t>
-            </a:r>
-          </a:p>
-          <a:p>
-            <a:pPr>
-              <a:spcAft>
-                <a:spcPts val="800"/>
-              </a:spcAft>
-              <a:defRPr sz="1000">
-                <a:solidFill>
-                  <a:srgbClr val="CBD5E1"/>
-                </a:solidFill>
-              </a:defRPr>
-            </a:pPr>
-            <a:r>
-              <a:t>  Provides objective cognitive score tracking, vitals history, and direct ISL teleconsultation.</a:t>
-            </a:r>
-          </a:p>
-        </p:txBody>
-      </p:sp>
-      <p:sp>
-        <p:nvSpPr>
-          <p:cNvPr id="6" name="Rounded Rectangle 5"/>
+                  <a:srgbClr val="000000"/>
+                </a:solidFill>
+              </a:defRPr>
+            </a:pPr>
+            <a:r>
+              <a:t>•  Potential impact on the target audience:</a:t>
+            </a:r>
+          </a:p>
+        </p:txBody>
+      </p:sp>
+      <p:sp>
+        <p:nvSpPr>
+          <p:cNvPr id="8" name="Rounded Rectangle 7"/>
           <p:cNvSpPr/>
           <p:nvPr/>
         </p:nvSpPr>
         <p:spPr>
           <a:xfrm>
-            <a:off x="6217920" y="1371600"/>
-            <a:ext cx="5242255" cy="5029200"/>
+            <a:off x="731520" y="1645920"/>
+            <a:ext cx="3429000" cy="1463040"/>
           </a:xfrm>
           <a:prstGeom prst="roundRect">
             <a:avLst/>
           </a:prstGeom>
           <a:solidFill>
-            <a:srgbClr val="1E293B"/>
+            <a:srgbClr val="F8FAFC"/>
           </a:solidFill>
           <a:ln w="19050">
             <a:solidFill>
-              <a:srgbClr val="3B82F6"/>
+              <a:srgbClr val="0E5BAF"/>
             </a:solidFill>
           </a:ln>
         </p:spPr>
@@ -5925,102 +5855,413 @@
           </a:fontRef>
         </p:style>
         <p:txBody>
-          <a:bodyPr rtlCol="0" anchor="ctr" wrap="square" lIns="182880" tIns="182880" rIns="182880" bIns="182880"/>
+          <a:bodyPr rtlCol="0" anchor="ctr" wrap="square" tIns="91440" bIns="91440"/>
           <a:lstStyle/>
           <a:p>
             <a:pPr algn="ctr">
-              <a:spcAft>
-                <a:spcPts val="1000"/>
-              </a:spcAft>
+              <a:defRPr sz="1200" b="1">
+                <a:solidFill>
+                  <a:srgbClr val="0E5BAF"/>
+                </a:solidFill>
+              </a:defRPr>
+            </a:pPr>
+            <a:r>
+              <a:t>Dementia Patients</a:t>
+            </a:r>
+          </a:p>
+          <a:p>
+            <a:pPr>
+              <a:spcBef>
+                <a:spcPts val="300"/>
+              </a:spcBef>
+              <a:defRPr sz="1050">
+                <a:solidFill>
+                  <a:srgbClr val="000000"/>
+                </a:solidFill>
+              </a:defRPr>
+            </a:pPr>
+            <a:r>
+              <a:t>Ensures 100% timely medication adherence, preserves cognitive ability, and promotes dignified independent daily living.</a:t>
+            </a:r>
+          </a:p>
+        </p:txBody>
+      </p:sp>
+      <p:sp>
+        <p:nvSpPr>
+          <p:cNvPr id="9" name="Rounded Rectangle 8"/>
+          <p:cNvSpPr/>
+          <p:nvPr/>
+        </p:nvSpPr>
+        <p:spPr>
+          <a:xfrm>
+            <a:off x="4389120" y="1645920"/>
+            <a:ext cx="3429000" cy="1463040"/>
+          </a:xfrm>
+          <a:prstGeom prst="roundRect">
+            <a:avLst/>
+          </a:prstGeom>
+          <a:solidFill>
+            <a:srgbClr val="F8FAFC"/>
+          </a:solidFill>
+          <a:ln w="19050">
+            <a:solidFill>
+              <a:srgbClr val="109566"/>
+            </a:solidFill>
+          </a:ln>
+        </p:spPr>
+        <p:style>
+          <a:lnRef idx="1">
+            <a:schemeClr val="accent1"/>
+          </a:lnRef>
+          <a:fillRef idx="3">
+            <a:schemeClr val="accent1"/>
+          </a:fillRef>
+          <a:effectRef idx="2">
+            <a:schemeClr val="accent1"/>
+          </a:effectRef>
+          <a:fontRef idx="minor">
+            <a:schemeClr val="lt1"/>
+          </a:fontRef>
+        </p:style>
+        <p:txBody>
+          <a:bodyPr rtlCol="0" anchor="ctr" wrap="square" tIns="91440" bIns="91440"/>
+          <a:lstStyle/>
+          <a:p>
+            <a:pPr algn="ctr">
+              <a:defRPr sz="1200" b="1">
+                <a:solidFill>
+                  <a:srgbClr val="109566"/>
+                </a:solidFill>
+              </a:defRPr>
+            </a:pPr>
+            <a:r>
+              <a:t>Family Caregivers</a:t>
+            </a:r>
+          </a:p>
+          <a:p>
+            <a:pPr>
+              <a:spcBef>
+                <a:spcPts val="300"/>
+              </a:spcBef>
+              <a:defRPr sz="1050">
+                <a:solidFill>
+                  <a:srgbClr val="000000"/>
+                </a:solidFill>
+              </a:defRPr>
+            </a:pPr>
+            <a:r>
+              <a:t>Reduces 70%+ caregiver burnout by automating repetitive routine checks, hydration alerts, and missed-dose notifications.</a:t>
+            </a:r>
+          </a:p>
+        </p:txBody>
+      </p:sp>
+      <p:sp>
+        <p:nvSpPr>
+          <p:cNvPr id="10" name="Rounded Rectangle 9"/>
+          <p:cNvSpPr/>
+          <p:nvPr/>
+        </p:nvSpPr>
+        <p:spPr>
+          <a:xfrm>
+            <a:off x="8046720" y="1645920"/>
+            <a:ext cx="3429000" cy="1463040"/>
+          </a:xfrm>
+          <a:prstGeom prst="roundRect">
+            <a:avLst/>
+          </a:prstGeom>
+          <a:solidFill>
+            <a:srgbClr val="F8FAFC"/>
+          </a:solidFill>
+          <a:ln w="19050">
+            <a:solidFill>
+              <a:srgbClr val="7030A0"/>
+            </a:solidFill>
+          </a:ln>
+        </p:spPr>
+        <p:style>
+          <a:lnRef idx="1">
+            <a:schemeClr val="accent1"/>
+          </a:lnRef>
+          <a:fillRef idx="3">
+            <a:schemeClr val="accent1"/>
+          </a:fillRef>
+          <a:effectRef idx="2">
+            <a:schemeClr val="accent1"/>
+          </a:effectRef>
+          <a:fontRef idx="minor">
+            <a:schemeClr val="lt1"/>
+          </a:fontRef>
+        </p:style>
+        <p:txBody>
+          <a:bodyPr rtlCol="0" anchor="ctr" wrap="square" tIns="91440" bIns="91440"/>
+          <a:lstStyle/>
+          <a:p>
+            <a:pPr algn="ctr">
+              <a:defRPr sz="1200" b="1">
+                <a:solidFill>
+                  <a:srgbClr val="7030A0"/>
+                </a:solidFill>
+              </a:defRPr>
+            </a:pPr>
+            <a:r>
+              <a:t>Deaf &amp; Mute Individuals</a:t>
+            </a:r>
+          </a:p>
+          <a:p>
+            <a:pPr>
+              <a:spcBef>
+                <a:spcPts val="300"/>
+              </a:spcBef>
+              <a:defRPr sz="1050">
+                <a:solidFill>
+                  <a:srgbClr val="000000"/>
+                </a:solidFill>
+              </a:defRPr>
+            </a:pPr>
+            <a:r>
+              <a:t>Bridges critical healthcare communication barriers via SignBridge real-time Indian Sign Language (ISL) teleconsultation.</a:t>
+            </a:r>
+          </a:p>
+        </p:txBody>
+      </p:sp>
+      <p:sp>
+        <p:nvSpPr>
+          <p:cNvPr id="11" name="TextBox 10"/>
+          <p:cNvSpPr txBox="1"/>
+          <p:nvPr/>
+        </p:nvSpPr>
+        <p:spPr>
+          <a:xfrm>
+            <a:off x="731520" y="3291840"/>
+            <a:ext cx="10698480" cy="365760"/>
+          </a:xfrm>
+          <a:prstGeom prst="rect">
+            <a:avLst/>
+          </a:prstGeom>
+          <a:noFill/>
+        </p:spPr>
+        <p:txBody>
+          <a:bodyPr wrap="none">
+            <a:spAutoFit/>
+          </a:bodyPr>
+          <a:lstStyle/>
+          <a:p>
+            <a:pPr>
               <a:defRPr sz="1300" b="1">
                 <a:solidFill>
-                  <a:srgbClr val="3B82F6"/>
-                </a:solidFill>
-              </a:defRPr>
-            </a:pPr>
-            <a:r>
-              <a:t>🌍 SOCIETAL &amp; ECONOMIC BENEFITS</a:t>
+                  <a:srgbClr val="000000"/>
+                </a:solidFill>
+              </a:defRPr>
+            </a:pPr>
+            <a:r>
+              <a:t>•  Benefits of the solution (Social, Economic, Healthcare &amp; Scalability):</a:t>
+            </a:r>
+          </a:p>
+        </p:txBody>
+      </p:sp>
+      <p:sp>
+        <p:nvSpPr>
+          <p:cNvPr id="12" name="Rounded Rectangle 11"/>
+          <p:cNvSpPr/>
+          <p:nvPr/>
+        </p:nvSpPr>
+        <p:spPr>
+          <a:xfrm>
+            <a:off x="731520" y="3749039"/>
+            <a:ext cx="3429000" cy="2011680"/>
+          </a:xfrm>
+          <a:prstGeom prst="roundRect">
+            <a:avLst/>
+          </a:prstGeom>
+          <a:solidFill>
+            <a:srgbClr val="F8FAFC"/>
+          </a:solidFill>
+          <a:ln w="19050">
+            <a:solidFill>
+              <a:srgbClr val="0E5BAF"/>
+            </a:solidFill>
+          </a:ln>
+        </p:spPr>
+        <p:style>
+          <a:lnRef idx="1">
+            <a:schemeClr val="accent1"/>
+          </a:lnRef>
+          <a:fillRef idx="3">
+            <a:schemeClr val="accent1"/>
+          </a:fillRef>
+          <a:effectRef idx="2">
+            <a:schemeClr val="accent1"/>
+          </a:effectRef>
+          <a:fontRef idx="minor">
+            <a:schemeClr val="lt1"/>
+          </a:fontRef>
+        </p:style>
+        <p:txBody>
+          <a:bodyPr rtlCol="0" anchor="ctr" wrap="square" tIns="91440" bIns="91440"/>
+          <a:lstStyle/>
+          <a:p>
+            <a:pPr algn="ctr">
+              <a:defRPr sz="1200" b="1">
+                <a:solidFill>
+                  <a:srgbClr val="0E5BAF"/>
+                </a:solidFill>
+              </a:defRPr>
+            </a:pPr>
+            <a:r>
+              <a:t>🌍 Social Impact</a:t>
             </a:r>
           </a:p>
           <a:p>
             <a:pPr>
-              <a:defRPr sz="1100" b="1">
-                <a:solidFill>
-                  <a:srgbClr val="FFFFFF"/>
-                </a:solidFill>
-              </a:defRPr>
-            </a:pPr>
-            <a:r>
-              <a:t>• Social Inclusivity:</a:t>
+              <a:spcBef>
+                <a:spcPts val="400"/>
+              </a:spcBef>
+              <a:defRPr sz="1050">
+                <a:solidFill>
+                  <a:srgbClr val="000000"/>
+                </a:solidFill>
+              </a:defRPr>
+            </a:pPr>
+            <a:r>
+              <a:t>Promotes inclusive digital health for India's 6.3 Cr seniors and 1.8 Cr deaf/mute community under Ayushman Bharat (ABDM).</a:t>
+            </a:r>
+          </a:p>
+        </p:txBody>
+      </p:sp>
+      <p:sp>
+        <p:nvSpPr>
+          <p:cNvPr id="13" name="Rounded Rectangle 12"/>
+          <p:cNvSpPr/>
+          <p:nvPr/>
+        </p:nvSpPr>
+        <p:spPr>
+          <a:xfrm>
+            <a:off x="4389120" y="3749039"/>
+            <a:ext cx="3429000" cy="2011680"/>
+          </a:xfrm>
+          <a:prstGeom prst="roundRect">
+            <a:avLst/>
+          </a:prstGeom>
+          <a:solidFill>
+            <a:srgbClr val="F8FAFC"/>
+          </a:solidFill>
+          <a:ln w="19050">
+            <a:solidFill>
+              <a:srgbClr val="109566"/>
+            </a:solidFill>
+          </a:ln>
+        </p:spPr>
+        <p:style>
+          <a:lnRef idx="1">
+            <a:schemeClr val="accent1"/>
+          </a:lnRef>
+          <a:fillRef idx="3">
+            <a:schemeClr val="accent1"/>
+          </a:fillRef>
+          <a:effectRef idx="2">
+            <a:schemeClr val="accent1"/>
+          </a:effectRef>
+          <a:fontRef idx="minor">
+            <a:schemeClr val="lt1"/>
+          </a:fontRef>
+        </p:style>
+        <p:txBody>
+          <a:bodyPr rtlCol="0" anchor="ctr" wrap="square" tIns="91440" bIns="91440"/>
+          <a:lstStyle/>
+          <a:p>
+            <a:pPr algn="ctr">
+              <a:defRPr sz="1200" b="1">
+                <a:solidFill>
+                  <a:srgbClr val="109566"/>
+                </a:solidFill>
+              </a:defRPr>
+            </a:pPr>
+            <a:r>
+              <a:t>💰 Economic Benefits</a:t>
             </a:r>
           </a:p>
           <a:p>
             <a:pPr>
-              <a:spcAft>
-                <a:spcPts val="800"/>
-              </a:spcAft>
-              <a:defRPr sz="1000">
-                <a:solidFill>
-                  <a:srgbClr val="CBD5E1"/>
-                </a:solidFill>
-              </a:defRPr>
-            </a:pPr>
-            <a:r>
-              <a:t>  Empowers India's 6.3 crore seniors &amp; 1.8 crore deaf/mute population with dignified digital healthcare.</a:t>
+              <a:spcBef>
+                <a:spcPts val="400"/>
+              </a:spcBef>
+              <a:defRPr sz="1050">
+                <a:solidFill>
+                  <a:srgbClr val="000000"/>
+                </a:solidFill>
+              </a:defRPr>
+            </a:pPr>
+            <a:r>
+              <a:t>Cuts emergency hospital readmission costs caused by missed medications, falls, or late interventions by up to 40%.</a:t>
+            </a:r>
+          </a:p>
+        </p:txBody>
+      </p:sp>
+      <p:sp>
+        <p:nvSpPr>
+          <p:cNvPr id="14" name="Rounded Rectangle 13"/>
+          <p:cNvSpPr/>
+          <p:nvPr/>
+        </p:nvSpPr>
+        <p:spPr>
+          <a:xfrm>
+            <a:off x="8046720" y="3749039"/>
+            <a:ext cx="3429000" cy="2011680"/>
+          </a:xfrm>
+          <a:prstGeom prst="roundRect">
+            <a:avLst/>
+          </a:prstGeom>
+          <a:solidFill>
+            <a:srgbClr val="F8FAFC"/>
+          </a:solidFill>
+          <a:ln w="19050">
+            <a:solidFill>
+              <a:srgbClr val="7030A0"/>
+            </a:solidFill>
+          </a:ln>
+        </p:spPr>
+        <p:style>
+          <a:lnRef idx="1">
+            <a:schemeClr val="accent1"/>
+          </a:lnRef>
+          <a:fillRef idx="3">
+            <a:schemeClr val="accent1"/>
+          </a:fillRef>
+          <a:effectRef idx="2">
+            <a:schemeClr val="accent1"/>
+          </a:effectRef>
+          <a:fontRef idx="minor">
+            <a:schemeClr val="lt1"/>
+          </a:fontRef>
+        </p:style>
+        <p:txBody>
+          <a:bodyPr rtlCol="0" anchor="ctr" wrap="square" tIns="91440" bIns="91440"/>
+          <a:lstStyle/>
+          <a:p>
+            <a:pPr algn="ctr">
+              <a:defRPr sz="1200" b="1">
+                <a:solidFill>
+                  <a:srgbClr val="7030A0"/>
+                </a:solidFill>
+              </a:defRPr>
+            </a:pPr>
+            <a:r>
+              <a:t>📈 Scalability &amp; Deployment</a:t>
             </a:r>
           </a:p>
           <a:p>
             <a:pPr>
-              <a:defRPr sz="1100" b="1">
-                <a:solidFill>
-                  <a:srgbClr val="FFFFFF"/>
-                </a:solidFill>
-              </a:defRPr>
-            </a:pPr>
-            <a:r>
-              <a:t>• Economic Savings:</a:t>
-            </a:r>
-          </a:p>
-          <a:p>
-            <a:pPr>
-              <a:spcAft>
-                <a:spcPts val="800"/>
-              </a:spcAft>
-              <a:defRPr sz="1000">
-                <a:solidFill>
-                  <a:srgbClr val="CBD5E1"/>
-                </a:solidFill>
-              </a:defRPr>
-            </a:pPr>
-            <a:r>
-              <a:t>  Drastically cuts costly hospital readmissions and emergency room visits caused by missed medications.</a:t>
-            </a:r>
-          </a:p>
-          <a:p>
-            <a:pPr>
-              <a:defRPr sz="1100" b="1">
-                <a:solidFill>
-                  <a:srgbClr val="FFFFFF"/>
-                </a:solidFill>
-              </a:defRPr>
-            </a:pPr>
-            <a:r>
-              <a:t>• National Alignment:</a:t>
-            </a:r>
-          </a:p>
-          <a:p>
-            <a:pPr>
-              <a:spcAft>
-                <a:spcPts val="800"/>
-              </a:spcAft>
-              <a:defRPr sz="1000">
-                <a:solidFill>
-                  <a:srgbClr val="CBD5E1"/>
-                </a:solidFill>
-              </a:defRPr>
-            </a:pPr>
-            <a:r>
-              <a:t>  Directly supports Ayushman Bharat Digital Mission (ABDM) and Accessible India Campaign (Sugamya Bharat).</a:t>
+              <a:spcBef>
+                <a:spcPts val="400"/>
+              </a:spcBef>
+              <a:defRPr sz="1050">
+                <a:solidFill>
+                  <a:srgbClr val="000000"/>
+                </a:solidFill>
+              </a:defRPr>
+            </a:pPr>
+            <a:r>
+              <a:t>Ready for instant nationwide deployment across Old Age Homes, Memory Clinics, Primary Health Centers (PHCs), and NGOs.</a:t>
             </a:r>
           </a:p>
         </p:txBody>
@@ -6058,7 +6299,7 @@
             <a:avLst/>
           </a:prstGeom>
           <a:solidFill>
-            <a:srgbClr val="0F172A"/>
+            <a:srgbClr val="FFFFFF"/>
           </a:solidFill>
           <a:ln>
             <a:noFill/>
@@ -6088,72 +6329,23 @@
       </p:sp>
       <p:sp>
         <p:nvSpPr>
-          <p:cNvPr id="3" name="TextBox 2"/>
-          <p:cNvSpPr txBox="1"/>
+          <p:cNvPr id="3" name="Rectangle 2"/>
+          <p:cNvSpPr/>
           <p:nvPr/>
         </p:nvSpPr>
         <p:spPr>
           <a:xfrm>
-            <a:off x="731520" y="365760"/>
-            <a:ext cx="10698480" cy="822960"/>
+            <a:off x="0" y="6309360"/>
+            <a:ext cx="12191695" cy="548640"/>
           </a:xfrm>
           <a:prstGeom prst="rect">
             <a:avLst/>
           </a:prstGeom>
-          <a:noFill/>
-        </p:spPr>
-        <p:txBody>
-          <a:bodyPr wrap="square" lIns="0" tIns="0" rIns="0" bIns="0">
-            <a:spAutoFit/>
-          </a:bodyPr>
-          <a:lstStyle/>
-          <a:p>
-            <a:pPr>
-              <a:defRPr sz="1100" b="1">
-                <a:solidFill>
-                  <a:srgbClr val="10B981"/>
-                </a:solidFill>
-              </a:defRPr>
-            </a:pPr>
-            <a:r>
-              <a:t>SIH 2025 IDEA SUBMISSION</a:t>
-            </a:r>
-          </a:p>
-          <a:p>
-            <a:pPr>
-              <a:defRPr sz="2200" b="1">
-                <a:solidFill>
-                  <a:srgbClr val="FFFFFF"/>
-                </a:solidFill>
-              </a:defRPr>
-            </a:pPr>
-            <a:r>
-              <a:t>RESEARCH AND REFERENCES (Clinical &amp; Project Links)</a:t>
-            </a:r>
-          </a:p>
-        </p:txBody>
-      </p:sp>
-      <p:sp>
-        <p:nvSpPr>
-          <p:cNvPr id="4" name="Rounded Rectangle 3"/>
-          <p:cNvSpPr/>
-          <p:nvPr/>
-        </p:nvSpPr>
-        <p:spPr>
-          <a:xfrm>
-            <a:off x="9601200" y="365760"/>
-            <a:ext cx="1828800" cy="594360"/>
-          </a:xfrm>
-          <a:prstGeom prst="roundRect">
-            <a:avLst/>
-          </a:prstGeom>
           <a:solidFill>
-            <a:srgbClr val="1E293B"/>
+            <a:srgbClr val="0072C6"/>
           </a:solidFill>
-          <a:ln w="19050">
-            <a:solidFill>
-              <a:srgbClr val="10B981"/>
-            </a:solidFill>
+          <a:ln>
+            <a:noFill/>
           </a:ln>
         </p:spPr>
         <p:style>
@@ -6175,38 +6367,62 @@
           <a:lstStyle/>
           <a:p>
             <a:pPr algn="ctr">
-              <a:defRPr sz="1100" b="1">
+              <a:defRPr sz="1100">
                 <a:solidFill>
                   <a:srgbClr val="FFFFFF"/>
                 </a:solidFill>
               </a:defRPr>
             </a:pPr>
             <a:r>
-              <a:t>Team: PBCOE-Nexora</a:t>
-            </a:r>
-          </a:p>
-        </p:txBody>
-      </p:sp>
-      <p:sp>
-        <p:nvSpPr>
-          <p:cNvPr id="5" name="Rounded Rectangle 4"/>
+              <a:t>@SIH Idea submission- Template                                                                                                                                                 6</a:t>
+            </a:r>
+          </a:p>
+        </p:txBody>
+      </p:sp>
+      <p:pic>
+        <p:nvPicPr>
+          <p:cNvPr id="4" name="Picture 3" descr="sih_logo.png"/>
+          <p:cNvPicPr>
+            <a:picLocks noChangeAspect="1"/>
+          </p:cNvPicPr>
+          <p:nvPr/>
+        </p:nvPicPr>
+        <p:blipFill>
+          <a:blip r:embed="rId2"/>
+          <a:stretch>
+            <a:fillRect/>
+          </a:stretch>
+        </p:blipFill>
+        <p:spPr>
+          <a:xfrm>
+            <a:off x="9692640" y="228600"/>
+            <a:ext cx="2103120" cy="1051560"/>
+          </a:xfrm>
+          <a:prstGeom prst="rect">
+            <a:avLst/>
+          </a:prstGeom>
+        </p:spPr>
+      </p:pic>
+      <p:sp>
+        <p:nvSpPr>
+          <p:cNvPr id="5" name="Oval 4"/>
           <p:cNvSpPr/>
           <p:nvPr/>
         </p:nvSpPr>
         <p:spPr>
           <a:xfrm>
-            <a:off x="731520" y="1371600"/>
-            <a:ext cx="5486400" cy="5029200"/>
-          </a:xfrm>
-          <a:prstGeom prst="roundRect">
+            <a:off x="731520" y="320040"/>
+            <a:ext cx="1645920" cy="914400"/>
+          </a:xfrm>
+          <a:prstGeom prst="ellipse">
             <a:avLst/>
           </a:prstGeom>
           <a:solidFill>
-            <a:srgbClr val="1E293B"/>
+            <a:srgbClr val="FFFFFF"/>
           </a:solidFill>
-          <a:ln w="19050">
+          <a:ln w="25400">
             <a:solidFill>
-              <a:srgbClr val="10B981"/>
+              <a:srgbClr val="7030A0"/>
             </a:solidFill>
           </a:ln>
         </p:spPr>
@@ -6225,28 +6441,165 @@
           </a:fontRef>
         </p:style>
         <p:txBody>
-          <a:bodyPr rtlCol="0" anchor="ctr" wrap="square" lIns="182880" tIns="182880" rIns="182880" bIns="182880"/>
+          <a:bodyPr rtlCol="0" anchor="ctr"/>
+          <a:lstStyle/>
+          <a:p>
+            <a:pPr algn="ctr">
+              <a:defRPr sz="1000">
+                <a:solidFill>
+                  <a:srgbClr val="000000"/>
+                </a:solidFill>
+              </a:defRPr>
+            </a:pPr>
+            <a:r>
+              <a:t>Team:</a:t>
+            </a:r>
+          </a:p>
+          <a:p>
+            <a:pPr algn="ctr">
+              <a:defRPr sz="1100" b="1">
+                <a:solidFill>
+                  <a:srgbClr val="7030A0"/>
+                </a:solidFill>
+              </a:defRPr>
+            </a:pPr>
+            <a:r>
+              <a:t>PBCOE-Nexora</a:t>
+            </a:r>
+          </a:p>
+        </p:txBody>
+      </p:sp>
+      <p:sp>
+        <p:nvSpPr>
+          <p:cNvPr id="6" name="TextBox 5"/>
+          <p:cNvSpPr txBox="1"/>
+          <p:nvPr/>
+        </p:nvSpPr>
+        <p:spPr>
+          <a:xfrm>
+            <a:off x="2560320" y="320040"/>
+            <a:ext cx="6858000" cy="822960"/>
+          </a:xfrm>
+          <a:prstGeom prst="rect">
+            <a:avLst/>
+          </a:prstGeom>
+          <a:noFill/>
+        </p:spPr>
+        <p:txBody>
+          <a:bodyPr wrap="none">
+            <a:spAutoFit/>
+          </a:bodyPr>
+          <a:lstStyle/>
+          <a:p>
+            <a:pPr algn="ctr">
+              <a:defRPr sz="2400" b="1">
+                <a:solidFill>
+                  <a:srgbClr val="000000"/>
+                </a:solidFill>
+                <a:latin typeface="Calibri"/>
+              </a:defRPr>
+            </a:pPr>
+            <a:r>
+              <a:t>RESEARCH AND REFERENCES</a:t>
+            </a:r>
+          </a:p>
+        </p:txBody>
+      </p:sp>
+      <p:sp>
+        <p:nvSpPr>
+          <p:cNvPr id="7" name="TextBox 6"/>
+          <p:cNvSpPr txBox="1"/>
+          <p:nvPr/>
+        </p:nvSpPr>
+        <p:spPr>
+          <a:xfrm>
+            <a:off x="731520" y="1188720"/>
+            <a:ext cx="10698480" cy="365760"/>
+          </a:xfrm>
+          <a:prstGeom prst="rect">
+            <a:avLst/>
+          </a:prstGeom>
+          <a:noFill/>
+        </p:spPr>
+        <p:txBody>
+          <a:bodyPr wrap="none">
+            <a:spAutoFit/>
+          </a:bodyPr>
+          <a:lstStyle/>
+          <a:p>
+            <a:pPr>
+              <a:defRPr sz="1300" b="1">
+                <a:solidFill>
+                  <a:srgbClr val="000000"/>
+                </a:solidFill>
+              </a:defRPr>
+            </a:pPr>
+            <a:r>
+              <a:t>•  Details / Links of the reference and research work:</a:t>
+            </a:r>
+          </a:p>
+        </p:txBody>
+      </p:sp>
+      <p:sp>
+        <p:nvSpPr>
+          <p:cNvPr id="8" name="Rounded Rectangle 7"/>
+          <p:cNvSpPr/>
+          <p:nvPr/>
+        </p:nvSpPr>
+        <p:spPr>
+          <a:xfrm>
+            <a:off x="731520" y="1645920"/>
+            <a:ext cx="5303520" cy="4389120"/>
+          </a:xfrm>
+          <a:prstGeom prst="roundRect">
+            <a:avLst/>
+          </a:prstGeom>
+          <a:solidFill>
+            <a:srgbClr val="F8FAFC"/>
+          </a:solidFill>
+          <a:ln w="19050">
+            <a:solidFill>
+              <a:srgbClr val="0E5BAF"/>
+            </a:solidFill>
+          </a:ln>
+        </p:spPr>
+        <p:style>
+          <a:lnRef idx="1">
+            <a:schemeClr val="accent1"/>
+          </a:lnRef>
+          <a:fillRef idx="3">
+            <a:schemeClr val="accent1"/>
+          </a:fillRef>
+          <a:effectRef idx="2">
+            <a:schemeClr val="accent1"/>
+          </a:effectRef>
+          <a:fontRef idx="minor">
+            <a:schemeClr val="lt1"/>
+          </a:fontRef>
+        </p:style>
+        <p:txBody>
+          <a:bodyPr rtlCol="0" anchor="ctr" wrap="square" lIns="137160" tIns="137160" rIns="137160" bIns="137160"/>
           <a:lstStyle/>
           <a:p>
             <a:pPr algn="ctr">
               <a:spcAft>
                 <a:spcPts val="800"/>
               </a:spcAft>
-              <a:defRPr sz="1300" b="1">
-                <a:solidFill>
-                  <a:srgbClr val="10B981"/>
-                </a:solidFill>
-              </a:defRPr>
-            </a:pPr>
-            <a:r>
-              <a:t>📚 CLINICAL &amp; RESEARCH REFERENCES</a:t>
+              <a:defRPr sz="1250" b="1">
+                <a:solidFill>
+                  <a:srgbClr val="0E5BAF"/>
+                </a:solidFill>
+              </a:defRPr>
+            </a:pPr>
+            <a:r>
+              <a:t>📚 Clinical Research &amp; Government Policies</a:t>
             </a:r>
           </a:p>
           <a:p>
             <a:pPr>
               <a:defRPr sz="1100" b="1">
                 <a:solidFill>
-                  <a:srgbClr val="FFFFFF"/>
+                  <a:srgbClr val="000000"/>
                 </a:solidFill>
               </a:defRPr>
             </a:pPr>
@@ -6261,7 +6614,7 @@
               </a:spcAft>
               <a:defRPr sz="1000">
                 <a:solidFill>
-                  <a:srgbClr val="CBD5E1"/>
+                  <a:srgbClr val="475569"/>
                 </a:solidFill>
               </a:defRPr>
             </a:pPr>
@@ -6273,7 +6626,7 @@
             <a:pPr>
               <a:defRPr sz="1100" b="1">
                 <a:solidFill>
-                  <a:srgbClr val="FFFFFF"/>
+                  <a:srgbClr val="000000"/>
                 </a:solidFill>
               </a:defRPr>
             </a:pPr>
@@ -6288,19 +6641,19 @@
               </a:spcAft>
               <a:defRPr sz="1000">
                 <a:solidFill>
-                  <a:srgbClr val="CBD5E1"/>
-                </a:solidFill>
-              </a:defRPr>
-            </a:pPr>
-            <a:r>
-              <a:t>  Bio-Psycho-Social Reminiscence Therapy and Spaced Retrieval Gaming for Mild Cognitive Impairment (MCI).</a:t>
+                  <a:srgbClr val="475569"/>
+                </a:solidFill>
+              </a:defRPr>
+            </a:pPr>
+            <a:r>
+              <a:t>  Bio-Psycho-Social Reminiscence Therapy &amp; Spaced Retrieval Gaming for Mild Cognitive Impairment (MCI).</a:t>
             </a:r>
           </a:p>
           <a:p>
             <a:pPr>
               <a:defRPr sz="1100" b="1">
                 <a:solidFill>
-                  <a:srgbClr val="FFFFFF"/>
+                  <a:srgbClr val="000000"/>
                 </a:solidFill>
               </a:defRPr>
             </a:pPr>
@@ -6315,24 +6668,24 @@
               </a:spcAft>
               <a:defRPr sz="1000">
                 <a:solidFill>
-                  <a:srgbClr val="CBD5E1"/>
-                </a:solidFill>
-              </a:defRPr>
-            </a:pPr>
-            <a:r>
-              <a:t>  MediaPipe Hands: Real-Time On-Device Hand Landmark Detection &amp; Indian Sign Language Research Centre (ISLRTC) corpus.</a:t>
+                  <a:srgbClr val="475569"/>
+                </a:solidFill>
+              </a:defRPr>
+            </a:pPr>
+            <a:r>
+              <a:t>  MediaPipe Hands: Real-Time On-Device Hand Landmark Detection &amp; ISLRTC Sign Corpus.</a:t>
             </a:r>
           </a:p>
           <a:p>
             <a:pPr>
               <a:defRPr sz="1100" b="1">
                 <a:solidFill>
-                  <a:srgbClr val="FFFFFF"/>
-                </a:solidFill>
-              </a:defRPr>
-            </a:pPr>
-            <a:r>
-              <a:t>• Govt. of India Guidelines:</a:t>
+                  <a:srgbClr val="000000"/>
+                </a:solidFill>
+              </a:defRPr>
+            </a:pPr>
+            <a:r>
+              <a:t>• Govt. of India (MoHFW):</a:t>
             </a:r>
           </a:p>
           <a:p>
@@ -6342,36 +6695,36 @@
               </a:spcAft>
               <a:defRPr sz="1000">
                 <a:solidFill>
-                  <a:srgbClr val="CBD5E1"/>
-                </a:solidFill>
-              </a:defRPr>
-            </a:pPr>
-            <a:r>
-              <a:t>  Ayushman Bharat Digital Mission (ABDM) &amp; National Digital Health Blueprint (NDHB), MoHFW.</a:t>
-            </a:r>
-          </a:p>
-        </p:txBody>
-      </p:sp>
-      <p:sp>
-        <p:nvSpPr>
-          <p:cNvPr id="6" name="Rounded Rectangle 5"/>
+                  <a:srgbClr val="475569"/>
+                </a:solidFill>
+              </a:defRPr>
+            </a:pPr>
+            <a:r>
+              <a:t>  Ayushman Bharat Digital Mission (ABDM) &amp; National Digital Health Blueprint (NDHB) standards.</a:t>
+            </a:r>
+          </a:p>
+        </p:txBody>
+      </p:sp>
+      <p:sp>
+        <p:nvSpPr>
+          <p:cNvPr id="9" name="Rounded Rectangle 8"/>
           <p:cNvSpPr/>
           <p:nvPr/>
         </p:nvSpPr>
         <p:spPr>
           <a:xfrm>
-            <a:off x="6492240" y="1371600"/>
-            <a:ext cx="4967935" cy="5029200"/>
+            <a:off x="6309360" y="1645920"/>
+            <a:ext cx="5150815" cy="4389120"/>
           </a:xfrm>
           <a:prstGeom prst="roundRect">
             <a:avLst/>
           </a:prstGeom>
           <a:solidFill>
-            <a:srgbClr val="1E293B"/>
+            <a:srgbClr val="F8FAFC"/>
           </a:solidFill>
           <a:ln w="19050">
             <a:solidFill>
-              <a:srgbClr val="06B6D4"/>
+              <a:srgbClr val="109566"/>
             </a:solidFill>
           </a:ln>
         </p:spPr>
@@ -6390,156 +6743,183 @@
           </a:fontRef>
         </p:style>
         <p:txBody>
-          <a:bodyPr rtlCol="0" anchor="ctr" wrap="square" lIns="182880" tIns="182880" rIns="182880" bIns="182880"/>
+          <a:bodyPr rtlCol="0" anchor="ctr" wrap="square" lIns="137160" tIns="137160" rIns="137160" bIns="137160"/>
           <a:lstStyle/>
           <a:p>
             <a:pPr algn="ctr">
               <a:spcAft>
                 <a:spcPts val="800"/>
               </a:spcAft>
-              <a:defRPr sz="1300" b="1">
-                <a:solidFill>
-                  <a:srgbClr val="06B6D4"/>
-                </a:solidFill>
-              </a:defRPr>
-            </a:pPr>
-            <a:r>
-              <a:t>🔗 PROJECT DELIVERABLES &amp; TEAM</a:t>
+              <a:defRPr sz="1250" b="1">
+                <a:solidFill>
+                  <a:srgbClr val="109566"/>
+                </a:solidFill>
+              </a:defRPr>
+            </a:pPr>
+            <a:r>
+              <a:t>🔗 Live Project Links &amp; Team Details</a:t>
             </a:r>
           </a:p>
           <a:p>
             <a:pPr>
               <a:defRPr sz="1100" b="1">
                 <a:solidFill>
-                  <a:srgbClr val="10B981"/>
-                </a:solidFill>
-              </a:defRPr>
-            </a:pPr>
-            <a:r>
-              <a:t>Team Name:</a:t>
+                  <a:srgbClr val="000000"/>
+                </a:solidFill>
+              </a:defRPr>
+            </a:pPr>
+            <a:r>
+              <a:t>• Team Name:</a:t>
             </a:r>
           </a:p>
           <a:p>
             <a:pPr>
               <a:spcAft>
-                <a:spcPts val="800"/>
+                <a:spcPts val="600"/>
               </a:spcAft>
-              <a:defRPr sz="1100">
-                <a:solidFill>
-                  <a:srgbClr val="FFFFFF"/>
-                </a:solidFill>
-              </a:defRPr>
-            </a:pPr>
-            <a:r>
-              <a:t>PBCOE-Nexora</a:t>
+              <a:defRPr sz="1100" b="1">
+                <a:solidFill>
+                  <a:srgbClr val="000000"/>
+                </a:solidFill>
+              </a:defRPr>
+            </a:pPr>
+            <a:r>
+              <a:t>  PBCOE-Nexora</a:t>
             </a:r>
           </a:p>
           <a:p>
             <a:pPr>
               <a:defRPr sz="1100" b="1">
                 <a:solidFill>
-                  <a:srgbClr val="10B981"/>
-                </a:solidFill>
-              </a:defRPr>
-            </a:pPr>
-            <a:r>
-              <a:t>Live Web Application Link:</a:t>
+                  <a:srgbClr val="000000"/>
+                </a:solidFill>
+              </a:defRPr>
+            </a:pPr>
+            <a:r>
+              <a:t>• Problem Statement ID:</a:t>
             </a:r>
           </a:p>
           <a:p>
             <a:pPr>
               <a:spcAft>
-                <a:spcPts val="800"/>
+                <a:spcPts val="600"/>
               </a:spcAft>
-              <a:defRPr sz="1100">
-                <a:solidFill>
-                  <a:srgbClr val="FFFFFF"/>
-                </a:solidFill>
-              </a:defRPr>
-            </a:pPr>
-            <a:r>
-              <a:t>https://aabha-ai.vercel.app</a:t>
+              <a:defRPr sz="1100" b="0">
+                <a:solidFill>
+                  <a:srgbClr val="000000"/>
+                </a:solidFill>
+              </a:defRPr>
+            </a:pPr>
+            <a:r>
+              <a:t>  SIH26003</a:t>
             </a:r>
           </a:p>
           <a:p>
             <a:pPr>
               <a:defRPr sz="1100" b="1">
                 <a:solidFill>
-                  <a:srgbClr val="10B981"/>
-                </a:solidFill>
-              </a:defRPr>
-            </a:pPr>
-            <a:r>
-              <a:t>GitHub Repository Link:</a:t>
+                  <a:srgbClr val="000000"/>
+                </a:solidFill>
+              </a:defRPr>
+            </a:pPr>
+            <a:r>
+              <a:t>• Live Web Application Link:</a:t>
             </a:r>
           </a:p>
           <a:p>
             <a:pPr>
               <a:spcAft>
-                <a:spcPts val="800"/>
+                <a:spcPts val="600"/>
               </a:spcAft>
-              <a:defRPr sz="1100">
-                <a:solidFill>
-                  <a:srgbClr val="FFFFFF"/>
-                </a:solidFill>
-              </a:defRPr>
-            </a:pPr>
-            <a:r>
-              <a:t>https://github.com/swayamgulhane538/Aabha-ai</a:t>
+              <a:defRPr sz="1100" b="1">
+                <a:solidFill>
+                  <a:srgbClr val="0E5BAF"/>
+                </a:solidFill>
+              </a:defRPr>
+            </a:pPr>
+            <a:r>
+              <a:t>  https://aabha-ai.vercel.app</a:t>
             </a:r>
           </a:p>
           <a:p>
             <a:pPr>
               <a:defRPr sz="1100" b="1">
                 <a:solidFill>
-                  <a:srgbClr val="10B981"/>
-                </a:solidFill>
-              </a:defRPr>
-            </a:pPr>
-            <a:r>
-              <a:t>Live Interactive Demo:</a:t>
+                  <a:srgbClr val="000000"/>
+                </a:solidFill>
+              </a:defRPr>
+            </a:pPr>
+            <a:r>
+              <a:t>• GitHub Repository Link:</a:t>
             </a:r>
           </a:p>
           <a:p>
             <a:pPr>
               <a:spcAft>
-                <a:spcPts val="800"/>
+                <a:spcPts val="600"/>
               </a:spcAft>
-              <a:defRPr sz="1100">
-                <a:solidFill>
-                  <a:srgbClr val="FFFFFF"/>
-                </a:solidFill>
-              </a:defRPr>
-            </a:pPr>
-            <a:r>
-              <a:t>Available directly inside app under 'Interactive Demo Tour'</a:t>
+              <a:defRPr sz="1100" b="1">
+                <a:solidFill>
+                  <a:srgbClr val="0E5BAF"/>
+                </a:solidFill>
+              </a:defRPr>
+            </a:pPr>
+            <a:r>
+              <a:t>  https://github.com/swayamgulhane538/Aabha-ai</a:t>
             </a:r>
           </a:p>
           <a:p>
             <a:pPr>
               <a:defRPr sz="1100" b="1">
                 <a:solidFill>
-                  <a:srgbClr val="10B981"/>
-                </a:solidFill>
-              </a:defRPr>
-            </a:pPr>
-            <a:r>
-              <a:t>Deployment Mode:</a:t>
+                  <a:srgbClr val="000000"/>
+                </a:solidFill>
+              </a:defRPr>
+            </a:pPr>
+            <a:r>
+              <a:t>• Interactive Demo Mode:</a:t>
             </a:r>
           </a:p>
           <a:p>
             <a:pPr>
               <a:spcAft>
-                <a:spcPts val="800"/>
+                <a:spcPts val="600"/>
               </a:spcAft>
-              <a:defRPr sz="1100">
-                <a:solidFill>
-                  <a:srgbClr val="FFFFFF"/>
-                </a:solidFill>
-              </a:defRPr>
-            </a:pPr>
-            <a:r>
-              <a:t>Web, Mobile PWA &amp; Offline IndexedDB</a:t>
+              <a:defRPr sz="1100" b="0">
+                <a:solidFill>
+                  <a:srgbClr val="000000"/>
+                </a:solidFill>
+              </a:defRPr>
+            </a:pPr>
+            <a:r>
+              <a:t>  Integrated directly inside app under 'Interactive Demo Tour'</a:t>
+            </a:r>
+          </a:p>
+          <a:p>
+            <a:pPr>
+              <a:defRPr sz="1100" b="1">
+                <a:solidFill>
+                  <a:srgbClr val="000000"/>
+                </a:solidFill>
+              </a:defRPr>
+            </a:pPr>
+            <a:r>
+              <a:t>• Platform Compatibility:</a:t>
+            </a:r>
+          </a:p>
+          <a:p>
+            <a:pPr>
+              <a:spcAft>
+                <a:spcPts val="600"/>
+              </a:spcAft>
+              <a:defRPr sz="1100" b="0">
+                <a:solidFill>
+                  <a:srgbClr val="000000"/>
+                </a:solidFill>
+              </a:defRPr>
+            </a:pPr>
+            <a:r>
+              <a:t>  Responsive Web, Mobile PWA, Tablet &amp; Offline Mode</a:t>
             </a:r>
           </a:p>
         </p:txBody>

--- a/SIH_2025_PBCOE_Nexora_AABHA_AI.pptx
+++ b/SIH_2025_PBCOE_Nexora_AABHA_AI.pptx
@@ -3749,7 +3749,7 @@
               </a:defRPr>
             </a:pPr>
             <a:r>
-              <a:t>AABHA AI (Assistive Healthcare Companion)</a:t>
+              <a:t>AABHA AI (Cognitive Healthcare Companion)</a:t>
             </a:r>
           </a:p>
         </p:txBody>
@@ -4467,7 +4467,7 @@
               </a:defRPr>
             </a:pPr>
             <a:r>
-              <a:t>•  Technologies to be used (programming languages, frameworks, AI &amp; speech):</a:t>
+              <a:t>•  Technologies to be used (e.g. programming languages, frameworks, hardware):</a:t>
             </a:r>
           </a:p>
           <a:p>
@@ -4538,7 +4538,7 @@
               </a:defRPr>
             </a:pPr>
             <a:r>
-              <a:t>•  Methodology and process for implementation (System Architecture Flowchart):</a:t>
+              <a:t>•  Methodology and process for implementation (Flow Charts/Images/working prototype):</a:t>
             </a:r>
           </a:p>
         </p:txBody>
@@ -5214,7 +5214,7 @@
               </a:defRPr>
             </a:pPr>
             <a:r>
-              <a:t>•  Potential challenges, risks and strategies for overcoming them (Mitigation Flowchart):</a:t>
+              <a:t>•  Potential challenges and risks &amp; Strategies for overcoming these challenges (Mitigation Matrix):</a:t>
             </a:r>
           </a:p>
         </p:txBody>
@@ -5268,7 +5268,7 @@
               </a:defRPr>
             </a:pPr>
             <a:r>
-              <a:t>Challenge 1: Poor Internet in Rural India</a:t>
+              <a:t>Potential Challenge: Poor Internet in Rural India</a:t>
             </a:r>
           </a:p>
         </p:txBody>
@@ -5376,7 +5376,7 @@
               </a:defRPr>
             </a:pPr>
             <a:r>
-              <a:t>Challenge 2: Multi-Lingual Dialects &amp; Noise</a:t>
+              <a:t>Potential Challenge: Multi-Lingual Dialects &amp; Noise</a:t>
             </a:r>
           </a:p>
         </p:txBody>
@@ -5484,7 +5484,7 @@
               </a:defRPr>
             </a:pPr>
             <a:r>
-              <a:t>Challenge 3: Elderly Fear of Complex Tech</a:t>
+              <a:t>Potential Challenge: Elderly Fear of Complex Tech</a:t>
             </a:r>
           </a:p>
         </p:txBody>
@@ -6054,7 +6054,7 @@
               </a:defRPr>
             </a:pPr>
             <a:r>
-              <a:t>•  Benefits of the solution (Social, Economic, Healthcare &amp; Scalability):</a:t>
+              <a:t>•  Benefits of the solution (social, economic, environmental, etc.):</a:t>
             </a:r>
           </a:p>
         </p:txBody>
@@ -6108,7 +6108,7 @@
               </a:defRPr>
             </a:pPr>
             <a:r>
-              <a:t>🌍 Social Impact</a:t>
+              <a:t>🌍 Social Benefits</a:t>
             </a:r>
           </a:p>
           <a:p>

--- a/SIH_2025_PBCOE_Nexora_AABHA_AI.pptx
+++ b/SIH_2025_PBCOE_Nexora_AABHA_AI.pptx
@@ -3204,7 +3204,7 @@
         </p:blipFill>
         <p:spPr>
           <a:xfrm>
-            <a:off x="9692640" y="228600"/>
+            <a:off x="9692640" y="201168"/>
             <a:ext cx="2103120" cy="1051560"/>
           </a:xfrm>
           <a:prstGeom prst="rect">
@@ -3256,8 +3256,8 @@
         </p:nvSpPr>
         <p:spPr>
           <a:xfrm>
-            <a:off x="2743200" y="1188720"/>
-            <a:ext cx="5486400" cy="548640"/>
+            <a:off x="2743200" y="1143000"/>
+            <a:ext cx="5486400" cy="502920"/>
           </a:xfrm>
           <a:prstGeom prst="rect">
             <a:avLst/>
@@ -3273,7 +3273,7 @@
             <a:pPr algn="ctr">
               <a:defRPr sz="2400" b="1">
                 <a:solidFill>
-                  <a:srgbClr val="000000"/>
+                  <a:srgbClr val="0F172A"/>
                 </a:solidFill>
                 <a:latin typeface="Times New Roman"/>
               </a:defRPr>
@@ -3316,8 +3316,8 @@
         </p:nvSpPr>
         <p:spPr>
           <a:xfrm>
-            <a:off x="731520" y="2011680"/>
-            <a:ext cx="6400800" cy="4114800"/>
+            <a:off x="731520" y="1828800"/>
+            <a:ext cx="6492240" cy="4297680"/>
           </a:xfrm>
           <a:prstGeom prst="rect">
             <a:avLst/>
@@ -3332,11 +3332,11 @@
           <a:p>
             <a:pPr>
               <a:spcAft>
-                <a:spcPts val="700"/>
+                <a:spcPts val="600"/>
               </a:spcAft>
-              <a:defRPr sz="1300" b="1">
-                <a:solidFill>
-                  <a:srgbClr val="000000"/>
+              <a:defRPr sz="1250" b="1">
+                <a:solidFill>
+                  <a:srgbClr val="0F172A"/>
                 </a:solidFill>
               </a:defRPr>
             </a:pPr>
@@ -3344,9 +3344,9 @@
               <a:t>•  Problem Statement ID – </a:t>
             </a:r>
             <a:r>
-              <a:rPr sz="1300" b="1">
-                <a:solidFill>
-                  <a:srgbClr val="000000"/>
+              <a:rPr sz="1250" b="1">
+                <a:solidFill>
+                  <a:srgbClr val="0F172A"/>
                 </a:solidFill>
               </a:rPr>
               <a:t>SIH26003</a:t>
@@ -3355,11 +3355,11 @@
           <a:p>
             <a:pPr>
               <a:spcAft>
-                <a:spcPts val="700"/>
+                <a:spcPts val="600"/>
               </a:spcAft>
-              <a:defRPr sz="1300" b="1">
-                <a:solidFill>
-                  <a:srgbClr val="000000"/>
+              <a:defRPr sz="1250" b="1">
+                <a:solidFill>
+                  <a:srgbClr val="0F172A"/>
                 </a:solidFill>
               </a:defRPr>
             </a:pPr>
@@ -3367,9 +3367,9 @@
               <a:t>•  Problem Statement Title – </a:t>
             </a:r>
             <a:r>
-              <a:rPr sz="1300" b="0">
-                <a:solidFill>
-                  <a:srgbClr val="000000"/>
+              <a:rPr sz="1250" b="0">
+                <a:solidFill>
+                  <a:srgbClr val="0F172A"/>
                 </a:solidFill>
               </a:rPr>
               <a:t>AI-Powered Cognitive Healthcare &amp; Assistive Companion for Elderly Dementia Patients</a:t>
@@ -3378,11 +3378,11 @@
           <a:p>
             <a:pPr>
               <a:spcAft>
-                <a:spcPts val="700"/>
+                <a:spcPts val="600"/>
               </a:spcAft>
-              <a:defRPr sz="1300" b="1">
-                <a:solidFill>
-                  <a:srgbClr val="000000"/>
+              <a:defRPr sz="1250" b="1">
+                <a:solidFill>
+                  <a:srgbClr val="0F172A"/>
                 </a:solidFill>
               </a:defRPr>
             </a:pPr>
@@ -3390,9 +3390,9 @@
               <a:t>•  Theme – </a:t>
             </a:r>
             <a:r>
-              <a:rPr sz="1300" b="0">
-                <a:solidFill>
-                  <a:srgbClr val="000000"/>
+              <a:rPr sz="1250" b="0">
+                <a:solidFill>
+                  <a:srgbClr val="0F172A"/>
                 </a:solidFill>
               </a:rPr>
               <a:t>MedTech / BioTech / HealthTech / Smart Automation</a:t>
@@ -3401,11 +3401,11 @@
           <a:p>
             <a:pPr>
               <a:spcAft>
-                <a:spcPts val="700"/>
+                <a:spcPts val="600"/>
               </a:spcAft>
-              <a:defRPr sz="1300" b="1">
-                <a:solidFill>
-                  <a:srgbClr val="000000"/>
+              <a:defRPr sz="1250" b="1">
+                <a:solidFill>
+                  <a:srgbClr val="0F172A"/>
                 </a:solidFill>
               </a:defRPr>
             </a:pPr>
@@ -3413,22 +3413,22 @@
               <a:t>•  PS Category – </a:t>
             </a:r>
             <a:r>
-              <a:rPr sz="1300" b="0">
-                <a:solidFill>
-                  <a:srgbClr val="000000"/>
+              <a:rPr sz="1250" b="0">
+                <a:solidFill>
+                  <a:srgbClr val="0F172A"/>
                 </a:solidFill>
               </a:rPr>
-              <a:t>Software</a:t>
+              <a:t>Software (Web, Mobile &amp; Offline Edge AI)</a:t>
             </a:r>
           </a:p>
           <a:p>
             <a:pPr>
               <a:spcAft>
-                <a:spcPts val="700"/>
+                <a:spcPts val="600"/>
               </a:spcAft>
-              <a:defRPr sz="1300" b="1">
-                <a:solidFill>
-                  <a:srgbClr val="000000"/>
+              <a:defRPr sz="1250" b="1">
+                <a:solidFill>
+                  <a:srgbClr val="0F172A"/>
                 </a:solidFill>
               </a:defRPr>
             </a:pPr>
@@ -3436,9 +3436,9 @@
               <a:t>•  Team ID – </a:t>
             </a:r>
             <a:r>
-              <a:rPr sz="1300" b="0">
-                <a:solidFill>
-                  <a:srgbClr val="000000"/>
+              <a:rPr sz="1250" b="0">
+                <a:solidFill>
+                  <a:srgbClr val="0F172A"/>
                 </a:solidFill>
               </a:rPr>
               <a:t>[Enter Your Registered Team ID]</a:t>
@@ -3447,11 +3447,11 @@
           <a:p>
             <a:pPr>
               <a:spcAft>
-                <a:spcPts val="700"/>
+                <a:spcPts val="600"/>
               </a:spcAft>
-              <a:defRPr sz="1300" b="1">
-                <a:solidFill>
-                  <a:srgbClr val="000000"/>
+              <a:defRPr sz="1250" b="1">
+                <a:solidFill>
+                  <a:srgbClr val="0F172A"/>
                 </a:solidFill>
               </a:defRPr>
             </a:pPr>
@@ -3459,9 +3459,9 @@
               <a:t>•  Team Name (Registered on portal) – </a:t>
             </a:r>
             <a:r>
-              <a:rPr sz="1300" b="1">
-                <a:solidFill>
-                  <a:srgbClr val="000000"/>
+              <a:rPr sz="1250" b="1">
+                <a:solidFill>
+                  <a:srgbClr val="059669"/>
                 </a:solidFill>
               </a:rPr>
               <a:t>PBCOE-Nexora</a:t>
@@ -3470,11 +3470,11 @@
           <a:p>
             <a:pPr>
               <a:spcAft>
-                <a:spcPts val="700"/>
+                <a:spcPts val="600"/>
               </a:spcAft>
-              <a:defRPr sz="1300" b="1">
-                <a:solidFill>
-                  <a:srgbClr val="000000"/>
+              <a:defRPr sz="1250" b="1">
+                <a:solidFill>
+                  <a:srgbClr val="0F172A"/>
                 </a:solidFill>
               </a:defRPr>
             </a:pPr>
@@ -3482,7 +3482,7 @@
               <a:t>•  Live Web App Link – </a:t>
             </a:r>
             <a:r>
-              <a:rPr sz="1300" b="1">
+              <a:rPr sz="1250" b="1">
                 <a:solidFill>
                   <a:srgbClr val="1B3F8B"/>
                 </a:solidFill>
@@ -3493,11 +3493,11 @@
           <a:p>
             <a:pPr>
               <a:spcAft>
-                <a:spcPts val="700"/>
+                <a:spcPts val="600"/>
               </a:spcAft>
-              <a:defRPr sz="1300" b="1">
-                <a:solidFill>
-                  <a:srgbClr val="000000"/>
+              <a:defRPr sz="1250" b="1">
+                <a:solidFill>
+                  <a:srgbClr val="0F172A"/>
                 </a:solidFill>
               </a:defRPr>
             </a:pPr>
@@ -3505,9 +3505,9 @@
               <a:t>•  GitHub Source Code – </a:t>
             </a:r>
             <a:r>
-              <a:rPr sz="1300" b="0">
-                <a:solidFill>
-                  <a:srgbClr val="000000"/>
+              <a:rPr sz="1250" b="0">
+                <a:solidFill>
+                  <a:srgbClr val="0F172A"/>
                 </a:solidFill>
               </a:rPr>
               <a:t>https://github.com/swayamgulhane538/Aabha-ai</a:t>
@@ -3644,7 +3644,7 @@
         </p:blipFill>
         <p:spPr>
           <a:xfrm>
-            <a:off x="9692640" y="228600"/>
+            <a:off x="9692640" y="201168"/>
             <a:ext cx="2103120" cy="1051560"/>
           </a:xfrm>
           <a:prstGeom prst="rect">
@@ -3660,8 +3660,8 @@
         </p:nvSpPr>
         <p:spPr>
           <a:xfrm>
-            <a:off x="731520" y="320040"/>
-            <a:ext cx="1645920" cy="914400"/>
+            <a:off x="640080" y="292608"/>
+            <a:ext cx="1691640" cy="914400"/>
           </a:xfrm>
           <a:prstGeom prst="ellipse">
             <a:avLst/>
@@ -3669,7 +3669,7 @@
           <a:solidFill>
             <a:srgbClr val="FFFFFF"/>
           </a:solidFill>
-          <a:ln w="25400">
+          <a:ln w="27940">
             <a:solidFill>
               <a:srgbClr val="7030A0"/>
             </a:solidFill>
@@ -3696,7 +3696,7 @@
             <a:pPr algn="ctr">
               <a:defRPr sz="1000">
                 <a:solidFill>
-                  <a:srgbClr val="000000"/>
+                  <a:srgbClr val="475569"/>
                 </a:solidFill>
               </a:defRPr>
             </a:pPr>
@@ -3726,8 +3726,8 @@
         </p:nvSpPr>
         <p:spPr>
           <a:xfrm>
-            <a:off x="2560320" y="320040"/>
-            <a:ext cx="6858000" cy="822960"/>
+            <a:off x="2468880" y="292608"/>
+            <a:ext cx="7040880" cy="822960"/>
           </a:xfrm>
           <a:prstGeom prst="rect">
             <a:avLst/>
@@ -3743,13 +3743,13 @@
             <a:pPr algn="ctr">
               <a:defRPr sz="2400" b="1">
                 <a:solidFill>
-                  <a:srgbClr val="000000"/>
+                  <a:srgbClr val="0F172A"/>
                 </a:solidFill>
                 <a:latin typeface="Calibri"/>
               </a:defRPr>
             </a:pPr>
             <a:r>
-              <a:t>AABHA AI (Cognitive Healthcare Companion)</a:t>
+              <a:t>AABHA AI (Assistive Healthcare Companion)</a:t>
             </a:r>
           </a:p>
         </p:txBody>
@@ -3763,7 +3763,7 @@
         <p:spPr>
           <a:xfrm>
             <a:off x="731520" y="1097280"/>
-            <a:ext cx="10698480" cy="457200"/>
+            <a:ext cx="10698480" cy="411480"/>
           </a:xfrm>
           <a:prstGeom prst="rect">
             <a:avLst/>
@@ -3777,7 +3777,7 @@
           <a:lstStyle/>
           <a:p>
             <a:pPr>
-              <a:defRPr sz="1600" b="1" u="sng">
+              <a:defRPr sz="1500" b="1" u="sng">
                 <a:solidFill>
                   <a:srgbClr val="0E5BAF"/>
                 </a:solidFill>
@@ -3797,8 +3797,8 @@
         </p:nvSpPr>
         <p:spPr>
           <a:xfrm>
-            <a:off x="731520" y="1554480"/>
-            <a:ext cx="10698480" cy="2011680"/>
+            <a:off x="731520" y="1508760"/>
+            <a:ext cx="10698480" cy="1554480"/>
           </a:xfrm>
           <a:prstGeom prst="rect">
             <a:avLst/>
@@ -3812,9 +3812,9 @@
           <a:lstStyle/>
           <a:p>
             <a:pPr>
-              <a:defRPr sz="1300" b="1">
-                <a:solidFill>
-                  <a:srgbClr val="000000"/>
+              <a:defRPr sz="1250" b="1">
+                <a:solidFill>
+                  <a:srgbClr val="0F172A"/>
                 </a:solidFill>
               </a:defRPr>
             </a:pPr>
@@ -3824,26 +3824,26 @@
           </a:p>
           <a:p>
             <a:pPr>
-              <a:defRPr sz="1200">
-                <a:solidFill>
-                  <a:srgbClr val="000000"/>
-                </a:solidFill>
-              </a:defRPr>
-            </a:pPr>
-            <a:r>
-              <a:t>   - AABHA AI is an intelligent, voice-first assistive platform for dementia/Alzheimer's patients, caregivers, and deaf &amp; mute individuals.</a:t>
+              <a:defRPr sz="1150">
+                <a:solidFill>
+                  <a:srgbClr val="0F172A"/>
+                </a:solidFill>
+              </a:defRPr>
+            </a:pPr>
+            <a:r>
+              <a:t>   - AABHA AI is an inclusive, voice-first assistive healthcare ecosystem designed for Alzheimer's/Dementia seniors, caregivers, and deaf &amp; mute individuals.</a:t>
             </a:r>
           </a:p>
           <a:p>
             <a:pPr>
-              <a:defRPr sz="1200">
-                <a:solidFill>
-                  <a:srgbClr val="000000"/>
-                </a:solidFill>
-              </a:defRPr>
-            </a:pPr>
-            <a:r>
-              <a:t>   - Features: Google Gemini 3.7/2.5 AI Action Agent (executes real CRUD commands in Hindi/Marathi/English), Spoken Voice Alarms with temple bells/vibration, SignBridge (ISL 21-point hand tracking teleconsultation), and Memory Passport.</a:t>
+              <a:defRPr sz="1150">
+                <a:solidFill>
+                  <a:srgbClr val="0F172A"/>
+                </a:solidFill>
+              </a:defRPr>
+            </a:pPr>
+            <a:r>
+              <a:t>   - Core Modules: 1) Gemini 3.7/2.5 AI Voice Action Agent (executes real CRUD commands in Hindi/Marathi/English); 2) Personalized Spoken Voice Alarms with temple bells; 3) SignBridge (ISL 21-point hand tracking teleconsultation); 4) Reminiscence Memory Passport &amp; Games.</a:t>
             </a:r>
           </a:p>
         </p:txBody>
@@ -3856,14 +3856,14 @@
         </p:nvSpPr>
         <p:spPr>
           <a:xfrm>
-            <a:off x="731520" y="3291840"/>
-            <a:ext cx="2514600" cy="1280160"/>
+            <a:off x="731520" y="3154680"/>
+            <a:ext cx="2514600" cy="1463040"/>
           </a:xfrm>
           <a:prstGeom prst="roundRect">
             <a:avLst/>
           </a:prstGeom>
           <a:solidFill>
-            <a:srgbClr val="F8FAFC"/>
+            <a:srgbClr val="EFF6FF"/>
           </a:solidFill>
           <a:ln w="19050">
             <a:solidFill>
@@ -3886,7 +3886,7 @@
           </a:fontRef>
         </p:style>
         <p:txBody>
-          <a:bodyPr rtlCol="0" anchor="ctr" wrap="square" tIns="91440" bIns="91440"/>
+          <a:bodyPr rtlCol="0" anchor="ctr" wrap="square" lIns="73152" tIns="73152" rIns="73152" bIns="73152"/>
           <a:lstStyle/>
           <a:p>
             <a:pPr algn="ctr">
@@ -3897,22 +3897,30 @@
               </a:defRPr>
             </a:pPr>
             <a:r>
-              <a:t>Patient / Elderly Input</a:t>
-            </a:r>
-          </a:p>
-          <a:p>
-            <a:pPr algn="ctr">
+              <a:t>1. Multi-Modal Input</a:t>
+            </a:r>
+          </a:p>
+          <a:p>
+            <a:pPr algn="l">
               <a:spcBef>
                 <a:spcPts val="300"/>
               </a:spcBef>
               <a:defRPr sz="1000">
                 <a:solidFill>
-                  <a:srgbClr val="475569"/>
-                </a:solidFill>
-              </a:defRPr>
-            </a:pPr>
-            <a:r>
-              <a:t>Voice Speech (HI/MR/EN) or 1-Tap UI Cards</a:t>
+                  <a:srgbClr val="0F172A"/>
+                </a:solidFill>
+              </a:defRPr>
+            </a:pPr>
+            <a:r>
+              <a:t>🎙️ Voice (Hindi/Marathi/English)</a:t>
+            </a:r>
+            <a:br/>
+            <a:r>
+              <a:t>🔘 1-Tap Touch Cards</a:t>
+            </a:r>
+            <a:br/>
+            <a:r>
+              <a:t>🤟 SignBridge Camera (ISL)</a:t>
             </a:r>
           </a:p>
         </p:txBody>
@@ -3925,14 +3933,14 @@
         </p:nvSpPr>
         <p:spPr>
           <a:xfrm>
-            <a:off x="3429000" y="3291840"/>
-            <a:ext cx="2514600" cy="1280160"/>
+            <a:off x="3429000" y="3154680"/>
+            <a:ext cx="2514600" cy="1463040"/>
           </a:xfrm>
           <a:prstGeom prst="roundRect">
             <a:avLst/>
           </a:prstGeom>
           <a:solidFill>
-            <a:srgbClr val="F8FAFC"/>
+            <a:srgbClr val="FAF5FF"/>
           </a:solidFill>
           <a:ln w="19050">
             <a:solidFill>
@@ -3955,7 +3963,7 @@
           </a:fontRef>
         </p:style>
         <p:txBody>
-          <a:bodyPr rtlCol="0" anchor="ctr" wrap="square" tIns="91440" bIns="91440"/>
+          <a:bodyPr rtlCol="0" anchor="ctr" wrap="square" lIns="73152" tIns="73152" rIns="73152" bIns="73152"/>
           <a:lstStyle/>
           <a:p>
             <a:pPr algn="ctr">
@@ -3966,22 +3974,30 @@
               </a:defRPr>
             </a:pPr>
             <a:r>
-              <a:t>Gemini AI Action Engine</a:t>
-            </a:r>
-          </a:p>
-          <a:p>
-            <a:pPr algn="ctr">
+              <a:t>2. AI Action Engine</a:t>
+            </a:r>
+          </a:p>
+          <a:p>
+            <a:pPr algn="l">
               <a:spcBef>
                 <a:spcPts val="300"/>
               </a:spcBef>
               <a:defRPr sz="1000">
                 <a:solidFill>
-                  <a:srgbClr val="475569"/>
-                </a:solidFill>
-              </a:defRPr>
-            </a:pPr>
-            <a:r>
-              <a:t>Zero-Hallucination Intent &amp; Entity Extraction</a:t>
+                  <a:srgbClr val="0F172A"/>
+                </a:solidFill>
+              </a:defRPr>
+            </a:pPr>
+            <a:r>
+              <a:t>🧠 Google Gemini 3.7 / 2.5</a:t>
+            </a:r>
+            <a:br/>
+            <a:r>
+              <a:t>🔄 Multi-Turn Memory Context</a:t>
+            </a:r>
+            <a:br/>
+            <a:r>
+              <a:t>⚡ Intent &amp; Parameter Extraction</a:t>
             </a:r>
           </a:p>
         </p:txBody>
@@ -3994,18 +4010,18 @@
         </p:nvSpPr>
         <p:spPr>
           <a:xfrm>
-            <a:off x="6126480" y="3291840"/>
-            <a:ext cx="2514600" cy="1280160"/>
+            <a:off x="6126480" y="3154680"/>
+            <a:ext cx="2514600" cy="1463040"/>
           </a:xfrm>
           <a:prstGeom prst="roundRect">
             <a:avLst/>
           </a:prstGeom>
           <a:solidFill>
-            <a:srgbClr val="F8FAFC"/>
+            <a:srgbClr val="F0FDF4"/>
           </a:solidFill>
           <a:ln w="19050">
             <a:solidFill>
-              <a:srgbClr val="109566"/>
+              <a:srgbClr val="059669"/>
             </a:solidFill>
           </a:ln>
         </p:spPr>
@@ -4024,33 +4040,41 @@
           </a:fontRef>
         </p:style>
         <p:txBody>
-          <a:bodyPr rtlCol="0" anchor="ctr" wrap="square" tIns="91440" bIns="91440"/>
+          <a:bodyPr rtlCol="0" anchor="ctr" wrap="square" lIns="73152" tIns="73152" rIns="73152" bIns="73152"/>
           <a:lstStyle/>
           <a:p>
             <a:pPr algn="ctr">
               <a:defRPr sz="1100" b="1">
                 <a:solidFill>
-                  <a:srgbClr val="109566"/>
-                </a:solidFill>
-              </a:defRPr>
-            </a:pPr>
-            <a:r>
-              <a:t>Database &amp; Alarm State</a:t>
-            </a:r>
-          </a:p>
-          <a:p>
-            <a:pPr algn="ctr">
+                  <a:srgbClr val="059669"/>
+                </a:solidFill>
+              </a:defRPr>
+            </a:pPr>
+            <a:r>
+              <a:t>3. Database &amp; Alarms</a:t>
+            </a:r>
+          </a:p>
+          <a:p>
+            <a:pPr algn="l">
               <a:spcBef>
                 <a:spcPts val="300"/>
               </a:spcBef>
               <a:defRPr sz="1000">
                 <a:solidFill>
-                  <a:srgbClr val="475569"/>
-                </a:solidFill>
-              </a:defRPr>
-            </a:pPr>
-            <a:r>
-              <a:t>PostgreSQL + Offline IndexedDB Sync</a:t>
+                  <a:srgbClr val="0F172A"/>
+                </a:solidFill>
+              </a:defRPr>
+            </a:pPr>
+            <a:r>
+              <a:t>💾 PostgreSQL (Prisma ORM)</a:t>
+            </a:r>
+            <a:br/>
+            <a:r>
+              <a:t>📶 100% Offline IndexedDB</a:t>
+            </a:r>
+            <a:br/>
+            <a:r>
+              <a:t>⏰ Voice Alarms &amp; Ringtone</a:t>
             </a:r>
           </a:p>
         </p:txBody>
@@ -4063,18 +4087,18 @@
         </p:nvSpPr>
         <p:spPr>
           <a:xfrm>
-            <a:off x="8823960" y="3291840"/>
-            <a:ext cx="2514600" cy="1280160"/>
+            <a:off x="8823960" y="3154680"/>
+            <a:ext cx="2514600" cy="1463040"/>
           </a:xfrm>
           <a:prstGeom prst="roundRect">
             <a:avLst/>
           </a:prstGeom>
           <a:solidFill>
-            <a:srgbClr val="F8FAFC"/>
+            <a:srgbClr val="FEF3C7"/>
           </a:solidFill>
           <a:ln w="19050">
             <a:solidFill>
-              <a:srgbClr val="0072C6"/>
+              <a:srgbClr val="1B3F8B"/>
             </a:solidFill>
           </a:ln>
         </p:spPr>
@@ -4093,33 +4117,41 @@
           </a:fontRef>
         </p:style>
         <p:txBody>
-          <a:bodyPr rtlCol="0" anchor="ctr" wrap="square" tIns="91440" bIns="91440"/>
+          <a:bodyPr rtlCol="0" anchor="ctr" wrap="square" lIns="73152" tIns="73152" rIns="73152" bIns="73152"/>
           <a:lstStyle/>
           <a:p>
             <a:pPr algn="ctr">
               <a:defRPr sz="1100" b="1">
                 <a:solidFill>
-                  <a:srgbClr val="0072C6"/>
-                </a:solidFill>
-              </a:defRPr>
-            </a:pPr>
-            <a:r>
-              <a:t>Verified Output &amp; Caregiver</a:t>
-            </a:r>
-          </a:p>
-          <a:p>
-            <a:pPr algn="ctr">
+                  <a:srgbClr val="1B3F8B"/>
+                </a:solidFill>
+              </a:defRPr>
+            </a:pPr>
+            <a:r>
+              <a:t>4. Verified Output</a:t>
+            </a:r>
+          </a:p>
+          <a:p>
+            <a:pPr algn="l">
               <a:spcBef>
                 <a:spcPts val="300"/>
               </a:spcBef>
               <a:defRPr sz="1000">
                 <a:solidFill>
-                  <a:srgbClr val="475569"/>
-                </a:solidFill>
-              </a:defRPr>
-            </a:pPr>
-            <a:r>
-              <a:t>Spoken Voice TTS + Dashboard Realtime Sync</a:t>
+                  <a:srgbClr val="0F172A"/>
+                </a:solidFill>
+              </a:defRPr>
+            </a:pPr>
+            <a:r>
+              <a:t>🔊 Regional Spoken Voice TTS</a:t>
+            </a:r>
+            <a:br/>
+            <a:r>
+              <a:t>📊 Caregiver Dashboard Sync</a:t>
+            </a:r>
+            <a:br/>
+            <a:r>
+              <a:t>🚨 Family SOS Emergency Alerts</a:t>
             </a:r>
           </a:p>
         </p:txBody>
@@ -4132,8 +4164,8 @@
         </p:nvSpPr>
         <p:spPr>
           <a:xfrm>
-            <a:off x="731520" y="4663440"/>
-            <a:ext cx="10698480" cy="1554480"/>
+            <a:off x="731520" y="4709160"/>
+            <a:ext cx="10698480" cy="1508760"/>
           </a:xfrm>
           <a:prstGeom prst="rect">
             <a:avLst/>
@@ -4147,9 +4179,9 @@
           <a:lstStyle/>
           <a:p>
             <a:pPr>
-              <a:defRPr sz="1300" b="1">
-                <a:solidFill>
-                  <a:srgbClr val="000000"/>
+              <a:defRPr sz="1250" b="1">
+                <a:solidFill>
+                  <a:srgbClr val="0F172A"/>
                 </a:solidFill>
               </a:defRPr>
             </a:pPr>
@@ -4160,23 +4192,23 @@
           <a:p>
             <a:pPr>
               <a:spcAft>
-                <a:spcPts val="400"/>
+                <a:spcPts val="300"/>
               </a:spcAft>
-              <a:defRPr sz="1200">
-                <a:solidFill>
-                  <a:srgbClr val="000000"/>
-                </a:solidFill>
-              </a:defRPr>
-            </a:pPr>
-            <a:r>
-              <a:t>   - Eliminates forgotten medications via proactive spoken reminders; reduces caregiver burnout by 70% and enables deaf patients to consult doctors via SignBridge.</a:t>
+              <a:defRPr sz="1150">
+                <a:solidFill>
+                  <a:srgbClr val="0F172A"/>
+                </a:solidFill>
+              </a:defRPr>
+            </a:pPr>
+            <a:r>
+              <a:t>   - Ensures 100% medication adherence via spoken alarms in native languages; cuts caregiver burnout by 70% and enables deaf patients to consult doctors via SignBridge.</a:t>
             </a:r>
           </a:p>
           <a:p>
             <a:pPr>
-              <a:defRPr sz="1300" b="1">
-                <a:solidFill>
-                  <a:srgbClr val="000000"/>
+              <a:defRPr sz="1250" b="1">
+                <a:solidFill>
+                  <a:srgbClr val="0F172A"/>
                 </a:solidFill>
               </a:defRPr>
             </a:pPr>
@@ -4186,14 +4218,14 @@
           </a:p>
           <a:p>
             <a:pPr>
-              <a:defRPr sz="1200">
-                <a:solidFill>
-                  <a:srgbClr val="000000"/>
-                </a:solidFill>
-              </a:defRPr>
-            </a:pPr>
-            <a:r>
-              <a:t>   - Zero-Hallucination Action Agent (modifies real database, never fakes actions) + 100% Offline-First Architecture (works in rural areas without internet).</a:t>
+              <a:defRPr sz="1150">
+                <a:solidFill>
+                  <a:srgbClr val="0F172A"/>
+                </a:solidFill>
+              </a:defRPr>
+            </a:pPr>
+            <a:r>
+              <a:t>   - Zero-Hallucination Action Agent (executes real DB writes, never fakes answers) + Dual-Modal Accessibility (Dementia Care + Indian Sign Language ISL in one app).</a:t>
             </a:r>
           </a:p>
         </p:txBody>
@@ -4327,7 +4359,7 @@
         </p:blipFill>
         <p:spPr>
           <a:xfrm>
-            <a:off x="9692640" y="228600"/>
+            <a:off x="9692640" y="201168"/>
             <a:ext cx="2103120" cy="1051560"/>
           </a:xfrm>
           <a:prstGeom prst="rect">
@@ -4343,8 +4375,8 @@
         </p:nvSpPr>
         <p:spPr>
           <a:xfrm>
-            <a:off x="731520" y="320040"/>
-            <a:ext cx="1645920" cy="914400"/>
+            <a:off x="640080" y="292608"/>
+            <a:ext cx="1691640" cy="914400"/>
           </a:xfrm>
           <a:prstGeom prst="ellipse">
             <a:avLst/>
@@ -4352,7 +4384,7 @@
           <a:solidFill>
             <a:srgbClr val="FFFFFF"/>
           </a:solidFill>
-          <a:ln w="25400">
+          <a:ln w="27940">
             <a:solidFill>
               <a:srgbClr val="7030A0"/>
             </a:solidFill>
@@ -4379,7 +4411,7 @@
             <a:pPr algn="ctr">
               <a:defRPr sz="1000">
                 <a:solidFill>
-                  <a:srgbClr val="000000"/>
+                  <a:srgbClr val="475569"/>
                 </a:solidFill>
               </a:defRPr>
             </a:pPr>
@@ -4409,8 +4441,8 @@
         </p:nvSpPr>
         <p:spPr>
           <a:xfrm>
-            <a:off x="2560320" y="320040"/>
-            <a:ext cx="6858000" cy="822960"/>
+            <a:off x="2468880" y="292608"/>
+            <a:ext cx="7040880" cy="822960"/>
           </a:xfrm>
           <a:prstGeom prst="rect">
             <a:avLst/>
@@ -4426,7 +4458,7 @@
             <a:pPr algn="ctr">
               <a:defRPr sz="2400" b="1">
                 <a:solidFill>
-                  <a:srgbClr val="000000"/>
+                  <a:srgbClr val="0F172A"/>
                 </a:solidFill>
                 <a:latin typeface="Calibri"/>
               </a:defRPr>
@@ -4445,8 +4477,8 @@
         </p:nvSpPr>
         <p:spPr>
           <a:xfrm>
-            <a:off x="731520" y="1188720"/>
-            <a:ext cx="10698480" cy="1463040"/>
+            <a:off x="731520" y="1143000"/>
+            <a:ext cx="10698480" cy="1371600"/>
           </a:xfrm>
           <a:prstGeom prst="rect">
             <a:avLst/>
@@ -4460,9 +4492,9 @@
           <a:lstStyle/>
           <a:p>
             <a:pPr>
-              <a:defRPr sz="1300" b="1">
-                <a:solidFill>
-                  <a:srgbClr val="000000"/>
+              <a:defRPr sz="1250" b="1">
+                <a:solidFill>
+                  <a:srgbClr val="0F172A"/>
                 </a:solidFill>
               </a:defRPr>
             </a:pPr>
@@ -4472,9 +4504,9 @@
           </a:p>
           <a:p>
             <a:pPr>
-              <a:defRPr sz="1150">
-                <a:solidFill>
-                  <a:srgbClr val="000000"/>
+              <a:defRPr sz="1100">
+                <a:solidFill>
+                  <a:srgbClr val="0F172A"/>
                 </a:solidFill>
               </a:defRPr>
             </a:pPr>
@@ -4484,9 +4516,9 @@
           </a:p>
           <a:p>
             <a:pPr>
-              <a:defRPr sz="1150">
-                <a:solidFill>
-                  <a:srgbClr val="000000"/>
+              <a:defRPr sz="1100">
+                <a:solidFill>
+                  <a:srgbClr val="0F172A"/>
                 </a:solidFill>
               </a:defRPr>
             </a:pPr>
@@ -4496,9 +4528,9 @@
           </a:p>
           <a:p>
             <a:pPr>
-              <a:defRPr sz="1150">
-                <a:solidFill>
-                  <a:srgbClr val="000000"/>
+              <a:defRPr sz="1100">
+                <a:solidFill>
+                  <a:srgbClr val="0F172A"/>
                 </a:solidFill>
               </a:defRPr>
             </a:pPr>
@@ -4516,7 +4548,7 @@
         </p:nvSpPr>
         <p:spPr>
           <a:xfrm>
-            <a:off x="731520" y="2651760"/>
+            <a:off x="731520" y="2560320"/>
             <a:ext cx="10698480" cy="365760"/>
           </a:xfrm>
           <a:prstGeom prst="rect">
@@ -4531,9 +4563,9 @@
           <a:lstStyle/>
           <a:p>
             <a:pPr>
-              <a:defRPr sz="1300" b="1">
-                <a:solidFill>
-                  <a:srgbClr val="000000"/>
+              <a:defRPr sz="1250" b="1">
+                <a:solidFill>
+                  <a:srgbClr val="0F172A"/>
                 </a:solidFill>
               </a:defRPr>
             </a:pPr>
@@ -4551,14 +4583,14 @@
         </p:nvSpPr>
         <p:spPr>
           <a:xfrm>
-            <a:off x="731520" y="3108960"/>
-            <a:ext cx="2514600" cy="2194560"/>
+            <a:off x="731520" y="3017520"/>
+            <a:ext cx="2514600" cy="2286000"/>
           </a:xfrm>
           <a:prstGeom prst="roundRect">
             <a:avLst/>
           </a:prstGeom>
           <a:solidFill>
-            <a:srgbClr val="F8FAFC"/>
+            <a:srgbClr val="EFF6FF"/>
           </a:solidFill>
           <a:ln w="19050">
             <a:solidFill>
@@ -4581,7 +4613,7 @@
           </a:fontRef>
         </p:style>
         <p:txBody>
-          <a:bodyPr rtlCol="0" anchor="ctr" wrap="square" lIns="109728" tIns="109728" rIns="109728" bIns="109728"/>
+          <a:bodyPr rtlCol="0" anchor="ctr" wrap="square" tIns="91440" bIns="91440"/>
           <a:lstStyle/>
           <a:p>
             <a:pPr algn="ctr">
@@ -4592,7 +4624,7 @@
               </a:defRPr>
             </a:pPr>
             <a:r>
-              <a:t>Layer 1: Input Channels</a:t>
+              <a:t>Layer 1: Multi-Modal Input</a:t>
             </a:r>
           </a:p>
           <a:p>
@@ -4602,7 +4634,7 @@
               </a:spcBef>
               <a:defRPr sz="1050">
                 <a:solidFill>
-                  <a:srgbClr val="000000"/>
+                  <a:srgbClr val="0F172A"/>
                 </a:solidFill>
               </a:defRPr>
             </a:pPr>
@@ -4611,7 +4643,7 @@
             </a:r>
             <a:br/>
             <a:r>
-              <a:t>🔘 1-Tap UI Cards &amp; Widgets</a:t>
+              <a:t>🔘 1-Tap Touch Cards &amp; Widgets</a:t>
             </a:r>
             <a:br/>
             <a:r>
@@ -4628,14 +4660,14 @@
         </p:nvSpPr>
         <p:spPr>
           <a:xfrm>
-            <a:off x="3429000" y="3108960"/>
-            <a:ext cx="2514600" cy="2194560"/>
+            <a:off x="3429000" y="3017520"/>
+            <a:ext cx="2514600" cy="2286000"/>
           </a:xfrm>
           <a:prstGeom prst="roundRect">
             <a:avLst/>
           </a:prstGeom>
           <a:solidFill>
-            <a:srgbClr val="F8FAFC"/>
+            <a:srgbClr val="FAF5FF"/>
           </a:solidFill>
           <a:ln w="19050">
             <a:solidFill>
@@ -4658,7 +4690,7 @@
           </a:fontRef>
         </p:style>
         <p:txBody>
-          <a:bodyPr rtlCol="0" anchor="ctr" wrap="square" lIns="109728" tIns="109728" rIns="109728" bIns="109728"/>
+          <a:bodyPr rtlCol="0" anchor="ctr" wrap="square" tIns="91440" bIns="91440"/>
           <a:lstStyle/>
           <a:p>
             <a:pPr algn="ctr">
@@ -4679,7 +4711,7 @@
               </a:spcBef>
               <a:defRPr sz="1050">
                 <a:solidFill>
-                  <a:srgbClr val="000000"/>
+                  <a:srgbClr val="0F172A"/>
                 </a:solidFill>
               </a:defRPr>
             </a:pPr>
@@ -4705,18 +4737,18 @@
         </p:nvSpPr>
         <p:spPr>
           <a:xfrm>
-            <a:off x="6126480" y="3108960"/>
-            <a:ext cx="2514600" cy="2194560"/>
+            <a:off x="6126480" y="3017520"/>
+            <a:ext cx="2514600" cy="2286000"/>
           </a:xfrm>
           <a:prstGeom prst="roundRect">
             <a:avLst/>
           </a:prstGeom>
           <a:solidFill>
-            <a:srgbClr val="F8FAFC"/>
+            <a:srgbClr val="F0FDF4"/>
           </a:solidFill>
           <a:ln w="19050">
             <a:solidFill>
-              <a:srgbClr val="109566"/>
+              <a:srgbClr val="059669"/>
             </a:solidFill>
           </a:ln>
         </p:spPr>
@@ -4735,13 +4767,13 @@
           </a:fontRef>
         </p:style>
         <p:txBody>
-          <a:bodyPr rtlCol="0" anchor="ctr" wrap="square" lIns="109728" tIns="109728" rIns="109728" bIns="109728"/>
+          <a:bodyPr rtlCol="0" anchor="ctr" wrap="square" tIns="91440" bIns="91440"/>
           <a:lstStyle/>
           <a:p>
             <a:pPr algn="ctr">
               <a:defRPr sz="1100" b="1">
                 <a:solidFill>
-                  <a:srgbClr val="109566"/>
+                  <a:srgbClr val="059669"/>
                 </a:solidFill>
               </a:defRPr>
             </a:pPr>
@@ -4756,7 +4788,7 @@
               </a:spcBef>
               <a:defRPr sz="1050">
                 <a:solidFill>
-                  <a:srgbClr val="000000"/>
+                  <a:srgbClr val="0F172A"/>
                 </a:solidFill>
               </a:defRPr>
             </a:pPr>
@@ -4782,18 +4814,18 @@
         </p:nvSpPr>
         <p:spPr>
           <a:xfrm>
-            <a:off x="8823960" y="3108960"/>
-            <a:ext cx="2514600" cy="2194560"/>
+            <a:off x="8823960" y="3017520"/>
+            <a:ext cx="2514600" cy="2286000"/>
           </a:xfrm>
           <a:prstGeom prst="roundRect">
             <a:avLst/>
           </a:prstGeom>
           <a:solidFill>
-            <a:srgbClr val="F8FAFC"/>
+            <a:srgbClr val="FEF3C7"/>
           </a:solidFill>
           <a:ln w="19050">
             <a:solidFill>
-              <a:srgbClr val="0072C6"/>
+              <a:srgbClr val="1B3F8B"/>
             </a:solidFill>
           </a:ln>
         </p:spPr>
@@ -4812,13 +4844,13 @@
           </a:fontRef>
         </p:style>
         <p:txBody>
-          <a:bodyPr rtlCol="0" anchor="ctr" wrap="square" lIns="109728" tIns="109728" rIns="109728" bIns="109728"/>
+          <a:bodyPr rtlCol="0" anchor="ctr" wrap="square" tIns="91440" bIns="91440"/>
           <a:lstStyle/>
           <a:p>
             <a:pPr algn="ctr">
               <a:defRPr sz="1100" b="1">
                 <a:solidFill>
-                  <a:srgbClr val="0072C6"/>
+                  <a:srgbClr val="1B3F8B"/>
                 </a:solidFill>
               </a:defRPr>
             </a:pPr>
@@ -4833,7 +4865,7 @@
               </a:spcBef>
               <a:defRPr sz="1050">
                 <a:solidFill>
-                  <a:srgbClr val="000000"/>
+                  <a:srgbClr val="0F172A"/>
                 </a:solidFill>
               </a:defRPr>
             </a:pPr>
@@ -4876,7 +4908,7 @@
             <a:pPr algn="ctr">
               <a:defRPr sz="1150" b="1">
                 <a:solidFill>
-                  <a:srgbClr val="109566"/>
+                  <a:srgbClr val="059669"/>
                 </a:solidFill>
               </a:defRPr>
             </a:pPr>
@@ -5015,7 +5047,7 @@
         </p:blipFill>
         <p:spPr>
           <a:xfrm>
-            <a:off x="9692640" y="228600"/>
+            <a:off x="9692640" y="201168"/>
             <a:ext cx="2103120" cy="1051560"/>
           </a:xfrm>
           <a:prstGeom prst="rect">
@@ -5031,8 +5063,8 @@
         </p:nvSpPr>
         <p:spPr>
           <a:xfrm>
-            <a:off x="731520" y="320040"/>
-            <a:ext cx="1645920" cy="914400"/>
+            <a:off x="640080" y="292608"/>
+            <a:ext cx="1691640" cy="914400"/>
           </a:xfrm>
           <a:prstGeom prst="ellipse">
             <a:avLst/>
@@ -5040,7 +5072,7 @@
           <a:solidFill>
             <a:srgbClr val="FFFFFF"/>
           </a:solidFill>
-          <a:ln w="25400">
+          <a:ln w="27940">
             <a:solidFill>
               <a:srgbClr val="7030A0"/>
             </a:solidFill>
@@ -5067,7 +5099,7 @@
             <a:pPr algn="ctr">
               <a:defRPr sz="1000">
                 <a:solidFill>
-                  <a:srgbClr val="000000"/>
+                  <a:srgbClr val="475569"/>
                 </a:solidFill>
               </a:defRPr>
             </a:pPr>
@@ -5097,8 +5129,8 @@
         </p:nvSpPr>
         <p:spPr>
           <a:xfrm>
-            <a:off x="2560320" y="320040"/>
-            <a:ext cx="6858000" cy="822960"/>
+            <a:off x="2468880" y="292608"/>
+            <a:ext cx="7040880" cy="822960"/>
           </a:xfrm>
           <a:prstGeom prst="rect">
             <a:avLst/>
@@ -5114,7 +5146,7 @@
             <a:pPr algn="ctr">
               <a:defRPr sz="2400" b="1">
                 <a:solidFill>
-                  <a:srgbClr val="000000"/>
+                  <a:srgbClr val="0F172A"/>
                 </a:solidFill>
                 <a:latin typeface="Calibri"/>
               </a:defRPr>
@@ -5133,7 +5165,7 @@
         </p:nvSpPr>
         <p:spPr>
           <a:xfrm>
-            <a:off x="731520" y="1188720"/>
+            <a:off x="731520" y="1143000"/>
             <a:ext cx="10698480" cy="1280160"/>
           </a:xfrm>
           <a:prstGeom prst="rect">
@@ -5148,9 +5180,9 @@
           <a:lstStyle/>
           <a:p>
             <a:pPr>
-              <a:defRPr sz="1300" b="1">
-                <a:solidFill>
-                  <a:srgbClr val="000000"/>
+              <a:defRPr sz="1250" b="1">
+                <a:solidFill>
+                  <a:srgbClr val="0F172A"/>
                 </a:solidFill>
               </a:defRPr>
             </a:pPr>
@@ -5160,9 +5192,9 @@
           </a:p>
           <a:p>
             <a:pPr>
-              <a:defRPr sz="1150">
-                <a:solidFill>
-                  <a:srgbClr val="000000"/>
+              <a:defRPr sz="1100">
+                <a:solidFill>
+                  <a:srgbClr val="0F172A"/>
                 </a:solidFill>
               </a:defRPr>
             </a:pPr>
@@ -5172,9 +5204,9 @@
           </a:p>
           <a:p>
             <a:pPr>
-              <a:defRPr sz="1150">
-                <a:solidFill>
-                  <a:srgbClr val="000000"/>
+              <a:defRPr sz="1100">
+                <a:solidFill>
+                  <a:srgbClr val="0F172A"/>
                 </a:solidFill>
               </a:defRPr>
             </a:pPr>
@@ -5207,9 +5239,9 @@
           <a:lstStyle/>
           <a:p>
             <a:pPr>
-              <a:defRPr sz="1300" b="1">
-                <a:solidFill>
-                  <a:srgbClr val="000000"/>
+              <a:defRPr sz="1250" b="1">
+                <a:solidFill>
+                  <a:srgbClr val="0F172A"/>
                 </a:solidFill>
               </a:defRPr>
             </a:pPr>
@@ -5292,7 +5324,7 @@
           </a:solidFill>
           <a:ln w="15240">
             <a:solidFill>
-              <a:srgbClr val="109566"/>
+              <a:srgbClr val="059669"/>
             </a:solidFill>
           </a:ln>
         </p:spPr>
@@ -5317,7 +5349,7 @@
             <a:pPr algn="ctr">
               <a:defRPr sz="1100" b="1">
                 <a:solidFill>
-                  <a:srgbClr val="109566"/>
+                  <a:srgbClr val="059669"/>
                 </a:solidFill>
               </a:defRPr>
             </a:pPr>
@@ -5396,7 +5428,7 @@
             <a:avLst/>
           </a:prstGeom>
           <a:solidFill>
-            <a:srgbClr val="F0FDF4"/>
+            <a:srgbClr val="EFF6FF"/>
           </a:solidFill>
           <a:ln w="15240">
             <a:solidFill>
@@ -5504,7 +5536,7 @@
             <a:avLst/>
           </a:prstGeom>
           <a:solidFill>
-            <a:srgbClr val="F0FDF4"/>
+            <a:srgbClr val="FAF5FF"/>
           </a:solidFill>
           <a:ln w="15240">
             <a:solidFill>
@@ -5672,7 +5704,7 @@
         </p:blipFill>
         <p:spPr>
           <a:xfrm>
-            <a:off x="9692640" y="228600"/>
+            <a:off x="9692640" y="201168"/>
             <a:ext cx="2103120" cy="1051560"/>
           </a:xfrm>
           <a:prstGeom prst="rect">
@@ -5688,8 +5720,8 @@
         </p:nvSpPr>
         <p:spPr>
           <a:xfrm>
-            <a:off x="731520" y="320040"/>
-            <a:ext cx="1645920" cy="914400"/>
+            <a:off x="640080" y="292608"/>
+            <a:ext cx="1691640" cy="914400"/>
           </a:xfrm>
           <a:prstGeom prst="ellipse">
             <a:avLst/>
@@ -5697,7 +5729,7 @@
           <a:solidFill>
             <a:srgbClr val="FFFFFF"/>
           </a:solidFill>
-          <a:ln w="25400">
+          <a:ln w="27940">
             <a:solidFill>
               <a:srgbClr val="7030A0"/>
             </a:solidFill>
@@ -5724,7 +5756,7 @@
             <a:pPr algn="ctr">
               <a:defRPr sz="1000">
                 <a:solidFill>
-                  <a:srgbClr val="000000"/>
+                  <a:srgbClr val="475569"/>
                 </a:solidFill>
               </a:defRPr>
             </a:pPr>
@@ -5754,8 +5786,8 @@
         </p:nvSpPr>
         <p:spPr>
           <a:xfrm>
-            <a:off x="2560320" y="320040"/>
-            <a:ext cx="6858000" cy="822960"/>
+            <a:off x="2468880" y="292608"/>
+            <a:ext cx="7040880" cy="822960"/>
           </a:xfrm>
           <a:prstGeom prst="rect">
             <a:avLst/>
@@ -5771,7 +5803,7 @@
             <a:pPr algn="ctr">
               <a:defRPr sz="2400" b="1">
                 <a:solidFill>
-                  <a:srgbClr val="000000"/>
+                  <a:srgbClr val="0F172A"/>
                 </a:solidFill>
                 <a:latin typeface="Calibri"/>
               </a:defRPr>
@@ -5790,7 +5822,7 @@
         </p:nvSpPr>
         <p:spPr>
           <a:xfrm>
-            <a:off x="731520" y="1188720"/>
+            <a:off x="731520" y="1143000"/>
             <a:ext cx="10698480" cy="365760"/>
           </a:xfrm>
           <a:prstGeom prst="rect">
@@ -5805,9 +5837,9 @@
           <a:lstStyle/>
           <a:p>
             <a:pPr>
-              <a:defRPr sz="1300" b="1">
-                <a:solidFill>
-                  <a:srgbClr val="000000"/>
+              <a:defRPr sz="1250" b="1">
+                <a:solidFill>
+                  <a:srgbClr val="0F172A"/>
                 </a:solidFill>
               </a:defRPr>
             </a:pPr>
@@ -5825,14 +5857,14 @@
         </p:nvSpPr>
         <p:spPr>
           <a:xfrm>
-            <a:off x="731520" y="1645920"/>
+            <a:off x="731520" y="1600200"/>
             <a:ext cx="3429000" cy="1463040"/>
           </a:xfrm>
           <a:prstGeom prst="roundRect">
             <a:avLst/>
           </a:prstGeom>
           <a:solidFill>
-            <a:srgbClr val="F8FAFC"/>
+            <a:srgbClr val="EFF6FF"/>
           </a:solidFill>
           <a:ln w="19050">
             <a:solidFill>
@@ -5876,7 +5908,7 @@
               </a:spcBef>
               <a:defRPr sz="1050">
                 <a:solidFill>
-                  <a:srgbClr val="000000"/>
+                  <a:srgbClr val="0F172A"/>
                 </a:solidFill>
               </a:defRPr>
             </a:pPr>
@@ -5894,18 +5926,18 @@
         </p:nvSpPr>
         <p:spPr>
           <a:xfrm>
-            <a:off x="4389120" y="1645920"/>
+            <a:off x="4389120" y="1600200"/>
             <a:ext cx="3429000" cy="1463040"/>
           </a:xfrm>
           <a:prstGeom prst="roundRect">
             <a:avLst/>
           </a:prstGeom>
           <a:solidFill>
-            <a:srgbClr val="F8FAFC"/>
+            <a:srgbClr val="F0FDF4"/>
           </a:solidFill>
           <a:ln w="19050">
             <a:solidFill>
-              <a:srgbClr val="109566"/>
+              <a:srgbClr val="059669"/>
             </a:solidFill>
           </a:ln>
         </p:spPr>
@@ -5930,7 +5962,7 @@
             <a:pPr algn="ctr">
               <a:defRPr sz="1200" b="1">
                 <a:solidFill>
-                  <a:srgbClr val="109566"/>
+                  <a:srgbClr val="059669"/>
                 </a:solidFill>
               </a:defRPr>
             </a:pPr>
@@ -5945,7 +5977,7 @@
               </a:spcBef>
               <a:defRPr sz="1050">
                 <a:solidFill>
-                  <a:srgbClr val="000000"/>
+                  <a:srgbClr val="0F172A"/>
                 </a:solidFill>
               </a:defRPr>
             </a:pPr>
@@ -5963,14 +5995,14 @@
         </p:nvSpPr>
         <p:spPr>
           <a:xfrm>
-            <a:off x="8046720" y="1645920"/>
+            <a:off x="8046720" y="1600200"/>
             <a:ext cx="3429000" cy="1463040"/>
           </a:xfrm>
           <a:prstGeom prst="roundRect">
             <a:avLst/>
           </a:prstGeom>
           <a:solidFill>
-            <a:srgbClr val="F8FAFC"/>
+            <a:srgbClr val="FAF5FF"/>
           </a:solidFill>
           <a:ln w="19050">
             <a:solidFill>
@@ -6014,7 +6046,7 @@
               </a:spcBef>
               <a:defRPr sz="1050">
                 <a:solidFill>
-                  <a:srgbClr val="000000"/>
+                  <a:srgbClr val="0F172A"/>
                 </a:solidFill>
               </a:defRPr>
             </a:pPr>
@@ -6032,7 +6064,7 @@
         </p:nvSpPr>
         <p:spPr>
           <a:xfrm>
-            <a:off x="731520" y="3291840"/>
+            <a:off x="731520" y="3246120"/>
             <a:ext cx="10698480" cy="365760"/>
           </a:xfrm>
           <a:prstGeom prst="rect">
@@ -6047,9 +6079,9 @@
           <a:lstStyle/>
           <a:p>
             <a:pPr>
-              <a:defRPr sz="1300" b="1">
-                <a:solidFill>
-                  <a:srgbClr val="000000"/>
+              <a:defRPr sz="1250" b="1">
+                <a:solidFill>
+                  <a:srgbClr val="0F172A"/>
                 </a:solidFill>
               </a:defRPr>
             </a:pPr>
@@ -6067,14 +6099,14 @@
         </p:nvSpPr>
         <p:spPr>
           <a:xfrm>
-            <a:off x="731520" y="3749039"/>
-            <a:ext cx="3429000" cy="2011680"/>
+            <a:off x="731520" y="3703320"/>
+            <a:ext cx="3429000" cy="2057400"/>
           </a:xfrm>
           <a:prstGeom prst="roundRect">
             <a:avLst/>
           </a:prstGeom>
           <a:solidFill>
-            <a:srgbClr val="F8FAFC"/>
+            <a:srgbClr val="EFF6FF"/>
           </a:solidFill>
           <a:ln w="19050">
             <a:solidFill>
@@ -6118,7 +6150,7 @@
               </a:spcBef>
               <a:defRPr sz="1050">
                 <a:solidFill>
-                  <a:srgbClr val="000000"/>
+                  <a:srgbClr val="0F172A"/>
                 </a:solidFill>
               </a:defRPr>
             </a:pPr>
@@ -6136,18 +6168,18 @@
         </p:nvSpPr>
         <p:spPr>
           <a:xfrm>
-            <a:off x="4389120" y="3749039"/>
-            <a:ext cx="3429000" cy="2011680"/>
+            <a:off x="4389120" y="3703320"/>
+            <a:ext cx="3429000" cy="2057400"/>
           </a:xfrm>
           <a:prstGeom prst="roundRect">
             <a:avLst/>
           </a:prstGeom>
           <a:solidFill>
-            <a:srgbClr val="F8FAFC"/>
+            <a:srgbClr val="F0FDF4"/>
           </a:solidFill>
           <a:ln w="19050">
             <a:solidFill>
-              <a:srgbClr val="109566"/>
+              <a:srgbClr val="059669"/>
             </a:solidFill>
           </a:ln>
         </p:spPr>
@@ -6172,7 +6204,7 @@
             <a:pPr algn="ctr">
               <a:defRPr sz="1200" b="1">
                 <a:solidFill>
-                  <a:srgbClr val="109566"/>
+                  <a:srgbClr val="059669"/>
                 </a:solidFill>
               </a:defRPr>
             </a:pPr>
@@ -6187,7 +6219,7 @@
               </a:spcBef>
               <a:defRPr sz="1050">
                 <a:solidFill>
-                  <a:srgbClr val="000000"/>
+                  <a:srgbClr val="0F172A"/>
                 </a:solidFill>
               </a:defRPr>
             </a:pPr>
@@ -6205,14 +6237,14 @@
         </p:nvSpPr>
         <p:spPr>
           <a:xfrm>
-            <a:off x="8046720" y="3749039"/>
-            <a:ext cx="3429000" cy="2011680"/>
+            <a:off x="8046720" y="3703320"/>
+            <a:ext cx="3429000" cy="2057400"/>
           </a:xfrm>
           <a:prstGeom prst="roundRect">
             <a:avLst/>
           </a:prstGeom>
           <a:solidFill>
-            <a:srgbClr val="F8FAFC"/>
+            <a:srgbClr val="FAF5FF"/>
           </a:solidFill>
           <a:ln w="19050">
             <a:solidFill>
@@ -6256,7 +6288,7 @@
               </a:spcBef>
               <a:defRPr sz="1050">
                 <a:solidFill>
-                  <a:srgbClr val="000000"/>
+                  <a:srgbClr val="0F172A"/>
                 </a:solidFill>
               </a:defRPr>
             </a:pPr>
@@ -6395,7 +6427,7 @@
         </p:blipFill>
         <p:spPr>
           <a:xfrm>
-            <a:off x="9692640" y="228600"/>
+            <a:off x="9692640" y="201168"/>
             <a:ext cx="2103120" cy="1051560"/>
           </a:xfrm>
           <a:prstGeom prst="rect">
@@ -6411,8 +6443,8 @@
         </p:nvSpPr>
         <p:spPr>
           <a:xfrm>
-            <a:off x="731520" y="320040"/>
-            <a:ext cx="1645920" cy="914400"/>
+            <a:off x="640080" y="292608"/>
+            <a:ext cx="1691640" cy="914400"/>
           </a:xfrm>
           <a:prstGeom prst="ellipse">
             <a:avLst/>
@@ -6420,7 +6452,7 @@
           <a:solidFill>
             <a:srgbClr val="FFFFFF"/>
           </a:solidFill>
-          <a:ln w="25400">
+          <a:ln w="27940">
             <a:solidFill>
               <a:srgbClr val="7030A0"/>
             </a:solidFill>
@@ -6447,7 +6479,7 @@
             <a:pPr algn="ctr">
               <a:defRPr sz="1000">
                 <a:solidFill>
-                  <a:srgbClr val="000000"/>
+                  <a:srgbClr val="475569"/>
                 </a:solidFill>
               </a:defRPr>
             </a:pPr>
@@ -6477,8 +6509,8 @@
         </p:nvSpPr>
         <p:spPr>
           <a:xfrm>
-            <a:off x="2560320" y="320040"/>
-            <a:ext cx="6858000" cy="822960"/>
+            <a:off x="2468880" y="292608"/>
+            <a:ext cx="7040880" cy="822960"/>
           </a:xfrm>
           <a:prstGeom prst="rect">
             <a:avLst/>
@@ -6494,7 +6526,7 @@
             <a:pPr algn="ctr">
               <a:defRPr sz="2400" b="1">
                 <a:solidFill>
-                  <a:srgbClr val="000000"/>
+                  <a:srgbClr val="0F172A"/>
                 </a:solidFill>
                 <a:latin typeface="Calibri"/>
               </a:defRPr>
@@ -6513,7 +6545,7 @@
         </p:nvSpPr>
         <p:spPr>
           <a:xfrm>
-            <a:off x="731520" y="1188720"/>
+            <a:off x="731520" y="1143000"/>
             <a:ext cx="10698480" cy="365760"/>
           </a:xfrm>
           <a:prstGeom prst="rect">
@@ -6528,9 +6560,9 @@
           <a:lstStyle/>
           <a:p>
             <a:pPr>
-              <a:defRPr sz="1300" b="1">
-                <a:solidFill>
-                  <a:srgbClr val="000000"/>
+              <a:defRPr sz="1250" b="1">
+                <a:solidFill>
+                  <a:srgbClr val="0F172A"/>
                 </a:solidFill>
               </a:defRPr>
             </a:pPr>
@@ -6548,14 +6580,14 @@
         </p:nvSpPr>
         <p:spPr>
           <a:xfrm>
-            <a:off x="731520" y="1645920"/>
-            <a:ext cx="5303520" cy="4389120"/>
+            <a:off x="731520" y="1600200"/>
+            <a:ext cx="5303520" cy="4434840"/>
           </a:xfrm>
           <a:prstGeom prst="roundRect">
             <a:avLst/>
           </a:prstGeom>
           <a:solidFill>
-            <a:srgbClr val="F8FAFC"/>
+            <a:srgbClr val="EFF6FF"/>
           </a:solidFill>
           <a:ln w="19050">
             <a:solidFill>
@@ -6599,7 +6631,7 @@
             <a:pPr>
               <a:defRPr sz="1100" b="1">
                 <a:solidFill>
-                  <a:srgbClr val="000000"/>
+                  <a:srgbClr val="0F172A"/>
                 </a:solidFill>
               </a:defRPr>
             </a:pPr>
@@ -6626,7 +6658,7 @@
             <a:pPr>
               <a:defRPr sz="1100" b="1">
                 <a:solidFill>
-                  <a:srgbClr val="000000"/>
+                  <a:srgbClr val="0F172A"/>
                 </a:solidFill>
               </a:defRPr>
             </a:pPr>
@@ -6653,7 +6685,7 @@
             <a:pPr>
               <a:defRPr sz="1100" b="1">
                 <a:solidFill>
-                  <a:srgbClr val="000000"/>
+                  <a:srgbClr val="0F172A"/>
                 </a:solidFill>
               </a:defRPr>
             </a:pPr>
@@ -6680,7 +6712,7 @@
             <a:pPr>
               <a:defRPr sz="1100" b="1">
                 <a:solidFill>
-                  <a:srgbClr val="000000"/>
+                  <a:srgbClr val="0F172A"/>
                 </a:solidFill>
               </a:defRPr>
             </a:pPr>
@@ -6713,18 +6745,18 @@
         </p:nvSpPr>
         <p:spPr>
           <a:xfrm>
-            <a:off x="6309360" y="1645920"/>
-            <a:ext cx="5150815" cy="4389120"/>
+            <a:off x="6309360" y="1600200"/>
+            <a:ext cx="5150815" cy="4434840"/>
           </a:xfrm>
           <a:prstGeom prst="roundRect">
             <a:avLst/>
           </a:prstGeom>
           <a:solidFill>
-            <a:srgbClr val="F8FAFC"/>
+            <a:srgbClr val="F0FDF4"/>
           </a:solidFill>
           <a:ln w="19050">
             <a:solidFill>
-              <a:srgbClr val="109566"/>
+              <a:srgbClr val="059669"/>
             </a:solidFill>
           </a:ln>
         </p:spPr>
@@ -6752,19 +6784,19 @@
               </a:spcAft>
               <a:defRPr sz="1250" b="1">
                 <a:solidFill>
-                  <a:srgbClr val="109566"/>
-                </a:solidFill>
-              </a:defRPr>
-            </a:pPr>
-            <a:r>
-              <a:t>🔗 Live Project Links &amp; Team Details</a:t>
+                  <a:srgbClr val="059669"/>
+                </a:solidFill>
+              </a:defRPr>
+            </a:pPr>
+            <a:r>
+              <a:t>🔗 Live Project Links &amp; Team Deliverables</a:t>
             </a:r>
           </a:p>
           <a:p>
             <a:pPr>
               <a:defRPr sz="1100" b="1">
                 <a:solidFill>
-                  <a:srgbClr val="000000"/>
+                  <a:srgbClr val="0F172A"/>
                 </a:solidFill>
               </a:defRPr>
             </a:pPr>
@@ -6779,7 +6811,7 @@
               </a:spcAft>
               <a:defRPr sz="1100" b="1">
                 <a:solidFill>
-                  <a:srgbClr val="000000"/>
+                  <a:srgbClr val="0F172A"/>
                 </a:solidFill>
               </a:defRPr>
             </a:pPr>
@@ -6791,7 +6823,7 @@
             <a:pPr>
               <a:defRPr sz="1100" b="1">
                 <a:solidFill>
-                  <a:srgbClr val="000000"/>
+                  <a:srgbClr val="0F172A"/>
                 </a:solidFill>
               </a:defRPr>
             </a:pPr>
@@ -6806,7 +6838,7 @@
               </a:spcAft>
               <a:defRPr sz="1100" b="0">
                 <a:solidFill>
-                  <a:srgbClr val="000000"/>
+                  <a:srgbClr val="0F172A"/>
                 </a:solidFill>
               </a:defRPr>
             </a:pPr>
@@ -6818,7 +6850,7 @@
             <a:pPr>
               <a:defRPr sz="1100" b="1">
                 <a:solidFill>
-                  <a:srgbClr val="000000"/>
+                  <a:srgbClr val="0F172A"/>
                 </a:solidFill>
               </a:defRPr>
             </a:pPr>
@@ -6845,7 +6877,7 @@
             <a:pPr>
               <a:defRPr sz="1100" b="1">
                 <a:solidFill>
-                  <a:srgbClr val="000000"/>
+                  <a:srgbClr val="0F172A"/>
                 </a:solidFill>
               </a:defRPr>
             </a:pPr>
@@ -6872,12 +6904,12 @@
             <a:pPr>
               <a:defRPr sz="1100" b="1">
                 <a:solidFill>
-                  <a:srgbClr val="000000"/>
-                </a:solidFill>
-              </a:defRPr>
-            </a:pPr>
-            <a:r>
-              <a:t>• Interactive Demo Mode:</a:t>
+                  <a:srgbClr val="0F172A"/>
+                </a:solidFill>
+              </a:defRPr>
+            </a:pPr>
+            <a:r>
+              <a:t>• Interactive Demo Tour:</a:t>
             </a:r>
           </a:p>
           <a:p>
@@ -6887,7 +6919,7 @@
               </a:spcAft>
               <a:defRPr sz="1100" b="0">
                 <a:solidFill>
-                  <a:srgbClr val="000000"/>
+                  <a:srgbClr val="0F172A"/>
                 </a:solidFill>
               </a:defRPr>
             </a:pPr>
@@ -6899,7 +6931,7 @@
             <a:pPr>
               <a:defRPr sz="1100" b="1">
                 <a:solidFill>
-                  <a:srgbClr val="000000"/>
+                  <a:srgbClr val="0F172A"/>
                 </a:solidFill>
               </a:defRPr>
             </a:pPr>
@@ -6914,7 +6946,7 @@
               </a:spcAft>
               <a:defRPr sz="1100" b="0">
                 <a:solidFill>
-                  <a:srgbClr val="000000"/>
+                  <a:srgbClr val="0F172A"/>
                 </a:solidFill>
               </a:defRPr>
             </a:pPr>

--- a/SIH_2025_PBCOE_Nexora_AABHA_AI.pptx
+++ b/SIH_2025_PBCOE_Nexora_AABHA_AI.pptx
@@ -3183,14 +3183,14 @@
               </a:defRPr>
             </a:pPr>
             <a:r>
-              <a:t>@SIH Idea submission- Template                                                                                                                                                 1</a:t>
+              <a:t>@SIH 2026 Idea submission- Template                                                                                                                                              1</a:t>
             </a:r>
           </a:p>
         </p:txBody>
       </p:sp>
       <p:pic>
         <p:nvPicPr>
-          <p:cNvPr id="4" name="Picture 3" descr="sih_logo.png"/>
+          <p:cNvPr id="4" name="Picture 3" descr="sih_logo_2026.png"/>
           <p:cNvPicPr>
             <a:picLocks noChangeAspect="1"/>
           </p:cNvPicPr>
@@ -3243,7 +3243,7 @@
               </a:defRPr>
             </a:pPr>
             <a:r>
-              <a:t>SMART INDIA HACKATHON 2025</a:t>
+              <a:t>SMART INDIA HACKATHON 2026</a:t>
             </a:r>
           </a:p>
         </p:txBody>
@@ -3372,7 +3372,7 @@
                   <a:srgbClr val="0F172A"/>
                 </a:solidFill>
               </a:rPr>
-              <a:t>AI-Powered Cognitive Healthcare &amp; Assistive Companion for Elderly Dementia Patients</a:t>
+              <a:t>AI-Powered Cognitive Healthcare, Routine Assistance &amp; Inclusive Companion for Elderly Dementia Patients &amp; Specially-Abled Individuals</a:t>
             </a:r>
           </a:p>
           <a:p>
@@ -3418,7 +3418,7 @@
                   <a:srgbClr val="0F172A"/>
                 </a:solidFill>
               </a:rPr>
-              <a:t>Software (Web, Mobile &amp; Offline Edge AI)</a:t>
+              <a:t>Software (Web, Mobile PWA &amp; Offline Edge AI)</a:t>
             </a:r>
           </a:p>
           <a:p>
@@ -3623,14 +3623,14 @@
               </a:defRPr>
             </a:pPr>
             <a:r>
-              <a:t>@SIH Idea submission- Template                                                                                                                                                 2</a:t>
+              <a:t>@SIH 2026 Idea submission- Template                                                                                                                                              2</a:t>
             </a:r>
           </a:p>
         </p:txBody>
       </p:sp>
       <p:pic>
         <p:nvPicPr>
-          <p:cNvPr id="4" name="Picture 3" descr="sih_logo.png"/>
+          <p:cNvPr id="4" name="Picture 3" descr="sih_logo_2026.png"/>
           <p:cNvPicPr>
             <a:picLocks noChangeAspect="1"/>
           </p:cNvPicPr>
@@ -3843,7 +3843,7 @@
               </a:defRPr>
             </a:pPr>
             <a:r>
-              <a:t>   - Core Modules: 1) Gemini 3.7/2.5 AI Voice Action Agent (executes real CRUD commands in Hindi/Marathi/English); 2) Personalized Spoken Voice Alarms with temple bells; 3) SignBridge (ISL 21-point hand tracking teleconsultation); 4) Reminiscence Memory Passport &amp; Games.</a:t>
+              <a:t>   - Core Modules: 1) Gemini 3.7/2.5 AI Voice Action Agent (executes real CRUD commands in Hindi/Marathi/English); 2) Personalized Spoken Voice Alarms with temple bells; 3) SignBridge (ISL 21-point hand tracking teleconsultation); 4) Reminiscence Memory Passport &amp; Cognitive Games.</a:t>
             </a:r>
           </a:p>
         </p:txBody>
@@ -4338,14 +4338,14 @@
               </a:defRPr>
             </a:pPr>
             <a:r>
-              <a:t>@SIH Idea submission- Template                                                                                                                                                 3</a:t>
+              <a:t>@SIH 2026 Idea submission- Template                                                                                                                                              3</a:t>
             </a:r>
           </a:p>
         </p:txBody>
       </p:sp>
       <p:pic>
         <p:nvPicPr>
-          <p:cNvPr id="4" name="Picture 3" descr="sih_logo.png"/>
+          <p:cNvPr id="4" name="Picture 3" descr="sih_logo_2026.png"/>
           <p:cNvPicPr>
             <a:picLocks noChangeAspect="1"/>
           </p:cNvPicPr>
@@ -5026,14 +5026,14 @@
               </a:defRPr>
             </a:pPr>
             <a:r>
-              <a:t>@SIH Idea submission- Template                                                                                                                                                 4</a:t>
+              <a:t>@SIH 2026 Idea submission- Template                                                                                                                                              4</a:t>
             </a:r>
           </a:p>
         </p:txBody>
       </p:sp>
       <p:pic>
         <p:nvPicPr>
-          <p:cNvPr id="4" name="Picture 3" descr="sih_logo.png"/>
+          <p:cNvPr id="4" name="Picture 3" descr="sih_logo_2026.png"/>
           <p:cNvPicPr>
             <a:picLocks noChangeAspect="1"/>
           </p:cNvPicPr>
@@ -5683,14 +5683,14 @@
               </a:defRPr>
             </a:pPr>
             <a:r>
-              <a:t>@SIH Idea submission- Template                                                                                                                                                 5</a:t>
+              <a:t>@SIH 2026 Idea submission- Template                                                                                                                                              5</a:t>
             </a:r>
           </a:p>
         </p:txBody>
       </p:sp>
       <p:pic>
         <p:nvPicPr>
-          <p:cNvPr id="4" name="Picture 3" descr="sih_logo.png"/>
+          <p:cNvPr id="4" name="Picture 3" descr="sih_logo_2026.png"/>
           <p:cNvPicPr>
             <a:picLocks noChangeAspect="1"/>
           </p:cNvPicPr>
@@ -6406,14 +6406,14 @@
               </a:defRPr>
             </a:pPr>
             <a:r>
-              <a:t>@SIH Idea submission- Template                                                                                                                                                 6</a:t>
+              <a:t>@SIH 2026 Idea submission- Template                                                                                                                                              6</a:t>
             </a:r>
           </a:p>
         </p:txBody>
       </p:sp>
       <p:pic>
         <p:nvPicPr>
-          <p:cNvPr id="4" name="Picture 3" descr="sih_logo.png"/>
+          <p:cNvPr id="4" name="Picture 3" descr="sih_logo_2026.png"/>
           <p:cNvPicPr>
             <a:picLocks noChangeAspect="1"/>
           </p:cNvPicPr>
@@ -6651,7 +6651,7 @@
               </a:defRPr>
             </a:pPr>
             <a:r>
-              <a:t>  Global Action Plan on the Public Health Response to Dementia (2017–2025) on assistive tech &amp; reminiscence therapy.</a:t>
+              <a:t>  Global Action Plan on the Public Health Response to Dementia (2017–2026) on assistive tech &amp; reminiscence therapy.</a:t>
             </a:r>
           </a:p>
           <a:p>
